--- a/docs/thesis/presentation/PRESENTACION_TESIS_DATA_MOVEMENT_ACTUALIZADA.pptx
+++ b/docs/thesis/presentation/PRESENTACION_TESIS_DATA_MOVEMENT_ACTUALIZADA.pptx
@@ -1139,7 +1139,7 @@
           <a:lstStyle xmlns:a="http://schemas.openxmlformats.org/drawingml/2006/main"/>
           <a:p xmlns:a="http://schemas.openxmlformats.org/drawingml/2006/main">
             <a:r>
-              <a:t>Checkpoint 2026-10-03: Gate I cerrado localmente en 3f44f30 con suite e integraciones PASS. I14 pendiente. Gate V tiene matriz y oráculos preparados; la campaña requiere workers activos y una decisión posterior. No se iniciaron workflows nuevos.</a:t>
+              <a:t>Gate I cerró en 3f44f30. Matriz propuesta: 117 runs base y 12 de sensibilidad estructural, total 129 workflows nuevos. El generador histórico limita balanced-local a 3 etapas o 4 ramas; el bloque estructural usa same-w1. I14 debe usar Analyzer v1. No se ejecutaron workflows nuevos.</a:t>
             </a:r>
           </a:p>
         </p:txBody>
@@ -13501,7 +13501,7 @@
                 <a:ea typeface="Aptos"/>
                 <a:cs typeface="Aptos"/>
               </a:rPr>
-              <a:t>Gate I cerró en 3f44f30. La campaña de 117 casos requiere workers activos, runner I14 y decisión de ejecución.</a:t>
+              <a:t>Gate I cerró en 3f44f30. Se proponen 129 workflows: 117 base y 12 estructurales. Requieren workers activos y decisión de ejecución.</a:t>
             </a:r>
             <a:endParaRPr sz="1120"/>
           </a:p>

--- a/docs/thesis/presentation/PRESENTACION_TESIS_DATA_MOVEMENT_ACTUALIZADA.pptx
+++ b/docs/thesis/presentation/PRESENTACION_TESIS_DATA_MOVEMENT_ACTUALIZADA.pptx
@@ -2,32 +2,32 @@
 <file path=ppt/presentation.xml><?xml version="1.0" encoding="utf-8"?>
 <p:presentation xmlns:p="http://schemas.openxmlformats.org/presentationml/2006/main">
   <p:sldMasterIdLst>
-    <p:sldMasterId xmlns:r="http://schemas.openxmlformats.org/officeDocument/2006/relationships" id="2147483648" r:id="R687cf539ca9b48a4"/>
+    <p:sldMasterId xmlns:r="http://schemas.openxmlformats.org/officeDocument/2006/relationships" id="2147483648" r:id="R0f6ffa690a9f4b04"/>
   </p:sldMasterIdLst>
   <p:notesMasterIdLst>
-    <p:notesMasterId xmlns:r="http://schemas.openxmlformats.org/officeDocument/2006/relationships" r:id="Rbc5071017f8e49fc"/>
+    <p:notesMasterId xmlns:r="http://schemas.openxmlformats.org/officeDocument/2006/relationships" r:id="R0e2edbb972ac494d"/>
   </p:notesMasterIdLst>
   <p:sldIdLst>
-    <p:sldId xmlns:r="http://schemas.openxmlformats.org/officeDocument/2006/relationships" id="256" r:id="R35062474ec6f4018"/>
-    <p:sldId xmlns:r="http://schemas.openxmlformats.org/officeDocument/2006/relationships" id="257" r:id="R36afcad63a994774"/>
-    <p:sldId xmlns:r="http://schemas.openxmlformats.org/officeDocument/2006/relationships" id="258" r:id="R8f005f1b4bbe41fe"/>
-    <p:sldId xmlns:r="http://schemas.openxmlformats.org/officeDocument/2006/relationships" id="259" r:id="R32787a824bdc4bcf"/>
-    <p:sldId xmlns:r="http://schemas.openxmlformats.org/officeDocument/2006/relationships" id="260" r:id="R5126d6cf16df4bc0"/>
-    <p:sldId xmlns:r="http://schemas.openxmlformats.org/officeDocument/2006/relationships" id="261" r:id="R6322056725a34a93"/>
-    <p:sldId xmlns:r="http://schemas.openxmlformats.org/officeDocument/2006/relationships" id="262" r:id="R0494f89de61d4edb"/>
-    <p:sldId xmlns:r="http://schemas.openxmlformats.org/officeDocument/2006/relationships" id="263" r:id="R1851c9ea067444c3"/>
-    <p:sldId xmlns:r="http://schemas.openxmlformats.org/officeDocument/2006/relationships" id="264" r:id="R4229f3af77c24111"/>
-    <p:sldId xmlns:r="http://schemas.openxmlformats.org/officeDocument/2006/relationships" id="265" r:id="R378bc56223764c51"/>
-    <p:sldId xmlns:r="http://schemas.openxmlformats.org/officeDocument/2006/relationships" id="266" r:id="R75204735549c42fc"/>
-    <p:sldId xmlns:r="http://schemas.openxmlformats.org/officeDocument/2006/relationships" id="267" r:id="Ra05bafc44e044033"/>
-    <p:sldId xmlns:r="http://schemas.openxmlformats.org/officeDocument/2006/relationships" id="268" r:id="R5963b67e608a42a0"/>
-    <p:sldId xmlns:r="http://schemas.openxmlformats.org/officeDocument/2006/relationships" id="269" r:id="R7aa174d9a3324df4"/>
-    <p:sldId xmlns:r="http://schemas.openxmlformats.org/officeDocument/2006/relationships" id="270" r:id="Rf11bdae6bdff4007"/>
-    <p:sldId xmlns:r="http://schemas.openxmlformats.org/officeDocument/2006/relationships" id="271" r:id="R864a631edcdd4106"/>
-    <p:sldId xmlns:r="http://schemas.openxmlformats.org/officeDocument/2006/relationships" id="272" r:id="R590d27cc35284f46"/>
-    <p:sldId xmlns:r="http://schemas.openxmlformats.org/officeDocument/2006/relationships" id="273" r:id="R799b62dbcc924628"/>
-    <p:sldId xmlns:r="http://schemas.openxmlformats.org/officeDocument/2006/relationships" id="274" r:id="R880404c595f14176"/>
-    <p:sldId xmlns:r="http://schemas.openxmlformats.org/officeDocument/2006/relationships" id="275" r:id="R5eae251698a24790"/>
+    <p:sldId xmlns:r="http://schemas.openxmlformats.org/officeDocument/2006/relationships" id="256" r:id="R1cef9bf3b32e40b7"/>
+    <p:sldId xmlns:r="http://schemas.openxmlformats.org/officeDocument/2006/relationships" id="257" r:id="R487e7a0df9764015"/>
+    <p:sldId xmlns:r="http://schemas.openxmlformats.org/officeDocument/2006/relationships" id="258" r:id="Rb1d122d0f5844947"/>
+    <p:sldId xmlns:r="http://schemas.openxmlformats.org/officeDocument/2006/relationships" id="259" r:id="R94ccbf56918042d6"/>
+    <p:sldId xmlns:r="http://schemas.openxmlformats.org/officeDocument/2006/relationships" id="260" r:id="R87688300cff044d4"/>
+    <p:sldId xmlns:r="http://schemas.openxmlformats.org/officeDocument/2006/relationships" id="261" r:id="R8da1ae81caf646f5"/>
+    <p:sldId xmlns:r="http://schemas.openxmlformats.org/officeDocument/2006/relationships" id="262" r:id="Rab12aeff418b46f3"/>
+    <p:sldId xmlns:r="http://schemas.openxmlformats.org/officeDocument/2006/relationships" id="263" r:id="Rb7b02a25ec334be5"/>
+    <p:sldId xmlns:r="http://schemas.openxmlformats.org/officeDocument/2006/relationships" id="264" r:id="R8a0bc7d7d66b4eb8"/>
+    <p:sldId xmlns:r="http://schemas.openxmlformats.org/officeDocument/2006/relationships" id="265" r:id="Rfde06fc3e0c146a7"/>
+    <p:sldId xmlns:r="http://schemas.openxmlformats.org/officeDocument/2006/relationships" id="266" r:id="R6f24ebd6141f4d19"/>
+    <p:sldId xmlns:r="http://schemas.openxmlformats.org/officeDocument/2006/relationships" id="267" r:id="R78af687340514760"/>
+    <p:sldId xmlns:r="http://schemas.openxmlformats.org/officeDocument/2006/relationships" id="268" r:id="R1dbbbc4bc16d4378"/>
+    <p:sldId xmlns:r="http://schemas.openxmlformats.org/officeDocument/2006/relationships" id="269" r:id="R21b1b26ed315477a"/>
+    <p:sldId xmlns:r="http://schemas.openxmlformats.org/officeDocument/2006/relationships" id="270" r:id="Re265ee52d5314bb5"/>
+    <p:sldId xmlns:r="http://schemas.openxmlformats.org/officeDocument/2006/relationships" id="271" r:id="R3ac94ab50f9444ea"/>
+    <p:sldId xmlns:r="http://schemas.openxmlformats.org/officeDocument/2006/relationships" id="272" r:id="Ra7462bcbbf84443d"/>
+    <p:sldId xmlns:r="http://schemas.openxmlformats.org/officeDocument/2006/relationships" id="273" r:id="R6f6895f8c50344b9"/>
+    <p:sldId xmlns:r="http://schemas.openxmlformats.org/officeDocument/2006/relationships" id="274" r:id="Re40370b03f044fb6"/>
+    <p:sldId xmlns:r="http://schemas.openxmlformats.org/officeDocument/2006/relationships" id="275" r:id="Rb572ac2e18c34348"/>
   </p:sldIdLst>
   <p:sldSz cx="12191695" cy="6858000"/>
   <p:notesSz cx="6858000" cy="9144000"/>
@@ -714,7 +714,7 @@
           <a:lstStyle xmlns:a="http://schemas.openxmlformats.org/drawingml/2006/main"/>
           <a:p xmlns:a="http://schemas.openxmlformats.org/drawingml/2006/main">
             <a:r>
-              <a:t>La metodología académica comprende caracterización, formalización, operacionalización y evaluación controlada. Los gates documentan aseguramiento del proyecto. Gate I cerró en 3f44f30; I14 y Gate V aún no se ejecutan.</a:t>
+              <a:t>La metodología conecta la brecha, formalización, operacionalización del Analyzer y evaluación controlada con oráculos. Coverage y las precondiciones de evidencia determinan si M_obs y DME aplican. Los estados de Gate I, I14 y Gate V quedan como información de respaldo del proyecto, fuera del cuerpo principal.</a:t>
             </a:r>
           </a:p>
         </p:txBody>
@@ -784,7 +784,7 @@
           <a:lstStyle xmlns:a="http://schemas.openxmlformats.org/drawingml/2006/main"/>
           <a:p xmlns:a="http://schemas.openxmlformats.org/drawingml/2006/main">
             <a:r>
-              <a:t>Pipeline observado en pegasus_movement/analyzer_v1.py: loaders Pegasus y HTCondor history; parsing; normalización de identidades y ubicaciones; detección del ExecutionModelProfile y adapter condorio; reconstrucción del dataflow; RequiredMovement y manifests/DeclaredMovement; extracción de TransferEvidence; reconciliation; métricas; JSON/TSV y diagnósticos. El CLI recibe --run, --history-file y --out. No consulta el pool en vivo.</a:t>
+              <a:t>Diagrama editable del flujo conceptual de Analyzer v1. El workflow y el placement observado alimentan RequiredMovement, el límite lógico. El perfil Pegasus/HTCondor condorio determina DeclaredMovement. HTCondor history aporta atributos de ejecución que se reconcilian con evidencia por job; Coverage se calcula sobre ocurrencias científicas esperadas. ObservedMovement y DME se informan únicamente con Coverage=1 y sus demás precondiciones. El manifest es declaración, no observación; el CLI opera sobre artefactos preservados y no consulta el pool en vivo.</a:t>
             </a:r>
             <a:endParaRPr/>
           </a:p>
@@ -1068,7 +1068,7 @@
           <a:lstStyle xmlns:a="http://schemas.openxmlformats.org/drawingml/2006/main"/>
           <a:p xmlns:a="http://schemas.openxmlformats.org/drawingml/2006/main">
             <a:r>
-              <a:t>Las limitaciones fortalecen la presentación porque muestran que la métrica no se sobrevende.</a:t>
+              <a:t>Los dos esquemas comparan el límite lógico file-centric bajo el placement observado con una ruta conceptual de staging condorio que puede pasar por el master. El salto intermedio explica por qué el movimiento confirmado puede superar M_req en ciertos casos; no se afirma que todos los jobs sigan idéntica ruta ni se infiere ahorro alcanzable. Worker-to-worker sirve como referencia conceptual: si Coverage=1 y M_obs=M_req&gt;0, DME=1. La métrica conserva su definición. El Analyzer reconcilia evidencia por job, no realiza packet tracing y no evalúa optimalidad del scheduler.</a:t>
             </a:r>
             <a:endParaRPr/>
           </a:p>
@@ -1139,7 +1139,17 @@
           <a:lstStyle xmlns:a="http://schemas.openxmlformats.org/drawingml/2006/main"/>
           <a:p xmlns:a="http://schemas.openxmlformats.org/drawingml/2006/main">
             <a:r>
-              <a:t>Gate I cerró en 3f44f30. Matriz propuesta: 117 runs base y 12 de sensibilidad estructural, total 129 workflows nuevos. El generador histórico limita balanced-local a 3 etapas o 4 ramas; el bloque estructural usa same-w1. I14 debe usar Analyzer v1. No se ejecutaron workflows nuevos.</a:t>
+              <a:t>Uso: detectar movimiento científico adicional respecto al mínimo lógico, diagnosticar staging por job, comparar patrones y placements, apoyar decisiones arquitectónicas y evitar confundir DME con rendimiento. Límites: la métrica no mide FLOPs, uso de CPU/GPU, runtime, bandwidth ni costo; tampoco determina si el scheduler es óptimo ni optimiza placement.</a:t>
+            </a:r>
+          </a:p>
+          <a:p xmlns:a="http://schemas.openxmlformats.org/drawingml/2006/main">
+            <a:r>
+              <a:t/>
+            </a:r>
+          </a:p>
+          <a:p xmlns:a="http://schemas.openxmlformats.org/drawingml/2006/main">
+            <a:r>
+              <a:t>Respaldo de estado del proyecto: Gate R/D e I0–I13 cerrados; Gate I cerró en 3f44f30. I14 y Gate V siguen sin iniciar. La matriz propone 129 workflows y todos están NOT_RUN. Los workers no anunciaban startd en la última captura.</a:t>
             </a:r>
           </a:p>
         </p:txBody>
@@ -1974,8 +1984,8 @@
   </p:cSld>
   <p:clrMap bg1="lt1" tx1="dk1" bg2="lt2" tx2="dk2" accent1="accent1" accent2="accent2" accent3="accent3" accent4="accent4" accent5="accent5" accent6="accent6" hlink="hlink" folHlink="folHlink"/>
   <p:sldLayoutIdLst>
-    <p:sldLayoutId xmlns:r="http://schemas.openxmlformats.org/officeDocument/2006/relationships" id="2147483649" r:id="R721c72168ec24d05"/>
-    <p:sldLayoutId xmlns:r="http://schemas.openxmlformats.org/officeDocument/2006/relationships" id="2147483650" r:id="R9940845eb62342e5"/>
+    <p:sldLayoutId xmlns:r="http://schemas.openxmlformats.org/officeDocument/2006/relationships" id="2147483649" r:id="R29f98064a7c34eeb"/>
+    <p:sldLayoutId xmlns:r="http://schemas.openxmlformats.org/officeDocument/2006/relationships" id="2147483650" r:id="Rfb59c49a163b4c46"/>
   </p:sldLayoutIdLst>
   <p:hf sldNum="0" hdr="0" ftr="0" dt="0"/>
   <p:txStyles>
@@ -5509,9 +5519,10 @@
             <a:prstDash val="solid"/>
           </a:ln>
         </p:spPr>
-        <p:txBody xmlns:a="http://schemas.openxmlformats.org/drawingml/2006/main">
-          <a:bodyPr/>
-          <a:p/>
+        <p:txBody>
+          <a:bodyPr xmlns:a="http://schemas.openxmlformats.org/drawingml/2006/main"/>
+          <a:lstStyle xmlns:a="http://schemas.openxmlformats.org/drawingml/2006/main"/>
+          <a:p xmlns:a="http://schemas.openxmlformats.org/drawingml/2006/main"/>
         </p:txBody>
       </p:sp>
       <p:sp>
@@ -5690,9 +5701,10 @@
             <a:prstDash val="solid"/>
           </a:ln>
         </p:spPr>
-        <p:txBody xmlns:a="http://schemas.openxmlformats.org/drawingml/2006/main">
-          <a:bodyPr/>
-          <a:p/>
+        <p:txBody>
+          <a:bodyPr xmlns:a="http://schemas.openxmlformats.org/drawingml/2006/main"/>
+          <a:lstStyle xmlns:a="http://schemas.openxmlformats.org/drawingml/2006/main"/>
+          <a:p xmlns:a="http://schemas.openxmlformats.org/drawingml/2006/main"/>
         </p:txBody>
       </p:sp>
       <p:sp>
@@ -5818,9 +5830,10 @@
             <a:tailEnd type="triangle"/>
           </a:ln>
         </p:spPr>
-        <p:txBody xmlns:a="http://schemas.openxmlformats.org/drawingml/2006/main">
-          <a:bodyPr/>
-          <a:p/>
+        <p:txBody>
+          <a:bodyPr xmlns:a="http://schemas.openxmlformats.org/drawingml/2006/main"/>
+          <a:lstStyle xmlns:a="http://schemas.openxmlformats.org/drawingml/2006/main"/>
+          <a:p xmlns:a="http://schemas.openxmlformats.org/drawingml/2006/main"/>
         </p:txBody>
       </p:sp>
       <p:sp>
@@ -5857,9 +5870,10 @@
             <a:prstDash val="solid"/>
           </a:ln>
         </p:spPr>
-        <p:txBody xmlns:a="http://schemas.openxmlformats.org/drawingml/2006/main">
-          <a:bodyPr/>
-          <a:p/>
+        <p:txBody>
+          <a:bodyPr xmlns:a="http://schemas.openxmlformats.org/drawingml/2006/main"/>
+          <a:lstStyle xmlns:a="http://schemas.openxmlformats.org/drawingml/2006/main"/>
+          <a:p xmlns:a="http://schemas.openxmlformats.org/drawingml/2006/main"/>
         </p:txBody>
       </p:sp>
       <p:sp>
@@ -5985,9 +5999,10 @@
             <a:tailEnd type="triangle"/>
           </a:ln>
         </p:spPr>
-        <p:txBody xmlns:a="http://schemas.openxmlformats.org/drawingml/2006/main">
-          <a:bodyPr/>
-          <a:p/>
+        <p:txBody>
+          <a:bodyPr xmlns:a="http://schemas.openxmlformats.org/drawingml/2006/main"/>
+          <a:lstStyle xmlns:a="http://schemas.openxmlformats.org/drawingml/2006/main"/>
+          <a:p xmlns:a="http://schemas.openxmlformats.org/drawingml/2006/main"/>
         </p:txBody>
       </p:sp>
       <p:sp>
@@ -6024,9 +6039,10 @@
             <a:prstDash val="solid"/>
           </a:ln>
         </p:spPr>
-        <p:txBody xmlns:a="http://schemas.openxmlformats.org/drawingml/2006/main">
-          <a:bodyPr/>
-          <a:p/>
+        <p:txBody>
+          <a:bodyPr xmlns:a="http://schemas.openxmlformats.org/drawingml/2006/main"/>
+          <a:lstStyle xmlns:a="http://schemas.openxmlformats.org/drawingml/2006/main"/>
+          <a:p xmlns:a="http://schemas.openxmlformats.org/drawingml/2006/main"/>
         </p:txBody>
       </p:sp>
       <p:sp>
@@ -6152,9 +6168,10 @@
             <a:tailEnd type="triangle"/>
           </a:ln>
         </p:spPr>
-        <p:txBody xmlns:a="http://schemas.openxmlformats.org/drawingml/2006/main">
-          <a:bodyPr/>
-          <a:p/>
+        <p:txBody>
+          <a:bodyPr xmlns:a="http://schemas.openxmlformats.org/drawingml/2006/main"/>
+          <a:lstStyle xmlns:a="http://schemas.openxmlformats.org/drawingml/2006/main"/>
+          <a:p xmlns:a="http://schemas.openxmlformats.org/drawingml/2006/main"/>
         </p:txBody>
       </p:sp>
       <p:sp>
@@ -6191,9 +6208,10 @@
             <a:prstDash val="solid"/>
           </a:ln>
         </p:spPr>
-        <p:txBody xmlns:a="http://schemas.openxmlformats.org/drawingml/2006/main">
-          <a:bodyPr/>
-          <a:p/>
+        <p:txBody>
+          <a:bodyPr xmlns:a="http://schemas.openxmlformats.org/drawingml/2006/main"/>
+          <a:lstStyle xmlns:a="http://schemas.openxmlformats.org/drawingml/2006/main"/>
+          <a:p xmlns:a="http://schemas.openxmlformats.org/drawingml/2006/main"/>
         </p:txBody>
       </p:sp>
       <p:sp>
@@ -6321,9 +6339,10 @@
             <a:prstDash val="solid"/>
           </a:ln>
         </p:spPr>
-        <p:txBody xmlns:a="http://schemas.openxmlformats.org/drawingml/2006/main">
-          <a:bodyPr/>
-          <a:p/>
+        <p:txBody>
+          <a:bodyPr xmlns:a="http://schemas.openxmlformats.org/drawingml/2006/main"/>
+          <a:lstStyle xmlns:a="http://schemas.openxmlformats.org/drawingml/2006/main"/>
+          <a:p xmlns:a="http://schemas.openxmlformats.org/drawingml/2006/main"/>
         </p:txBody>
       </p:sp>
       <p:sp>
@@ -6399,18 +6418,19 @@
             </a:avLst>
           </a:prstGeom>
           <a:solidFill xmlns:a="http://schemas.openxmlformats.org/drawingml/2006/main">
-            <a:srgbClr val="FEF3C7"/>
+            <a:srgbClr val="EAF2FF"/>
           </a:solidFill>
-          <a:ln xmlns:a="http://schemas.openxmlformats.org/drawingml/2006/main" w="10160">
+          <a:ln xmlns:a="http://schemas.openxmlformats.org/drawingml/2006/main" w="9525">
             <a:solidFill>
-              <a:srgbClr val="FCD34D"/>
+              <a:srgbClr val="A8C4EA"/>
             </a:solidFill>
             <a:prstDash val="solid"/>
           </a:ln>
         </p:spPr>
-        <p:txBody xmlns:a="http://schemas.openxmlformats.org/drawingml/2006/main">
-          <a:bodyPr/>
-          <a:p/>
+        <p:txBody>
+          <a:bodyPr xmlns:a="http://schemas.openxmlformats.org/drawingml/2006/main"/>
+          <a:lstStyle xmlns:a="http://schemas.openxmlformats.org/drawingml/2006/main"/>
+          <a:p xmlns:a="http://schemas.openxmlformats.org/drawingml/2006/main"/>
         </p:txBody>
       </p:sp>
       <p:sp>
@@ -6449,13 +6469,13 @@
             <a:r>
               <a:rPr sz="1200" b="1">
                 <a:solidFill>
-                  <a:srgbClr val="92400E"/>
-                </a:solidFill>
-                <a:latin typeface="Aptos"/>
-                <a:ea typeface="Aptos"/>
-                <a:cs typeface="Aptos"/>
-              </a:rPr>
-              <a:t>Estado 03-10-2026: Gate I CLOSED; I14 y Gate V pendientes.</a:t>
+                  <a:srgbClr val="142D45"/>
+                </a:solidFill>
+                <a:latin typeface="Aptos"/>
+                <a:ea typeface="Aptos"/>
+                <a:cs typeface="Aptos"/>
+              </a:rPr>
+              <a:t>La validación usa oráculos controlados; Coverage y evidencia determinan si DME puede informarse.</a:t>
             </a:r>
             <a:endParaRPr sz="1200"/>
           </a:p>
@@ -6491,9 +6511,10 @@
             <a:prstDash val="solid"/>
           </a:ln>
         </p:spPr>
-        <p:txBody xmlns:a="http://schemas.openxmlformats.org/drawingml/2006/main">
-          <a:bodyPr/>
-          <a:p/>
+        <p:txBody>
+          <a:bodyPr xmlns:a="http://schemas.openxmlformats.org/drawingml/2006/main"/>
+          <a:lstStyle xmlns:a="http://schemas.openxmlformats.org/drawingml/2006/main"/>
+          <a:p xmlns:a="http://schemas.openxmlformats.org/drawingml/2006/main"/>
         </p:txBody>
       </p:sp>
       <p:sp>
@@ -6731,1108 +6752,9 @@
                 <a:ea typeface="Aptos Display"/>
                 <a:cs typeface="Aptos Display"/>
               </a:rPr>
-              <a:t>12. Arquitectura de Analyzer v1</a:t>
+              <a:t>12. Arquitectura Analyzer v1: flujo de la métrica</a:t>
             </a:r>
             <a:endParaRPr sz="2500"/>
-          </a:p>
-        </p:txBody>
-      </p:sp>
-      <p:sp>
-        <p:nvSpPr>
-          <p:cNvPr id="5" name="Shape 3">
-            <a:extLst xmlns:a="http://schemas.openxmlformats.org/drawingml/2006/main">
-              <a:ext uri="{FF2B5EF4-FFF2-40B4-BE49-F238E27FC236}">
-                <a16:creationId xmlns:a16="http://schemas.microsoft.com/office/drawing/2014/main" id="{0ACD08A6-F0CE-4BD1-98B9-7EA8284D41D9}"/>
-              </a:ext>
-            </a:extLst>
-          </p:cNvPr>
-          <p:cNvSpPr>
-            <a:spLocks xmlns:a="http://schemas.openxmlformats.org/drawingml/2006/main" noGrp="1"/>
-          </p:cNvSpPr>
-          <p:nvPr/>
-        </p:nvSpPr>
-        <p:spPr>
-          <a:xfrm xmlns:a="http://schemas.openxmlformats.org/drawingml/2006/main">
-            <a:off x="502920" y="1847088"/>
-            <a:ext cx="1417320" cy="530352"/>
-          </a:xfrm>
-          <a:prstGeom xmlns:a="http://schemas.openxmlformats.org/drawingml/2006/main" prst="roundRect">
-            <a:avLst>
-              <a:gd name="adj" fmla="val 13793"/>
-            </a:avLst>
-          </a:prstGeom>
-          <a:solidFill xmlns:a="http://schemas.openxmlformats.org/drawingml/2006/main">
-            <a:srgbClr val="FFFFFF"/>
-          </a:solidFill>
-          <a:ln xmlns:a="http://schemas.openxmlformats.org/drawingml/2006/main" w="10160">
-            <a:solidFill>
-              <a:srgbClr val="2563EB"/>
-            </a:solidFill>
-            <a:prstDash val="solid"/>
-          </a:ln>
-        </p:spPr>
-      </p:sp>
-      <p:sp>
-        <p:nvSpPr>
-          <p:cNvPr id="6" name="Text 4">
-            <a:extLst xmlns:a="http://schemas.openxmlformats.org/drawingml/2006/main">
-              <a:ext uri="{FF2B5EF4-FFF2-40B4-BE49-F238E27FC236}">
-                <a16:creationId xmlns:a16="http://schemas.microsoft.com/office/drawing/2014/main" id="{98261A4D-4ACB-4599-B4C8-978B7A503C50}"/>
-              </a:ext>
-            </a:extLst>
-          </p:cNvPr>
-          <p:cNvSpPr>
-            <a:spLocks xmlns:a="http://schemas.openxmlformats.org/drawingml/2006/main" noGrp="1"/>
-          </p:cNvSpPr>
-          <p:nvPr/>
-        </p:nvSpPr>
-        <p:spPr>
-          <a:xfrm xmlns:a="http://schemas.openxmlformats.org/drawingml/2006/main">
-            <a:off x="612648" y="1938528"/>
-            <a:ext cx="1197864" cy="347472"/>
-          </a:xfrm>
-          <a:prstGeom xmlns:a="http://schemas.openxmlformats.org/drawingml/2006/main" prst="rect">
-            <a:avLst/>
-          </a:prstGeom>
-          <a:noFill xmlns:a="http://schemas.openxmlformats.org/drawingml/2006/main"/>
-        </p:spPr>
-        <p:txBody>
-          <a:bodyPr xmlns:a="http://schemas.openxmlformats.org/drawingml/2006/main" wrap="square" lIns="381" tIns="381" rIns="381" bIns="381" anchor="ctr">
-            <a:normAutofit fontScale="100000"/>
-          </a:bodyPr>
-          <a:lstStyle xmlns:a="http://schemas.openxmlformats.org/drawingml/2006/main"/>
-          <a:p xmlns:a="http://schemas.openxmlformats.org/drawingml/2006/main">
-            <a:pPr marL="0" indent="0" algn="ctr">
-              <a:buNone/>
-            </a:pPr>
-            <a:r>
-              <a:rPr sz="1150" b="1">
-                <a:solidFill>
-                  <a:srgbClr val="102A43"/>
-                </a:solidFill>
-                <a:latin typeface="Aptos"/>
-                <a:ea typeface="Aptos"/>
-                <a:cs typeface="Aptos"/>
-              </a:rPr>
-              <a:t>Fuentes</a:t>
-            </a:r>
-            <a:endParaRPr sz="1150"/>
-          </a:p>
-        </p:txBody>
-      </p:sp>
-      <p:sp>
-        <p:nvSpPr>
-          <p:cNvPr id="7" name="Text 5">
-            <a:extLst xmlns:a="http://schemas.openxmlformats.org/drawingml/2006/main">
-              <a:ext uri="{FF2B5EF4-FFF2-40B4-BE49-F238E27FC236}">
-                <a16:creationId xmlns:a16="http://schemas.microsoft.com/office/drawing/2014/main" id="{4DC23234-761E-4BAA-BBF2-991E1EBFAA48}"/>
-              </a:ext>
-            </a:extLst>
-          </p:cNvPr>
-          <p:cNvSpPr>
-            <a:spLocks xmlns:a="http://schemas.openxmlformats.org/drawingml/2006/main" noGrp="1"/>
-          </p:cNvSpPr>
-          <p:nvPr/>
-        </p:nvSpPr>
-        <p:spPr>
-          <a:xfrm xmlns:a="http://schemas.openxmlformats.org/drawingml/2006/main">
-            <a:off x="457200" y="2578608"/>
-            <a:ext cx="1508760" cy="384048"/>
-          </a:xfrm>
-          <a:prstGeom xmlns:a="http://schemas.openxmlformats.org/drawingml/2006/main" prst="rect">
-            <a:avLst/>
-          </a:prstGeom>
-          <a:noFill xmlns:a="http://schemas.openxmlformats.org/drawingml/2006/main"/>
-        </p:spPr>
-        <p:txBody>
-          <a:bodyPr xmlns:a="http://schemas.openxmlformats.org/drawingml/2006/main" wrap="square" lIns="0" tIns="0" rIns="0" bIns="0" anchor="ctr">
-            <a:normAutofit fontScale="100000"/>
-          </a:bodyPr>
-          <a:lstStyle xmlns:a="http://schemas.openxmlformats.org/drawingml/2006/main"/>
-          <a:p xmlns:a="http://schemas.openxmlformats.org/drawingml/2006/main">
-            <a:pPr marL="0" indent="0" algn="ctr">
-              <a:buNone/>
-            </a:pPr>
-            <a:r>
-              <a:rPr sz="830">
-                <a:solidFill>
-                  <a:srgbClr val="64748B"/>
-                </a:solidFill>
-              </a:rPr>
-              <a:t>workflow, .sub/.meta, DAG, history</a:t>
-            </a:r>
-            <a:endParaRPr sz="830"/>
-          </a:p>
-        </p:txBody>
-      </p:sp>
-      <p:sp>
-        <p:nvSpPr>
-          <p:cNvPr id="8" name="Shape 6">
-            <a:extLst xmlns:a="http://schemas.openxmlformats.org/drawingml/2006/main">
-              <a:ext uri="{FF2B5EF4-FFF2-40B4-BE49-F238E27FC236}">
-                <a16:creationId xmlns:a16="http://schemas.microsoft.com/office/drawing/2014/main" id="{A83187FD-E04D-41B7-9D94-81FA25790EA5}"/>
-              </a:ext>
-            </a:extLst>
-          </p:cNvPr>
-          <p:cNvSpPr>
-            <a:spLocks xmlns:a="http://schemas.openxmlformats.org/drawingml/2006/main" noGrp="1"/>
-          </p:cNvSpPr>
-          <p:nvPr/>
-        </p:nvSpPr>
-        <p:spPr>
-          <a:xfrm xmlns:a="http://schemas.openxmlformats.org/drawingml/2006/main">
-            <a:off x="1947672" y="2112264"/>
-            <a:ext cx="365760" cy="0"/>
-          </a:xfrm>
-          <a:prstGeom xmlns:a="http://schemas.openxmlformats.org/drawingml/2006/main" prst="line">
-            <a:avLst/>
-          </a:prstGeom>
-          <a:noFill xmlns:a="http://schemas.openxmlformats.org/drawingml/2006/main"/>
-          <a:ln xmlns:a="http://schemas.openxmlformats.org/drawingml/2006/main" w="11430">
-            <a:solidFill>
-              <a:srgbClr val="64748B"/>
-            </a:solidFill>
-            <a:prstDash val="solid"/>
-            <a:headEnd type="none"/>
-            <a:tailEnd type="triangle"/>
-          </a:ln>
-        </p:spPr>
-      </p:sp>
-      <p:sp>
-        <p:nvSpPr>
-          <p:cNvPr id="9" name="Shape 7">
-            <a:extLst xmlns:a="http://schemas.openxmlformats.org/drawingml/2006/main">
-              <a:ext uri="{FF2B5EF4-FFF2-40B4-BE49-F238E27FC236}">
-                <a16:creationId xmlns:a16="http://schemas.microsoft.com/office/drawing/2014/main" id="{B30BE791-1D0F-4D9F-91DC-E7644B5ED7E3}"/>
-              </a:ext>
-            </a:extLst>
-          </p:cNvPr>
-          <p:cNvSpPr>
-            <a:spLocks xmlns:a="http://schemas.openxmlformats.org/drawingml/2006/main" noGrp="1"/>
-          </p:cNvSpPr>
-          <p:nvPr/>
-        </p:nvSpPr>
-        <p:spPr>
-          <a:xfrm xmlns:a="http://schemas.openxmlformats.org/drawingml/2006/main">
-            <a:off x="2404872" y="1847088"/>
-            <a:ext cx="1417320" cy="530352"/>
-          </a:xfrm>
-          <a:prstGeom xmlns:a="http://schemas.openxmlformats.org/drawingml/2006/main" prst="roundRect">
-            <a:avLst>
-              <a:gd name="adj" fmla="val 13793"/>
-            </a:avLst>
-          </a:prstGeom>
-          <a:solidFill xmlns:a="http://schemas.openxmlformats.org/drawingml/2006/main">
-            <a:srgbClr val="FFFFFF"/>
-          </a:solidFill>
-          <a:ln xmlns:a="http://schemas.openxmlformats.org/drawingml/2006/main" w="10160">
-            <a:solidFill>
-              <a:srgbClr val="2563EB"/>
-            </a:solidFill>
-            <a:prstDash val="solid"/>
-          </a:ln>
-        </p:spPr>
-      </p:sp>
-      <p:sp>
-        <p:nvSpPr>
-          <p:cNvPr id="10" name="Text 8">
-            <a:extLst xmlns:a="http://schemas.openxmlformats.org/drawingml/2006/main">
-              <a:ext uri="{FF2B5EF4-FFF2-40B4-BE49-F238E27FC236}">
-                <a16:creationId xmlns:a16="http://schemas.microsoft.com/office/drawing/2014/main" id="{22C9CB0B-A78E-4311-9879-F9BC03878E12}"/>
-              </a:ext>
-            </a:extLst>
-          </p:cNvPr>
-          <p:cNvSpPr>
-            <a:spLocks xmlns:a="http://schemas.openxmlformats.org/drawingml/2006/main" noGrp="1"/>
-          </p:cNvSpPr>
-          <p:nvPr/>
-        </p:nvSpPr>
-        <p:spPr>
-          <a:xfrm xmlns:a="http://schemas.openxmlformats.org/drawingml/2006/main">
-            <a:off x="2514600" y="1938528"/>
-            <a:ext cx="1197864" cy="347472"/>
-          </a:xfrm>
-          <a:prstGeom xmlns:a="http://schemas.openxmlformats.org/drawingml/2006/main" prst="rect">
-            <a:avLst/>
-          </a:prstGeom>
-          <a:noFill xmlns:a="http://schemas.openxmlformats.org/drawingml/2006/main"/>
-        </p:spPr>
-        <p:txBody>
-          <a:bodyPr xmlns:a="http://schemas.openxmlformats.org/drawingml/2006/main" wrap="square" lIns="381" tIns="381" rIns="381" bIns="381" anchor="ctr">
-            <a:normAutofit fontScale="100000"/>
-          </a:bodyPr>
-          <a:lstStyle xmlns:a="http://schemas.openxmlformats.org/drawingml/2006/main"/>
-          <a:p xmlns:a="http://schemas.openxmlformats.org/drawingml/2006/main">
-            <a:pPr marL="0" indent="0" algn="ctr">
-              <a:buNone/>
-            </a:pPr>
-            <a:r>
-              <a:rPr sz="1150" b="1">
-                <a:solidFill>
-                  <a:srgbClr val="102A43"/>
-                </a:solidFill>
-                <a:latin typeface="Aptos"/>
-                <a:ea typeface="Aptos"/>
-                <a:cs typeface="Aptos"/>
-              </a:rPr>
-              <a:t>Parsing</a:t>
-            </a:r>
-            <a:endParaRPr sz="1150"/>
-          </a:p>
-        </p:txBody>
-      </p:sp>
-      <p:sp>
-        <p:nvSpPr>
-          <p:cNvPr id="11" name="Text 9">
-            <a:extLst xmlns:a="http://schemas.openxmlformats.org/drawingml/2006/main">
-              <a:ext uri="{FF2B5EF4-FFF2-40B4-BE49-F238E27FC236}">
-                <a16:creationId xmlns:a16="http://schemas.microsoft.com/office/drawing/2014/main" id="{E3A031D8-C9B9-4CC5-ABFD-903A941B2B7E}"/>
-              </a:ext>
-            </a:extLst>
-          </p:cNvPr>
-          <p:cNvSpPr>
-            <a:spLocks xmlns:a="http://schemas.openxmlformats.org/drawingml/2006/main" noGrp="1"/>
-          </p:cNvSpPr>
-          <p:nvPr/>
-        </p:nvSpPr>
-        <p:spPr>
-          <a:xfrm xmlns:a="http://schemas.openxmlformats.org/drawingml/2006/main">
-            <a:off x="2359152" y="2578608"/>
-            <a:ext cx="1508760" cy="384048"/>
-          </a:xfrm>
-          <a:prstGeom xmlns:a="http://schemas.openxmlformats.org/drawingml/2006/main" prst="rect">
-            <a:avLst/>
-          </a:prstGeom>
-          <a:noFill xmlns:a="http://schemas.openxmlformats.org/drawingml/2006/main"/>
-        </p:spPr>
-        <p:txBody>
-          <a:bodyPr xmlns:a="http://schemas.openxmlformats.org/drawingml/2006/main" wrap="square" lIns="0" tIns="0" rIns="0" bIns="0" anchor="ctr">
-            <a:normAutofit fontScale="100000"/>
-          </a:bodyPr>
-          <a:lstStyle xmlns:a="http://schemas.openxmlformats.org/drawingml/2006/main"/>
-          <a:p xmlns:a="http://schemas.openxmlformats.org/drawingml/2006/main">
-            <a:pPr marL="0" indent="0" algn="ctr">
-              <a:buNone/>
-            </a:pPr>
-            <a:r>
-              <a:rPr sz="830">
-                <a:solidFill>
-                  <a:srgbClr val="64748B"/>
-                </a:solidFill>
-              </a:rPr>
-              <a:t>valores crudos y provenance</a:t>
-            </a:r>
-            <a:endParaRPr sz="830"/>
-          </a:p>
-        </p:txBody>
-      </p:sp>
-      <p:sp>
-        <p:nvSpPr>
-          <p:cNvPr id="12" name="Shape 10">
-            <a:extLst xmlns:a="http://schemas.openxmlformats.org/drawingml/2006/main">
-              <a:ext uri="{FF2B5EF4-FFF2-40B4-BE49-F238E27FC236}">
-                <a16:creationId xmlns:a16="http://schemas.microsoft.com/office/drawing/2014/main" id="{93BE13B5-88C9-4793-859F-C5593A44CF7E}"/>
-              </a:ext>
-            </a:extLst>
-          </p:cNvPr>
-          <p:cNvSpPr>
-            <a:spLocks xmlns:a="http://schemas.openxmlformats.org/drawingml/2006/main" noGrp="1"/>
-          </p:cNvSpPr>
-          <p:nvPr/>
-        </p:nvSpPr>
-        <p:spPr>
-          <a:xfrm xmlns:a="http://schemas.openxmlformats.org/drawingml/2006/main">
-            <a:off x="3849624" y="2112264"/>
-            <a:ext cx="365760" cy="0"/>
-          </a:xfrm>
-          <a:prstGeom xmlns:a="http://schemas.openxmlformats.org/drawingml/2006/main" prst="line">
-            <a:avLst/>
-          </a:prstGeom>
-          <a:noFill xmlns:a="http://schemas.openxmlformats.org/drawingml/2006/main"/>
-          <a:ln xmlns:a="http://schemas.openxmlformats.org/drawingml/2006/main" w="11430">
-            <a:solidFill>
-              <a:srgbClr val="64748B"/>
-            </a:solidFill>
-            <a:prstDash val="solid"/>
-            <a:headEnd type="none"/>
-            <a:tailEnd type="triangle"/>
-          </a:ln>
-        </p:spPr>
-      </p:sp>
-      <p:sp>
-        <p:nvSpPr>
-          <p:cNvPr id="13" name="Shape 11">
-            <a:extLst xmlns:a="http://schemas.openxmlformats.org/drawingml/2006/main">
-              <a:ext uri="{FF2B5EF4-FFF2-40B4-BE49-F238E27FC236}">
-                <a16:creationId xmlns:a16="http://schemas.microsoft.com/office/drawing/2014/main" id="{77B50815-A028-4524-837C-2E557B64090E}"/>
-              </a:ext>
-            </a:extLst>
-          </p:cNvPr>
-          <p:cNvSpPr>
-            <a:spLocks xmlns:a="http://schemas.openxmlformats.org/drawingml/2006/main" noGrp="1"/>
-          </p:cNvSpPr>
-          <p:nvPr/>
-        </p:nvSpPr>
-        <p:spPr>
-          <a:xfrm xmlns:a="http://schemas.openxmlformats.org/drawingml/2006/main">
-            <a:off x="4306824" y="1847088"/>
-            <a:ext cx="1417320" cy="530352"/>
-          </a:xfrm>
-          <a:prstGeom xmlns:a="http://schemas.openxmlformats.org/drawingml/2006/main" prst="roundRect">
-            <a:avLst>
-              <a:gd name="adj" fmla="val 13793"/>
-            </a:avLst>
-          </a:prstGeom>
-          <a:solidFill xmlns:a="http://schemas.openxmlformats.org/drawingml/2006/main">
-            <a:srgbClr val="FFFFFF"/>
-          </a:solidFill>
-          <a:ln xmlns:a="http://schemas.openxmlformats.org/drawingml/2006/main" w="10160">
-            <a:solidFill>
-              <a:srgbClr val="2563EB"/>
-            </a:solidFill>
-            <a:prstDash val="solid"/>
-          </a:ln>
-        </p:spPr>
-      </p:sp>
-      <p:sp>
-        <p:nvSpPr>
-          <p:cNvPr id="14" name="Text 12">
-            <a:extLst xmlns:a="http://schemas.openxmlformats.org/drawingml/2006/main">
-              <a:ext uri="{FF2B5EF4-FFF2-40B4-BE49-F238E27FC236}">
-                <a16:creationId xmlns:a16="http://schemas.microsoft.com/office/drawing/2014/main" id="{C33C9C9C-1CE7-4680-8B72-AC6610A5F7F9}"/>
-              </a:ext>
-            </a:extLst>
-          </p:cNvPr>
-          <p:cNvSpPr>
-            <a:spLocks xmlns:a="http://schemas.openxmlformats.org/drawingml/2006/main" noGrp="1"/>
-          </p:cNvSpPr>
-          <p:nvPr/>
-        </p:nvSpPr>
-        <p:spPr>
-          <a:xfrm xmlns:a="http://schemas.openxmlformats.org/drawingml/2006/main">
-            <a:off x="4416552" y="1938528"/>
-            <a:ext cx="1197864" cy="347472"/>
-          </a:xfrm>
-          <a:prstGeom xmlns:a="http://schemas.openxmlformats.org/drawingml/2006/main" prst="rect">
-            <a:avLst/>
-          </a:prstGeom>
-          <a:noFill xmlns:a="http://schemas.openxmlformats.org/drawingml/2006/main"/>
-        </p:spPr>
-        <p:txBody>
-          <a:bodyPr xmlns:a="http://schemas.openxmlformats.org/drawingml/2006/main" wrap="square" lIns="381" tIns="381" rIns="381" bIns="381" anchor="ctr">
-            <a:normAutofit fontScale="100000"/>
-          </a:bodyPr>
-          <a:lstStyle xmlns:a="http://schemas.openxmlformats.org/drawingml/2006/main"/>
-          <a:p xmlns:a="http://schemas.openxmlformats.org/drawingml/2006/main">
-            <a:pPr marL="0" indent="0" algn="ctr">
-              <a:buNone/>
-            </a:pPr>
-            <a:r>
-              <a:rPr sz="1150" b="1">
-                <a:solidFill>
-                  <a:srgbClr val="102A43"/>
-                </a:solidFill>
-                <a:latin typeface="Aptos"/>
-                <a:ea typeface="Aptos"/>
-                <a:cs typeface="Aptos"/>
-              </a:rPr>
-              <a:t>Identidad</a:t>
-            </a:r>
-            <a:endParaRPr sz="1150"/>
-          </a:p>
-        </p:txBody>
-      </p:sp>
-      <p:sp>
-        <p:nvSpPr>
-          <p:cNvPr id="15" name="Text 13">
-            <a:extLst xmlns:a="http://schemas.openxmlformats.org/drawingml/2006/main">
-              <a:ext uri="{FF2B5EF4-FFF2-40B4-BE49-F238E27FC236}">
-                <a16:creationId xmlns:a16="http://schemas.microsoft.com/office/drawing/2014/main" id="{CB732A29-9E3F-47D2-BDEE-9B1CEF6CAE55}"/>
-              </a:ext>
-            </a:extLst>
-          </p:cNvPr>
-          <p:cNvSpPr>
-            <a:spLocks xmlns:a="http://schemas.openxmlformats.org/drawingml/2006/main" noGrp="1"/>
-          </p:cNvSpPr>
-          <p:nvPr/>
-        </p:nvSpPr>
-        <p:spPr>
-          <a:xfrm xmlns:a="http://schemas.openxmlformats.org/drawingml/2006/main">
-            <a:off x="4261104" y="2578608"/>
-            <a:ext cx="1508760" cy="384048"/>
-          </a:xfrm>
-          <a:prstGeom xmlns:a="http://schemas.openxmlformats.org/drawingml/2006/main" prst="rect">
-            <a:avLst/>
-          </a:prstGeom>
-          <a:noFill xmlns:a="http://schemas.openxmlformats.org/drawingml/2006/main"/>
-        </p:spPr>
-        <p:txBody>
-          <a:bodyPr xmlns:a="http://schemas.openxmlformats.org/drawingml/2006/main" wrap="square" lIns="0" tIns="0" rIns="0" bIns="0" anchor="ctr">
-            <a:normAutofit fontScale="100000"/>
-          </a:bodyPr>
-          <a:lstStyle xmlns:a="http://schemas.openxmlformats.org/drawingml/2006/main"/>
-          <a:p xmlns:a="http://schemas.openxmlformats.org/drawingml/2006/main">
-            <a:pPr marL="0" indent="0" algn="ctr">
-              <a:buNone/>
-            </a:pPr>
-            <a:r>
-              <a:rPr sz="830">
-                <a:solidFill>
-                  <a:srgbClr val="64748B"/>
-                </a:solidFill>
-              </a:rPr>
-              <a:t>jobs, tasks, files, locations</a:t>
-            </a:r>
-            <a:endParaRPr sz="830"/>
-          </a:p>
-        </p:txBody>
-      </p:sp>
-      <p:sp>
-        <p:nvSpPr>
-          <p:cNvPr id="16" name="Shape 14">
-            <a:extLst xmlns:a="http://schemas.openxmlformats.org/drawingml/2006/main">
-              <a:ext uri="{FF2B5EF4-FFF2-40B4-BE49-F238E27FC236}">
-                <a16:creationId xmlns:a16="http://schemas.microsoft.com/office/drawing/2014/main" id="{35A94715-78AD-458A-B245-43B25972D3BF}"/>
-              </a:ext>
-            </a:extLst>
-          </p:cNvPr>
-          <p:cNvSpPr>
-            <a:spLocks xmlns:a="http://schemas.openxmlformats.org/drawingml/2006/main" noGrp="1"/>
-          </p:cNvSpPr>
-          <p:nvPr/>
-        </p:nvSpPr>
-        <p:spPr>
-          <a:xfrm xmlns:a="http://schemas.openxmlformats.org/drawingml/2006/main">
-            <a:off x="5751576" y="2112264"/>
-            <a:ext cx="365760" cy="0"/>
-          </a:xfrm>
-          <a:prstGeom xmlns:a="http://schemas.openxmlformats.org/drawingml/2006/main" prst="line">
-            <a:avLst/>
-          </a:prstGeom>
-          <a:noFill xmlns:a="http://schemas.openxmlformats.org/drawingml/2006/main"/>
-          <a:ln xmlns:a="http://schemas.openxmlformats.org/drawingml/2006/main" w="11430">
-            <a:solidFill>
-              <a:srgbClr val="64748B"/>
-            </a:solidFill>
-            <a:prstDash val="solid"/>
-            <a:headEnd type="none"/>
-            <a:tailEnd type="triangle"/>
-          </a:ln>
-        </p:spPr>
-      </p:sp>
-      <p:sp>
-        <p:nvSpPr>
-          <p:cNvPr id="17" name="Shape 15">
-            <a:extLst xmlns:a="http://schemas.openxmlformats.org/drawingml/2006/main">
-              <a:ext uri="{FF2B5EF4-FFF2-40B4-BE49-F238E27FC236}">
-                <a16:creationId xmlns:a16="http://schemas.microsoft.com/office/drawing/2014/main" id="{0707FCD0-98E8-4627-BA86-AECA81DCC471}"/>
-              </a:ext>
-            </a:extLst>
-          </p:cNvPr>
-          <p:cNvSpPr>
-            <a:spLocks xmlns:a="http://schemas.openxmlformats.org/drawingml/2006/main" noGrp="1"/>
-          </p:cNvSpPr>
-          <p:nvPr/>
-        </p:nvSpPr>
-        <p:spPr>
-          <a:xfrm xmlns:a="http://schemas.openxmlformats.org/drawingml/2006/main">
-            <a:off x="6208776" y="1847088"/>
-            <a:ext cx="1417320" cy="530352"/>
-          </a:xfrm>
-          <a:prstGeom xmlns:a="http://schemas.openxmlformats.org/drawingml/2006/main" prst="roundRect">
-            <a:avLst>
-              <a:gd name="adj" fmla="val 13793"/>
-            </a:avLst>
-          </a:prstGeom>
-          <a:solidFill xmlns:a="http://schemas.openxmlformats.org/drawingml/2006/main">
-            <a:srgbClr val="FFFFFF"/>
-          </a:solidFill>
-          <a:ln xmlns:a="http://schemas.openxmlformats.org/drawingml/2006/main" w="10160">
-            <a:solidFill>
-              <a:srgbClr val="2563EB"/>
-            </a:solidFill>
-            <a:prstDash val="solid"/>
-          </a:ln>
-        </p:spPr>
-      </p:sp>
-      <p:sp>
-        <p:nvSpPr>
-          <p:cNvPr id="18" name="Text 16">
-            <a:extLst xmlns:a="http://schemas.openxmlformats.org/drawingml/2006/main">
-              <a:ext uri="{FF2B5EF4-FFF2-40B4-BE49-F238E27FC236}">
-                <a16:creationId xmlns:a16="http://schemas.microsoft.com/office/drawing/2014/main" id="{B52A1EBB-3062-4203-8C29-D44067406951}"/>
-              </a:ext>
-            </a:extLst>
-          </p:cNvPr>
-          <p:cNvSpPr>
-            <a:spLocks xmlns:a="http://schemas.openxmlformats.org/drawingml/2006/main" noGrp="1"/>
-          </p:cNvSpPr>
-          <p:nvPr/>
-        </p:nvSpPr>
-        <p:spPr>
-          <a:xfrm xmlns:a="http://schemas.openxmlformats.org/drawingml/2006/main">
-            <a:off x="6318504" y="1938528"/>
-            <a:ext cx="1197864" cy="347472"/>
-          </a:xfrm>
-          <a:prstGeom xmlns:a="http://schemas.openxmlformats.org/drawingml/2006/main" prst="rect">
-            <a:avLst/>
-          </a:prstGeom>
-          <a:noFill xmlns:a="http://schemas.openxmlformats.org/drawingml/2006/main"/>
-        </p:spPr>
-        <p:txBody>
-          <a:bodyPr xmlns:a="http://schemas.openxmlformats.org/drawingml/2006/main" wrap="square" lIns="381" tIns="381" rIns="381" bIns="381" anchor="ctr">
-            <a:normAutofit fontScale="100000"/>
-          </a:bodyPr>
-          <a:lstStyle xmlns:a="http://schemas.openxmlformats.org/drawingml/2006/main"/>
-          <a:p xmlns:a="http://schemas.openxmlformats.org/drawingml/2006/main">
-            <a:pPr marL="0" indent="0" algn="ctr">
-              <a:buNone/>
-            </a:pPr>
-            <a:r>
-              <a:rPr sz="1150" b="1">
-                <a:solidFill>
-                  <a:srgbClr val="102A43"/>
-                </a:solidFill>
-                <a:latin typeface="Aptos"/>
-                <a:ea typeface="Aptos"/>
-                <a:cs typeface="Aptos"/>
-              </a:rPr>
-              <a:t>Modelo</a:t>
-            </a:r>
-            <a:endParaRPr sz="1150"/>
-          </a:p>
-        </p:txBody>
-      </p:sp>
-      <p:sp>
-        <p:nvSpPr>
-          <p:cNvPr id="19" name="Text 17">
-            <a:extLst xmlns:a="http://schemas.openxmlformats.org/drawingml/2006/main">
-              <a:ext uri="{FF2B5EF4-FFF2-40B4-BE49-F238E27FC236}">
-                <a16:creationId xmlns:a16="http://schemas.microsoft.com/office/drawing/2014/main" id="{AB5A9B82-2007-4A7E-9932-16AA501EE6B4}"/>
-              </a:ext>
-            </a:extLst>
-          </p:cNvPr>
-          <p:cNvSpPr>
-            <a:spLocks xmlns:a="http://schemas.openxmlformats.org/drawingml/2006/main" noGrp="1"/>
-          </p:cNvSpPr>
-          <p:nvPr/>
-        </p:nvSpPr>
-        <p:spPr>
-          <a:xfrm xmlns:a="http://schemas.openxmlformats.org/drawingml/2006/main">
-            <a:off x="6163056" y="2578608"/>
-            <a:ext cx="1508760" cy="384048"/>
-          </a:xfrm>
-          <a:prstGeom xmlns:a="http://schemas.openxmlformats.org/drawingml/2006/main" prst="rect">
-            <a:avLst/>
-          </a:prstGeom>
-          <a:noFill xmlns:a="http://schemas.openxmlformats.org/drawingml/2006/main"/>
-        </p:spPr>
-        <p:txBody>
-          <a:bodyPr xmlns:a="http://schemas.openxmlformats.org/drawingml/2006/main" wrap="square" lIns="0" tIns="0" rIns="0" bIns="0" anchor="ctr">
-            <a:normAutofit fontScale="100000"/>
-          </a:bodyPr>
-          <a:lstStyle xmlns:a="http://schemas.openxmlformats.org/drawingml/2006/main"/>
-          <a:p xmlns:a="http://schemas.openxmlformats.org/drawingml/2006/main">
-            <a:pPr marL="0" indent="0" algn="ctr">
-              <a:buNone/>
-            </a:pPr>
-            <a:r>
-              <a:rPr sz="830">
-                <a:solidFill>
-                  <a:srgbClr val="64748B"/>
-                </a:solidFill>
-              </a:rPr>
-              <a:t>adapter condorio + dataflow</a:t>
-            </a:r>
-            <a:endParaRPr sz="830"/>
-          </a:p>
-        </p:txBody>
-      </p:sp>
-      <p:sp>
-        <p:nvSpPr>
-          <p:cNvPr id="20" name="Shape 18">
-            <a:extLst xmlns:a="http://schemas.openxmlformats.org/drawingml/2006/main">
-              <a:ext uri="{FF2B5EF4-FFF2-40B4-BE49-F238E27FC236}">
-                <a16:creationId xmlns:a16="http://schemas.microsoft.com/office/drawing/2014/main" id="{96D34FFE-1BA7-45CE-9CFD-96EA075EC7DE}"/>
-              </a:ext>
-            </a:extLst>
-          </p:cNvPr>
-          <p:cNvSpPr>
-            <a:spLocks xmlns:a="http://schemas.openxmlformats.org/drawingml/2006/main" noGrp="1"/>
-          </p:cNvSpPr>
-          <p:nvPr/>
-        </p:nvSpPr>
-        <p:spPr>
-          <a:xfrm xmlns:a="http://schemas.openxmlformats.org/drawingml/2006/main">
-            <a:off x="7653528" y="2112264"/>
-            <a:ext cx="365760" cy="0"/>
-          </a:xfrm>
-          <a:prstGeom xmlns:a="http://schemas.openxmlformats.org/drawingml/2006/main" prst="line">
-            <a:avLst/>
-          </a:prstGeom>
-          <a:noFill xmlns:a="http://schemas.openxmlformats.org/drawingml/2006/main"/>
-          <a:ln xmlns:a="http://schemas.openxmlformats.org/drawingml/2006/main" w="11430">
-            <a:solidFill>
-              <a:srgbClr val="64748B"/>
-            </a:solidFill>
-            <a:prstDash val="solid"/>
-            <a:headEnd type="none"/>
-            <a:tailEnd type="triangle"/>
-          </a:ln>
-        </p:spPr>
-      </p:sp>
-      <p:sp>
-        <p:nvSpPr>
-          <p:cNvPr id="21" name="Shape 19">
-            <a:extLst xmlns:a="http://schemas.openxmlformats.org/drawingml/2006/main">
-              <a:ext uri="{FF2B5EF4-FFF2-40B4-BE49-F238E27FC236}">
-                <a16:creationId xmlns:a16="http://schemas.microsoft.com/office/drawing/2014/main" id="{C0851D24-CD5D-46D6-B516-C27F5E0109E8}"/>
-              </a:ext>
-            </a:extLst>
-          </p:cNvPr>
-          <p:cNvSpPr>
-            <a:spLocks xmlns:a="http://schemas.openxmlformats.org/drawingml/2006/main" noGrp="1"/>
-          </p:cNvSpPr>
-          <p:nvPr/>
-        </p:nvSpPr>
-        <p:spPr>
-          <a:xfrm xmlns:a="http://schemas.openxmlformats.org/drawingml/2006/main">
-            <a:off x="8110728" y="1847088"/>
-            <a:ext cx="1417320" cy="530352"/>
-          </a:xfrm>
-          <a:prstGeom xmlns:a="http://schemas.openxmlformats.org/drawingml/2006/main" prst="roundRect">
-            <a:avLst>
-              <a:gd name="adj" fmla="val 13793"/>
-            </a:avLst>
-          </a:prstGeom>
-          <a:solidFill xmlns:a="http://schemas.openxmlformats.org/drawingml/2006/main">
-            <a:srgbClr val="FFFFFF"/>
-          </a:solidFill>
-          <a:ln xmlns:a="http://schemas.openxmlformats.org/drawingml/2006/main" w="10160">
-            <a:solidFill>
-              <a:srgbClr val="2563EB"/>
-            </a:solidFill>
-            <a:prstDash val="solid"/>
-          </a:ln>
-        </p:spPr>
-      </p:sp>
-      <p:sp>
-        <p:nvSpPr>
-          <p:cNvPr id="22" name="Text 20">
-            <a:extLst xmlns:a="http://schemas.openxmlformats.org/drawingml/2006/main">
-              <a:ext uri="{FF2B5EF4-FFF2-40B4-BE49-F238E27FC236}">
-                <a16:creationId xmlns:a16="http://schemas.microsoft.com/office/drawing/2014/main" id="{BE1D7BA5-1C24-4AB5-A14E-CA3CBED4CD22}"/>
-              </a:ext>
-            </a:extLst>
-          </p:cNvPr>
-          <p:cNvSpPr>
-            <a:spLocks xmlns:a="http://schemas.openxmlformats.org/drawingml/2006/main" noGrp="1"/>
-          </p:cNvSpPr>
-          <p:nvPr/>
-        </p:nvSpPr>
-        <p:spPr>
-          <a:xfrm xmlns:a="http://schemas.openxmlformats.org/drawingml/2006/main">
-            <a:off x="8220456" y="1938528"/>
-            <a:ext cx="1197864" cy="347472"/>
-          </a:xfrm>
-          <a:prstGeom xmlns:a="http://schemas.openxmlformats.org/drawingml/2006/main" prst="rect">
-            <a:avLst/>
-          </a:prstGeom>
-          <a:noFill xmlns:a="http://schemas.openxmlformats.org/drawingml/2006/main"/>
-        </p:spPr>
-        <p:txBody>
-          <a:bodyPr xmlns:a="http://schemas.openxmlformats.org/drawingml/2006/main" wrap="square" lIns="381" tIns="381" rIns="381" bIns="381" anchor="ctr">
-            <a:normAutofit fontScale="100000"/>
-          </a:bodyPr>
-          <a:lstStyle xmlns:a="http://schemas.openxmlformats.org/drawingml/2006/main"/>
-          <a:p xmlns:a="http://schemas.openxmlformats.org/drawingml/2006/main">
-            <a:pPr marL="0" indent="0" algn="ctr">
-              <a:buNone/>
-            </a:pPr>
-            <a:r>
-              <a:rPr sz="1150" b="1">
-                <a:solidFill>
-                  <a:srgbClr val="102A43"/>
-                </a:solidFill>
-                <a:latin typeface="Aptos"/>
-                <a:ea typeface="Aptos"/>
-                <a:cs typeface="Aptos"/>
-              </a:rPr>
-              <a:t>Movimientos</a:t>
-            </a:r>
-            <a:endParaRPr sz="1150"/>
-          </a:p>
-        </p:txBody>
-      </p:sp>
-      <p:sp>
-        <p:nvSpPr>
-          <p:cNvPr id="23" name="Text 21">
-            <a:extLst xmlns:a="http://schemas.openxmlformats.org/drawingml/2006/main">
-              <a:ext uri="{FF2B5EF4-FFF2-40B4-BE49-F238E27FC236}">
-                <a16:creationId xmlns:a16="http://schemas.microsoft.com/office/drawing/2014/main" id="{F60426E7-A756-4689-A611-25F773752C73}"/>
-              </a:ext>
-            </a:extLst>
-          </p:cNvPr>
-          <p:cNvSpPr>
-            <a:spLocks xmlns:a="http://schemas.openxmlformats.org/drawingml/2006/main" noGrp="1"/>
-          </p:cNvSpPr>
-          <p:nvPr/>
-        </p:nvSpPr>
-        <p:spPr>
-          <a:xfrm xmlns:a="http://schemas.openxmlformats.org/drawingml/2006/main">
-            <a:off x="8065008" y="2578608"/>
-            <a:ext cx="1508760" cy="384048"/>
-          </a:xfrm>
-          <a:prstGeom xmlns:a="http://schemas.openxmlformats.org/drawingml/2006/main" prst="rect">
-            <a:avLst/>
-          </a:prstGeom>
-          <a:noFill xmlns:a="http://schemas.openxmlformats.org/drawingml/2006/main"/>
-        </p:spPr>
-        <p:txBody>
-          <a:bodyPr xmlns:a="http://schemas.openxmlformats.org/drawingml/2006/main" wrap="square" lIns="0" tIns="0" rIns="0" bIns="0" anchor="ctr">
-            <a:normAutofit fontScale="100000"/>
-          </a:bodyPr>
-          <a:lstStyle xmlns:a="http://schemas.openxmlformats.org/drawingml/2006/main"/>
-          <a:p xmlns:a="http://schemas.openxmlformats.org/drawingml/2006/main">
-            <a:pPr marL="0" indent="0" algn="ctr">
-              <a:buNone/>
-            </a:pPr>
-            <a:r>
-              <a:rPr sz="830">
-                <a:solidFill>
-                  <a:srgbClr val="64748B"/>
-                </a:solidFill>
-              </a:rPr>
-              <a:t>M_req requerido; M_rec declarado</a:t>
-            </a:r>
-            <a:endParaRPr sz="830"/>
-          </a:p>
-        </p:txBody>
-      </p:sp>
-      <p:sp>
-        <p:nvSpPr>
-          <p:cNvPr id="24" name="Shape 22">
-            <a:extLst xmlns:a="http://schemas.openxmlformats.org/drawingml/2006/main">
-              <a:ext uri="{FF2B5EF4-FFF2-40B4-BE49-F238E27FC236}">
-                <a16:creationId xmlns:a16="http://schemas.microsoft.com/office/drawing/2014/main" id="{235C0EB3-2B03-4AF7-BE59-C945E28759F3}"/>
-              </a:ext>
-            </a:extLst>
-          </p:cNvPr>
-          <p:cNvSpPr>
-            <a:spLocks xmlns:a="http://schemas.openxmlformats.org/drawingml/2006/main" noGrp="1"/>
-          </p:cNvSpPr>
-          <p:nvPr/>
-        </p:nvSpPr>
-        <p:spPr>
-          <a:xfrm xmlns:a="http://schemas.openxmlformats.org/drawingml/2006/main">
-            <a:off x="9555480" y="2112264"/>
-            <a:ext cx="365760" cy="0"/>
-          </a:xfrm>
-          <a:prstGeom xmlns:a="http://schemas.openxmlformats.org/drawingml/2006/main" prst="line">
-            <a:avLst/>
-          </a:prstGeom>
-          <a:noFill xmlns:a="http://schemas.openxmlformats.org/drawingml/2006/main"/>
-          <a:ln xmlns:a="http://schemas.openxmlformats.org/drawingml/2006/main" w="11430">
-            <a:solidFill>
-              <a:srgbClr val="64748B"/>
-            </a:solidFill>
-            <a:prstDash val="solid"/>
-            <a:headEnd type="none"/>
-            <a:tailEnd type="triangle"/>
-          </a:ln>
-        </p:spPr>
-      </p:sp>
-      <p:sp>
-        <p:nvSpPr>
-          <p:cNvPr id="25" name="Shape 23">
-            <a:extLst xmlns:a="http://schemas.openxmlformats.org/drawingml/2006/main">
-              <a:ext uri="{FF2B5EF4-FFF2-40B4-BE49-F238E27FC236}">
-                <a16:creationId xmlns:a16="http://schemas.microsoft.com/office/drawing/2014/main" id="{C39BB2E4-0FA3-4717-8EC2-B28934EEA420}"/>
-              </a:ext>
-            </a:extLst>
-          </p:cNvPr>
-          <p:cNvSpPr>
-            <a:spLocks xmlns:a="http://schemas.openxmlformats.org/drawingml/2006/main" noGrp="1"/>
-          </p:cNvSpPr>
-          <p:nvPr/>
-        </p:nvSpPr>
-        <p:spPr>
-          <a:xfrm xmlns:a="http://schemas.openxmlformats.org/drawingml/2006/main">
-            <a:off x="10012680" y="1847088"/>
-            <a:ext cx="1417320" cy="530352"/>
-          </a:xfrm>
-          <a:prstGeom xmlns:a="http://schemas.openxmlformats.org/drawingml/2006/main" prst="roundRect">
-            <a:avLst>
-              <a:gd name="adj" fmla="val 13793"/>
-            </a:avLst>
-          </a:prstGeom>
-          <a:solidFill xmlns:a="http://schemas.openxmlformats.org/drawingml/2006/main">
-            <a:srgbClr val="102A43"/>
-          </a:solidFill>
-          <a:ln xmlns:a="http://schemas.openxmlformats.org/drawingml/2006/main" w="10160">
-            <a:solidFill>
-              <a:srgbClr val="102A43"/>
-            </a:solidFill>
-            <a:prstDash val="solid"/>
-          </a:ln>
-        </p:spPr>
-      </p:sp>
-      <p:sp>
-        <p:nvSpPr>
-          <p:cNvPr id="26" name="Text 24">
-            <a:extLst xmlns:a="http://schemas.openxmlformats.org/drawingml/2006/main">
-              <a:ext uri="{FF2B5EF4-FFF2-40B4-BE49-F238E27FC236}">
-                <a16:creationId xmlns:a16="http://schemas.microsoft.com/office/drawing/2014/main" id="{4AB3F298-6547-40C0-B7E0-BD25B1A625BA}"/>
-              </a:ext>
-            </a:extLst>
-          </p:cNvPr>
-          <p:cNvSpPr>
-            <a:spLocks xmlns:a="http://schemas.openxmlformats.org/drawingml/2006/main" noGrp="1"/>
-          </p:cNvSpPr>
-          <p:nvPr/>
-        </p:nvSpPr>
-        <p:spPr>
-          <a:xfrm xmlns:a="http://schemas.openxmlformats.org/drawingml/2006/main">
-            <a:off x="10122408" y="1938528"/>
-            <a:ext cx="1197864" cy="347472"/>
-          </a:xfrm>
-          <a:prstGeom xmlns:a="http://schemas.openxmlformats.org/drawingml/2006/main" prst="rect">
-            <a:avLst/>
-          </a:prstGeom>
-          <a:noFill xmlns:a="http://schemas.openxmlformats.org/drawingml/2006/main"/>
-        </p:spPr>
-        <p:txBody>
-          <a:bodyPr xmlns:a="http://schemas.openxmlformats.org/drawingml/2006/main" wrap="square" lIns="381" tIns="381" rIns="381" bIns="381" anchor="ctr">
-            <a:normAutofit fontScale="98913"/>
-          </a:bodyPr>
-          <a:lstStyle xmlns:a="http://schemas.openxmlformats.org/drawingml/2006/main"/>
-          <a:p xmlns:a="http://schemas.openxmlformats.org/drawingml/2006/main">
-            <a:pPr marL="0" indent="0" algn="ctr">
-              <a:buNone/>
-            </a:pPr>
-            <a:r>
-              <a:rPr sz="1150" b="1">
-                <a:solidFill>
-                  <a:srgbClr val="FFFFFF"/>
-                </a:solidFill>
-                <a:latin typeface="Aptos"/>
-                <a:ea typeface="Aptos"/>
-                <a:cs typeface="Aptos"/>
-              </a:rPr>
-              <a:t>Evidencia + métricas</a:t>
-            </a:r>
-            <a:endParaRPr sz="1150"/>
-          </a:p>
-        </p:txBody>
-      </p:sp>
-      <p:sp>
-        <p:nvSpPr>
-          <p:cNvPr id="27" name="Text 25">
-            <a:extLst xmlns:a="http://schemas.openxmlformats.org/drawingml/2006/main">
-              <a:ext uri="{FF2B5EF4-FFF2-40B4-BE49-F238E27FC236}">
-                <a16:creationId xmlns:a16="http://schemas.microsoft.com/office/drawing/2014/main" id="{CEE26CEE-4366-4DEC-AFB2-54ECF3C33F4C}"/>
-              </a:ext>
-            </a:extLst>
-          </p:cNvPr>
-          <p:cNvSpPr>
-            <a:spLocks xmlns:a="http://schemas.openxmlformats.org/drawingml/2006/main" noGrp="1"/>
-          </p:cNvSpPr>
-          <p:nvPr/>
-        </p:nvSpPr>
-        <p:spPr>
-          <a:xfrm xmlns:a="http://schemas.openxmlformats.org/drawingml/2006/main">
-            <a:off x="9966960" y="2578608"/>
-            <a:ext cx="1508760" cy="384048"/>
-          </a:xfrm>
-          <a:prstGeom xmlns:a="http://schemas.openxmlformats.org/drawingml/2006/main" prst="rect">
-            <a:avLst/>
-          </a:prstGeom>
-          <a:noFill xmlns:a="http://schemas.openxmlformats.org/drawingml/2006/main"/>
-        </p:spPr>
-        <p:txBody>
-          <a:bodyPr xmlns:a="http://schemas.openxmlformats.org/drawingml/2006/main" wrap="square" lIns="0" tIns="0" rIns="0" bIns="0" anchor="ctr">
-            <a:normAutofit fontScale="100000"/>
-          </a:bodyPr>
-          <a:lstStyle xmlns:a="http://schemas.openxmlformats.org/drawingml/2006/main"/>
-          <a:p xmlns:a="http://schemas.openxmlformats.org/drawingml/2006/main">
-            <a:pPr marL="0" indent="0" algn="ctr">
-              <a:buNone/>
-            </a:pPr>
-            <a:r>
-              <a:rPr sz="830">
-                <a:solidFill>
-                  <a:srgbClr val="64748B"/>
-                </a:solidFill>
-              </a:rPr>
-              <a:t>reconciliation, Coverage, M_obs y DME</a:t>
-            </a:r>
-            <a:endParaRPr sz="830"/>
-          </a:p>
-        </p:txBody>
-      </p:sp>
-      <p:sp>
-        <p:nvSpPr>
-          <p:cNvPr id="28" name="Shape 26">
-            <a:extLst xmlns:a="http://schemas.openxmlformats.org/drawingml/2006/main">
-              <a:ext uri="{FF2B5EF4-FFF2-40B4-BE49-F238E27FC236}">
-                <a16:creationId xmlns:a16="http://schemas.microsoft.com/office/drawing/2014/main" id="{BA6BE654-0DC9-4266-8130-977C82CED492}"/>
-              </a:ext>
-            </a:extLst>
-          </p:cNvPr>
-          <p:cNvSpPr>
-            <a:spLocks xmlns:a="http://schemas.openxmlformats.org/drawingml/2006/main" noGrp="1"/>
-          </p:cNvSpPr>
-          <p:nvPr/>
-        </p:nvSpPr>
-        <p:spPr>
-          <a:xfrm xmlns:a="http://schemas.openxmlformats.org/drawingml/2006/main">
-            <a:off x="1051560" y="4005072"/>
-            <a:ext cx="4800600" cy="713232"/>
-          </a:xfrm>
-          <a:prstGeom xmlns:a="http://schemas.openxmlformats.org/drawingml/2006/main" prst="roundRect">
-            <a:avLst>
-              <a:gd name="adj" fmla="val 10256"/>
-            </a:avLst>
-          </a:prstGeom>
-          <a:solidFill xmlns:a="http://schemas.openxmlformats.org/drawingml/2006/main">
-            <a:srgbClr val="FFFFFF"/>
-          </a:solidFill>
-          <a:ln xmlns:a="http://schemas.openxmlformats.org/drawingml/2006/main" w="10160">
-            <a:solidFill>
-              <a:srgbClr val="CBD5E1"/>
-            </a:solidFill>
-            <a:prstDash val="solid"/>
-          </a:ln>
-        </p:spPr>
-      </p:sp>
-      <p:sp>
-        <p:nvSpPr>
-          <p:cNvPr id="29" name="Text 27">
-            <a:extLst xmlns:a="http://schemas.openxmlformats.org/drawingml/2006/main">
-              <a:ext uri="{FF2B5EF4-FFF2-40B4-BE49-F238E27FC236}">
-                <a16:creationId xmlns:a16="http://schemas.microsoft.com/office/drawing/2014/main" id="{73CD6BB5-A094-4DE5-A030-0580AC0228E9}"/>
-              </a:ext>
-            </a:extLst>
-          </p:cNvPr>
-          <p:cNvSpPr>
-            <a:spLocks xmlns:a="http://schemas.openxmlformats.org/drawingml/2006/main" noGrp="1"/>
-          </p:cNvSpPr>
-          <p:nvPr/>
-        </p:nvSpPr>
-        <p:spPr>
-          <a:xfrm xmlns:a="http://schemas.openxmlformats.org/drawingml/2006/main">
-            <a:off x="1216152" y="4133088"/>
-            <a:ext cx="4471416" cy="457200"/>
-          </a:xfrm>
-          <a:prstGeom xmlns:a="http://schemas.openxmlformats.org/drawingml/2006/main" prst="rect">
-            <a:avLst/>
-          </a:prstGeom>
-          <a:noFill xmlns:a="http://schemas.openxmlformats.org/drawingml/2006/main"/>
-        </p:spPr>
-        <p:txBody>
-          <a:bodyPr xmlns:a="http://schemas.openxmlformats.org/drawingml/2006/main" wrap="square" lIns="381" tIns="381" rIns="381" bIns="381" anchor="ctr">
-            <a:normAutofit fontScale="100000"/>
-          </a:bodyPr>
-          <a:lstStyle xmlns:a="http://schemas.openxmlformats.org/drawingml/2006/main"/>
-          <a:p xmlns:a="http://schemas.openxmlformats.org/drawingml/2006/main">
-            <a:pPr marL="0" indent="0">
-              <a:buNone/>
-            </a:pPr>
-            <a:r>
-              <a:rPr sz="1120">
-                <a:solidFill>
-                  <a:srgbClr val="334155"/>
-                </a:solidFill>
-                <a:latin typeface="Aptos"/>
-                <a:ea typeface="Aptos"/>
-                <a:cs typeface="Aptos"/>
-              </a:rPr>
-              <a:t>Offline: la CLI recibe los artefactos del run y un archivo history explícito. No consulta el pool en vivo.</a:t>
-            </a:r>
-            <a:endParaRPr sz="1120"/>
-          </a:p>
-        </p:txBody>
-      </p:sp>
-      <p:sp>
-        <p:nvSpPr>
-          <p:cNvPr id="30" name="Shape 28">
-            <a:extLst xmlns:a="http://schemas.openxmlformats.org/drawingml/2006/main">
-              <a:ext uri="{FF2B5EF4-FFF2-40B4-BE49-F238E27FC236}">
-                <a16:creationId xmlns:a16="http://schemas.microsoft.com/office/drawing/2014/main" id="{4EBF559B-5D1C-40B1-A715-680FD9F61323}"/>
-              </a:ext>
-            </a:extLst>
-          </p:cNvPr>
-          <p:cNvSpPr>
-            <a:spLocks xmlns:a="http://schemas.openxmlformats.org/drawingml/2006/main" noGrp="1"/>
-          </p:cNvSpPr>
-          <p:nvPr/>
-        </p:nvSpPr>
-        <p:spPr>
-          <a:xfrm xmlns:a="http://schemas.openxmlformats.org/drawingml/2006/main">
-            <a:off x="6309360" y="4005072"/>
-            <a:ext cx="4800600" cy="713232"/>
-          </a:xfrm>
-          <a:prstGeom xmlns:a="http://schemas.openxmlformats.org/drawingml/2006/main" prst="roundRect">
-            <a:avLst>
-              <a:gd name="adj" fmla="val 10256"/>
-            </a:avLst>
-          </a:prstGeom>
-          <a:solidFill xmlns:a="http://schemas.openxmlformats.org/drawingml/2006/main">
-            <a:srgbClr val="FFFFFF"/>
-          </a:solidFill>
-          <a:ln xmlns:a="http://schemas.openxmlformats.org/drawingml/2006/main" w="10160">
-            <a:solidFill>
-              <a:srgbClr val="CBD5E1"/>
-            </a:solidFill>
-            <a:prstDash val="solid"/>
-          </a:ln>
-        </p:spPr>
-      </p:sp>
-      <p:sp>
-        <p:nvSpPr>
-          <p:cNvPr id="31" name="Text 29">
-            <a:extLst xmlns:a="http://schemas.openxmlformats.org/drawingml/2006/main">
-              <a:ext uri="{FF2B5EF4-FFF2-40B4-BE49-F238E27FC236}">
-                <a16:creationId xmlns:a16="http://schemas.microsoft.com/office/drawing/2014/main" id="{594EF01B-C614-4D0D-9236-9192F548F01E}"/>
-              </a:ext>
-            </a:extLst>
-          </p:cNvPr>
-          <p:cNvSpPr>
-            <a:spLocks xmlns:a="http://schemas.openxmlformats.org/drawingml/2006/main" noGrp="1"/>
-          </p:cNvSpPr>
-          <p:nvPr/>
-        </p:nvSpPr>
-        <p:spPr>
-          <a:xfrm xmlns:a="http://schemas.openxmlformats.org/drawingml/2006/main">
-            <a:off x="6473952" y="4133088"/>
-            <a:ext cx="4471416" cy="457200"/>
-          </a:xfrm>
-          <a:prstGeom xmlns:a="http://schemas.openxmlformats.org/drawingml/2006/main" prst="rect">
-            <a:avLst/>
-          </a:prstGeom>
-          <a:noFill xmlns:a="http://schemas.openxmlformats.org/drawingml/2006/main"/>
-        </p:spPr>
-        <p:txBody>
-          <a:bodyPr xmlns:a="http://schemas.openxmlformats.org/drawingml/2006/main" wrap="square" lIns="381" tIns="381" rIns="381" bIns="381" anchor="ctr">
-            <a:normAutofit fontScale="98689"/>
-          </a:bodyPr>
-          <a:lstStyle xmlns:a="http://schemas.openxmlformats.org/drawingml/2006/main"/>
-          <a:p xmlns:a="http://schemas.openxmlformats.org/drawingml/2006/main">
-            <a:pPr marL="0" indent="0">
-              <a:buNone/>
-            </a:pPr>
-            <a:r>
-              <a:rPr sz="1120">
-                <a:solidFill>
-                  <a:srgbClr val="334155"/>
-                </a:solidFill>
-                <a:latin typeface="Aptos"/>
-                <a:ea typeface="Aptos"/>
-                <a:cs typeface="Aptos"/>
-              </a:rPr>
-              <a:t>Fail-closed: un modelo no soportado o evidencia ambigua/incompleta bloquea métricas dependientes. JSON y TSV conservan diagnósticos y procedencia.</a:t>
-            </a:r>
-            <a:endParaRPr sz="1120"/>
           </a:p>
         </p:txBody>
       </p:sp>
@@ -7907,7 +6829,7 @@
                 <a:ea typeface="Aptos"/>
                 <a:cs typeface="Aptos"/>
               </a:rPr>
-              <a:t>Arquitectura implementada · Analyzer v1</a:t>
+              <a:t>Arquitectura y flujo de medición · Analyzer v1</a:t>
             </a:r>
             <a:endParaRPr sz="750"/>
           </a:p>
@@ -7956,6 +6878,1458 @@
               <a:t>13</a:t>
             </a:r>
             <a:endParaRPr sz="800"/>
+          </a:p>
+        </p:txBody>
+      </p:sp>
+      <p:sp>
+        <p:nvSpPr>
+          <p:cNvPr id="35" name="">
+            <a:extLst xmlns:a="http://schemas.openxmlformats.org/drawingml/2006/main">
+              <a:ext uri="{FF2B5EF4-FFF2-40B4-BE49-F238E27FC236}">
+                <a16:creationId xmlns:a16="http://schemas.microsoft.com/office/drawing/2014/main" id="{04B17A4F-1C6C-4C4F-AC8A-3A2B395171BA}"/>
+              </a:ext>
+            </a:extLst>
+          </p:cNvPr>
+          <p:cNvSpPr>
+            <a:spLocks xmlns:a="http://schemas.openxmlformats.org/drawingml/2006/main" noGrp="1"/>
+          </p:cNvSpPr>
+          <p:nvPr/>
+        </p:nvSpPr>
+        <p:spPr>
+          <a:xfrm xmlns:a="http://schemas.openxmlformats.org/drawingml/2006/main">
+            <a:off x="657225" y="1266825"/>
+            <a:ext cx="10810875" cy="361950"/>
+          </a:xfrm>
+          <a:prstGeom xmlns:a="http://schemas.openxmlformats.org/drawingml/2006/main" prst="rect">
+            <a:avLst/>
+          </a:prstGeom>
+          <a:noFill xmlns:a="http://schemas.openxmlformats.org/drawingml/2006/main"/>
+          <a:ln xmlns:a="http://schemas.openxmlformats.org/drawingml/2006/main" w="0">
+            <a:noFill/>
+            <a:prstDash val="solid"/>
+          </a:ln>
+        </p:spPr>
+        <p:txBody>
+          <a:bodyPr xmlns:a="http://schemas.openxmlformats.org/drawingml/2006/main" wrap="square" lIns="0" tIns="0" rIns="0" bIns="0" anchor="ctr">
+            <a:normAutofit fontScale="100000"/>
+          </a:bodyPr>
+          <a:lstStyle xmlns:a="http://schemas.openxmlformats.org/drawingml/2006/main"/>
+          <a:p xmlns:a="http://schemas.openxmlformats.org/drawingml/2006/main">
+            <a:pPr algn="l">
+              <a:defRPr sz="1575" b="0">
+                <a:solidFill>
+                  <a:srgbClr val="34485D"/>
+                </a:solidFill>
+                <a:latin typeface="Aptos"/>
+                <a:ea typeface="Aptos"/>
+                <a:cs typeface="Aptos"/>
+              </a:defRPr>
+            </a:pPr>
+            <a:r>
+              <a:rPr sz="1575" b="0">
+                <a:solidFill>
+                  <a:srgbClr val="34485D"/>
+                </a:solidFill>
+                <a:latin typeface="Aptos"/>
+                <a:ea typeface="Aptos"/>
+                <a:cs typeface="Aptos"/>
+              </a:rPr>
+              <a:t>Cada fuente responde una pregunta distinta; ObservedMovement y DME dependen de cobertura completa.</a:t>
+            </a:r>
+          </a:p>
+        </p:txBody>
+      </p:sp>
+      <p:sp>
+        <p:nvSpPr>
+          <p:cNvPr id="36" name="workflow-placement-observado">
+            <a:extLst xmlns:a="http://schemas.openxmlformats.org/drawingml/2006/main">
+              <a:ext uri="{FF2B5EF4-FFF2-40B4-BE49-F238E27FC236}">
+                <a16:creationId xmlns:a16="http://schemas.microsoft.com/office/drawing/2014/main" id="{257F95DB-EEC1-489F-918B-8F594A68137D}"/>
+              </a:ext>
+            </a:extLst>
+          </p:cNvPr>
+          <p:cNvSpPr>
+            <a:spLocks xmlns:a="http://schemas.openxmlformats.org/drawingml/2006/main" noGrp="1"/>
+          </p:cNvSpPr>
+          <p:nvPr/>
+        </p:nvSpPr>
+        <p:spPr>
+          <a:xfrm xmlns:a="http://schemas.openxmlformats.org/drawingml/2006/main">
+            <a:off x="1762125" y="1752600"/>
+            <a:ext cx="3238500" cy="571500"/>
+          </a:xfrm>
+          <a:prstGeom xmlns:a="http://schemas.openxmlformats.org/drawingml/2006/main" prst="roundRect">
+            <a:avLst>
+              <a:gd name="adj" fmla="val 16667"/>
+            </a:avLst>
+          </a:prstGeom>
+          <a:solidFill xmlns:a="http://schemas.openxmlformats.org/drawingml/2006/main">
+            <a:srgbClr val="EAF2FF"/>
+          </a:solidFill>
+          <a:ln xmlns:a="http://schemas.openxmlformats.org/drawingml/2006/main" w="14288">
+            <a:solidFill>
+              <a:srgbClr val="2563EB"/>
+            </a:solidFill>
+            <a:prstDash val="solid"/>
+          </a:ln>
+        </p:spPr>
+        <p:txBody>
+          <a:bodyPr xmlns:a="http://schemas.openxmlformats.org/drawingml/2006/main" wrap="square" lIns="85725" tIns="47625" rIns="85725" bIns="47625" anchor="ctr">
+            <a:normAutofit fontScale="87583"/>
+          </a:bodyPr>
+          <a:lstStyle xmlns:a="http://schemas.openxmlformats.org/drawingml/2006/main"/>
+          <a:p xmlns:a="http://schemas.openxmlformats.org/drawingml/2006/main">
+            <a:pPr algn="ctr">
+              <a:defRPr sz="1575" b="1">
+                <a:solidFill>
+                  <a:srgbClr val="142D45"/>
+                </a:solidFill>
+                <a:latin typeface="Aptos"/>
+                <a:ea typeface="Aptos"/>
+                <a:cs typeface="Aptos"/>
+              </a:defRPr>
+            </a:pPr>
+            <a:r>
+              <a:rPr sz="1575" b="1">
+                <a:solidFill>
+                  <a:srgbClr val="142D45"/>
+                </a:solidFill>
+                <a:latin typeface="Aptos"/>
+                <a:ea typeface="Aptos"/>
+                <a:cs typeface="Aptos"/>
+              </a:rPr>
+              <a:t>Workflow + placement</a:t>
+            </a:r>
+          </a:p>
+          <a:p xmlns:a="http://schemas.openxmlformats.org/drawingml/2006/main">
+            <a:pPr algn="ctr">
+              <a:defRPr sz="1575" b="1">
+                <a:solidFill>
+                  <a:srgbClr val="142D45"/>
+                </a:solidFill>
+                <a:latin typeface="Aptos"/>
+                <a:ea typeface="Aptos"/>
+                <a:cs typeface="Aptos"/>
+              </a:defRPr>
+            </a:pPr>
+            <a:r>
+              <a:rPr sz="1575" b="1">
+                <a:solidFill>
+                  <a:srgbClr val="142D45"/>
+                </a:solidFill>
+                <a:latin typeface="Aptos"/>
+                <a:ea typeface="Aptos"/>
+                <a:cs typeface="Aptos"/>
+              </a:rPr>
+              <a:t>observado</a:t>
+            </a:r>
+          </a:p>
+        </p:txBody>
+      </p:sp>
+      <p:sp>
+        <p:nvSpPr>
+          <p:cNvPr id="37" name="required-movement">
+            <a:extLst xmlns:a="http://schemas.openxmlformats.org/drawingml/2006/main">
+              <a:ext uri="{FF2B5EF4-FFF2-40B4-BE49-F238E27FC236}">
+                <a16:creationId xmlns:a16="http://schemas.microsoft.com/office/drawing/2014/main" id="{54F7AE1A-779D-41E8-B467-7CA7365BEB41}"/>
+              </a:ext>
+            </a:extLst>
+          </p:cNvPr>
+          <p:cNvSpPr>
+            <a:spLocks xmlns:a="http://schemas.openxmlformats.org/drawingml/2006/main" noGrp="1"/>
+          </p:cNvSpPr>
+          <p:nvPr/>
+        </p:nvSpPr>
+        <p:spPr>
+          <a:xfrm xmlns:a="http://schemas.openxmlformats.org/drawingml/2006/main">
+            <a:off x="6477000" y="1752600"/>
+            <a:ext cx="4381500" cy="571500"/>
+          </a:xfrm>
+          <a:prstGeom xmlns:a="http://schemas.openxmlformats.org/drawingml/2006/main" prst="roundRect">
+            <a:avLst>
+              <a:gd name="adj" fmla="val 16667"/>
+            </a:avLst>
+          </a:prstGeom>
+          <a:solidFill xmlns:a="http://schemas.openxmlformats.org/drawingml/2006/main">
+            <a:srgbClr val="FFFFFF"/>
+          </a:solidFill>
+          <a:ln xmlns:a="http://schemas.openxmlformats.org/drawingml/2006/main" w="14288">
+            <a:solidFill>
+              <a:srgbClr val="2563EB"/>
+            </a:solidFill>
+            <a:prstDash val="solid"/>
+          </a:ln>
+        </p:spPr>
+        <p:txBody>
+          <a:bodyPr xmlns:a="http://schemas.openxmlformats.org/drawingml/2006/main" wrap="square" lIns="85725" tIns="47625" rIns="85725" bIns="47625" anchor="ctr">
+            <a:normAutofit fontScale="100000"/>
+          </a:bodyPr>
+          <a:lstStyle xmlns:a="http://schemas.openxmlformats.org/drawingml/2006/main"/>
+          <a:p xmlns:a="http://schemas.openxmlformats.org/drawingml/2006/main">
+            <a:pPr algn="ctr">
+              <a:defRPr sz="1650" b="1">
+                <a:solidFill>
+                  <a:srgbClr val="142D45"/>
+                </a:solidFill>
+                <a:latin typeface="Aptos"/>
+                <a:ea typeface="Aptos"/>
+                <a:cs typeface="Aptos"/>
+              </a:defRPr>
+            </a:pPr>
+            <a:r>
+              <a:rPr sz="1650" b="1">
+                <a:solidFill>
+                  <a:srgbClr val="142D45"/>
+                </a:solidFill>
+                <a:latin typeface="Aptos"/>
+                <a:ea typeface="Aptos"/>
+                <a:cs typeface="Aptos"/>
+              </a:rPr>
+              <a:t>RequiredMovement</a:t>
+            </a:r>
+          </a:p>
+        </p:txBody>
+      </p:sp>
+      <p:sp>
+        <p:nvSpPr>
+          <p:cNvPr id="38" name="execution-model-condorio">
+            <a:extLst xmlns:a="http://schemas.openxmlformats.org/drawingml/2006/main">
+              <a:ext uri="{FF2B5EF4-FFF2-40B4-BE49-F238E27FC236}">
+                <a16:creationId xmlns:a16="http://schemas.microsoft.com/office/drawing/2014/main" id="{1B9EEC8A-0236-4A19-A6C4-9C7E387F4BC9}"/>
+              </a:ext>
+            </a:extLst>
+          </p:cNvPr>
+          <p:cNvSpPr>
+            <a:spLocks xmlns:a="http://schemas.openxmlformats.org/drawingml/2006/main" noGrp="1"/>
+          </p:cNvSpPr>
+          <p:nvPr/>
+        </p:nvSpPr>
+        <p:spPr>
+          <a:xfrm xmlns:a="http://schemas.openxmlformats.org/drawingml/2006/main">
+            <a:off x="1762125" y="2828925"/>
+            <a:ext cx="3238500" cy="571500"/>
+          </a:xfrm>
+          <a:prstGeom xmlns:a="http://schemas.openxmlformats.org/drawingml/2006/main" prst="roundRect">
+            <a:avLst>
+              <a:gd name="adj" fmla="val 16667"/>
+            </a:avLst>
+          </a:prstGeom>
+          <a:solidFill xmlns:a="http://schemas.openxmlformats.org/drawingml/2006/main">
+            <a:srgbClr val="FFF4D6"/>
+          </a:solidFill>
+          <a:ln xmlns:a="http://schemas.openxmlformats.org/drawingml/2006/main" w="14288">
+            <a:solidFill>
+              <a:srgbClr val="B45309"/>
+            </a:solidFill>
+            <a:prstDash val="solid"/>
+          </a:ln>
+        </p:spPr>
+        <p:txBody>
+          <a:bodyPr xmlns:a="http://schemas.openxmlformats.org/drawingml/2006/main" wrap="square" lIns="85725" tIns="47625" rIns="85725" bIns="47625" anchor="ctr">
+            <a:normAutofit fontScale="87583"/>
+          </a:bodyPr>
+          <a:lstStyle xmlns:a="http://schemas.openxmlformats.org/drawingml/2006/main"/>
+          <a:p xmlns:a="http://schemas.openxmlformats.org/drawingml/2006/main">
+            <a:pPr algn="ctr">
+              <a:defRPr sz="1575" b="1">
+                <a:solidFill>
+                  <a:srgbClr val="142D45"/>
+                </a:solidFill>
+                <a:latin typeface="Aptos"/>
+                <a:ea typeface="Aptos"/>
+                <a:cs typeface="Aptos"/>
+              </a:defRPr>
+            </a:pPr>
+            <a:r>
+              <a:rPr sz="1575" b="1">
+                <a:solidFill>
+                  <a:srgbClr val="142D45"/>
+                </a:solidFill>
+                <a:latin typeface="Aptos"/>
+                <a:ea typeface="Aptos"/>
+                <a:cs typeface="Aptos"/>
+              </a:rPr>
+              <a:t>Pegasus / HTCondor</a:t>
+            </a:r>
+          </a:p>
+          <a:p xmlns:a="http://schemas.openxmlformats.org/drawingml/2006/main">
+            <a:pPr algn="ctr">
+              <a:defRPr sz="1575" b="1">
+                <a:solidFill>
+                  <a:srgbClr val="142D45"/>
+                </a:solidFill>
+                <a:latin typeface="Aptos"/>
+                <a:ea typeface="Aptos"/>
+                <a:cs typeface="Aptos"/>
+              </a:defRPr>
+            </a:pPr>
+            <a:r>
+              <a:rPr sz="1575" b="1">
+                <a:solidFill>
+                  <a:srgbClr val="142D45"/>
+                </a:solidFill>
+                <a:latin typeface="Aptos"/>
+                <a:ea typeface="Aptos"/>
+                <a:cs typeface="Aptos"/>
+              </a:rPr>
+              <a:t>condorio</a:t>
+            </a:r>
+          </a:p>
+        </p:txBody>
+      </p:sp>
+      <p:sp>
+        <p:nvSpPr>
+          <p:cNvPr id="39" name="declared-movement">
+            <a:extLst xmlns:a="http://schemas.openxmlformats.org/drawingml/2006/main">
+              <a:ext uri="{FF2B5EF4-FFF2-40B4-BE49-F238E27FC236}">
+                <a16:creationId xmlns:a16="http://schemas.microsoft.com/office/drawing/2014/main" id="{1D9F44E6-D50B-4C3C-8B5F-3B5308BAC819}"/>
+              </a:ext>
+            </a:extLst>
+          </p:cNvPr>
+          <p:cNvSpPr>
+            <a:spLocks xmlns:a="http://schemas.openxmlformats.org/drawingml/2006/main" noGrp="1"/>
+          </p:cNvSpPr>
+          <p:nvPr/>
+        </p:nvSpPr>
+        <p:spPr>
+          <a:xfrm xmlns:a="http://schemas.openxmlformats.org/drawingml/2006/main">
+            <a:off x="6477000" y="2828925"/>
+            <a:ext cx="4381500" cy="571500"/>
+          </a:xfrm>
+          <a:prstGeom xmlns:a="http://schemas.openxmlformats.org/drawingml/2006/main" prst="roundRect">
+            <a:avLst>
+              <a:gd name="adj" fmla="val 16667"/>
+            </a:avLst>
+          </a:prstGeom>
+          <a:solidFill xmlns:a="http://schemas.openxmlformats.org/drawingml/2006/main">
+            <a:srgbClr val="FFFFFF"/>
+          </a:solidFill>
+          <a:ln xmlns:a="http://schemas.openxmlformats.org/drawingml/2006/main" w="14288">
+            <a:solidFill>
+              <a:srgbClr val="B45309"/>
+            </a:solidFill>
+            <a:prstDash val="solid"/>
+          </a:ln>
+        </p:spPr>
+        <p:txBody>
+          <a:bodyPr xmlns:a="http://schemas.openxmlformats.org/drawingml/2006/main" wrap="square" lIns="85725" tIns="47625" rIns="85725" bIns="47625" anchor="ctr">
+            <a:normAutofit fontScale="100000"/>
+          </a:bodyPr>
+          <a:lstStyle xmlns:a="http://schemas.openxmlformats.org/drawingml/2006/main"/>
+          <a:p xmlns:a="http://schemas.openxmlformats.org/drawingml/2006/main">
+            <a:pPr algn="ctr">
+              <a:defRPr sz="1650" b="1">
+                <a:solidFill>
+                  <a:srgbClr val="142D45"/>
+                </a:solidFill>
+                <a:latin typeface="Aptos"/>
+                <a:ea typeface="Aptos"/>
+                <a:cs typeface="Aptos"/>
+              </a:defRPr>
+            </a:pPr>
+            <a:r>
+              <a:rPr sz="1650" b="1">
+                <a:solidFill>
+                  <a:srgbClr val="142D45"/>
+                </a:solidFill>
+                <a:latin typeface="Aptos"/>
+                <a:ea typeface="Aptos"/>
+                <a:cs typeface="Aptos"/>
+              </a:rPr>
+              <a:t>DeclaredMovement</a:t>
+            </a:r>
+          </a:p>
+        </p:txBody>
+      </p:sp>
+      <p:sp>
+        <p:nvSpPr>
+          <p:cNvPr id="40" name="history-evidence">
+            <a:extLst xmlns:a="http://schemas.openxmlformats.org/drawingml/2006/main">
+              <a:ext uri="{FF2B5EF4-FFF2-40B4-BE49-F238E27FC236}">
+                <a16:creationId xmlns:a16="http://schemas.microsoft.com/office/drawing/2014/main" id="{32A56FC4-88E0-45C4-9B96-AAD36EF0EA80}"/>
+              </a:ext>
+            </a:extLst>
+          </p:cNvPr>
+          <p:cNvSpPr>
+            <a:spLocks xmlns:a="http://schemas.openxmlformats.org/drawingml/2006/main" noGrp="1"/>
+          </p:cNvSpPr>
+          <p:nvPr/>
+        </p:nvSpPr>
+        <p:spPr>
+          <a:xfrm xmlns:a="http://schemas.openxmlformats.org/drawingml/2006/main">
+            <a:off x="1143000" y="3981450"/>
+            <a:ext cx="2238375" cy="609600"/>
+          </a:xfrm>
+          <a:prstGeom xmlns:a="http://schemas.openxmlformats.org/drawingml/2006/main" prst="roundRect">
+            <a:avLst>
+              <a:gd name="adj" fmla="val 15625"/>
+            </a:avLst>
+          </a:prstGeom>
+          <a:solidFill xmlns:a="http://schemas.openxmlformats.org/drawingml/2006/main">
+            <a:srgbClr val="F1ECFF"/>
+          </a:solidFill>
+          <a:ln xmlns:a="http://schemas.openxmlformats.org/drawingml/2006/main" w="14288">
+            <a:solidFill>
+              <a:srgbClr val="6D28D9"/>
+            </a:solidFill>
+            <a:prstDash val="solid"/>
+          </a:ln>
+        </p:spPr>
+        <p:txBody>
+          <a:bodyPr xmlns:a="http://schemas.openxmlformats.org/drawingml/2006/main" wrap="square" lIns="85725" tIns="47625" rIns="85725" bIns="47625" anchor="ctr">
+            <a:normAutofit fontScale="100000"/>
+          </a:bodyPr>
+          <a:lstStyle xmlns:a="http://schemas.openxmlformats.org/drawingml/2006/main"/>
+          <a:p xmlns:a="http://schemas.openxmlformats.org/drawingml/2006/main">
+            <a:pPr algn="ctr">
+              <a:defRPr sz="1425" b="1">
+                <a:solidFill>
+                  <a:srgbClr val="142D45"/>
+                </a:solidFill>
+                <a:latin typeface="Aptos"/>
+                <a:ea typeface="Aptos"/>
+                <a:cs typeface="Aptos"/>
+              </a:defRPr>
+            </a:pPr>
+            <a:r>
+              <a:rPr sz="1425" b="1">
+                <a:solidFill>
+                  <a:srgbClr val="142D45"/>
+                </a:solidFill>
+                <a:latin typeface="Aptos"/>
+                <a:ea typeface="Aptos"/>
+                <a:cs typeface="Aptos"/>
+              </a:rPr>
+              <a:t>HTCondor history</a:t>
+            </a:r>
+          </a:p>
+          <a:p xmlns:a="http://schemas.openxmlformats.org/drawingml/2006/main">
+            <a:pPr algn="ctr">
+              <a:defRPr sz="1425" b="1">
+                <a:solidFill>
+                  <a:srgbClr val="142D45"/>
+                </a:solidFill>
+                <a:latin typeface="Aptos"/>
+                <a:ea typeface="Aptos"/>
+                <a:cs typeface="Aptos"/>
+              </a:defRPr>
+            </a:pPr>
+            <a:r>
+              <a:rPr sz="1425" b="1">
+                <a:solidFill>
+                  <a:srgbClr val="142D45"/>
+                </a:solidFill>
+                <a:latin typeface="Aptos"/>
+                <a:ea typeface="Aptos"/>
+                <a:cs typeface="Aptos"/>
+              </a:rPr>
+              <a:t>+ evidencia</a:t>
+            </a:r>
+          </a:p>
+        </p:txBody>
+      </p:sp>
+      <p:sp>
+        <p:nvSpPr>
+          <p:cNvPr id="41" name="coverage">
+            <a:extLst xmlns:a="http://schemas.openxmlformats.org/drawingml/2006/main">
+              <a:ext uri="{FF2B5EF4-FFF2-40B4-BE49-F238E27FC236}">
+                <a16:creationId xmlns:a16="http://schemas.microsoft.com/office/drawing/2014/main" id="{4EE98A56-5B87-466E-95DF-D5A7A54BA266}"/>
+              </a:ext>
+            </a:extLst>
+          </p:cNvPr>
+          <p:cNvSpPr>
+            <a:spLocks xmlns:a="http://schemas.openxmlformats.org/drawingml/2006/main" noGrp="1"/>
+          </p:cNvSpPr>
+          <p:nvPr/>
+        </p:nvSpPr>
+        <p:spPr>
+          <a:xfrm xmlns:a="http://schemas.openxmlformats.org/drawingml/2006/main">
+            <a:off x="3952875" y="3981450"/>
+            <a:ext cx="1476375" cy="609600"/>
+          </a:xfrm>
+          <a:prstGeom xmlns:a="http://schemas.openxmlformats.org/drawingml/2006/main" prst="roundRect">
+            <a:avLst>
+              <a:gd name="adj" fmla="val 15625"/>
+            </a:avLst>
+          </a:prstGeom>
+          <a:solidFill xmlns:a="http://schemas.openxmlformats.org/drawingml/2006/main">
+            <a:srgbClr val="E7F6F3"/>
+          </a:solidFill>
+          <a:ln xmlns:a="http://schemas.openxmlformats.org/drawingml/2006/main" w="14288">
+            <a:solidFill>
+              <a:srgbClr val="0F766E"/>
+            </a:solidFill>
+            <a:prstDash val="solid"/>
+          </a:ln>
+        </p:spPr>
+        <p:txBody>
+          <a:bodyPr xmlns:a="http://schemas.openxmlformats.org/drawingml/2006/main" wrap="square" lIns="85725" tIns="47625" rIns="85725" bIns="47625" anchor="ctr">
+            <a:normAutofit fontScale="100000"/>
+          </a:bodyPr>
+          <a:lstStyle xmlns:a="http://schemas.openxmlformats.org/drawingml/2006/main"/>
+          <a:p xmlns:a="http://schemas.openxmlformats.org/drawingml/2006/main">
+            <a:pPr algn="ctr">
+              <a:defRPr sz="1500" b="1">
+                <a:solidFill>
+                  <a:srgbClr val="142D45"/>
+                </a:solidFill>
+                <a:latin typeface="Aptos"/>
+                <a:ea typeface="Aptos"/>
+                <a:cs typeface="Aptos"/>
+              </a:defRPr>
+            </a:pPr>
+            <a:r>
+              <a:rPr sz="1500" b="1">
+                <a:solidFill>
+                  <a:srgbClr val="142D45"/>
+                </a:solidFill>
+                <a:latin typeface="Aptos"/>
+                <a:ea typeface="Aptos"/>
+                <a:cs typeface="Aptos"/>
+              </a:rPr>
+              <a:t>Coverage</a:t>
+            </a:r>
+          </a:p>
+        </p:txBody>
+      </p:sp>
+      <p:sp>
+        <p:nvSpPr>
+          <p:cNvPr id="42" name="observed-movement">
+            <a:extLst xmlns:a="http://schemas.openxmlformats.org/drawingml/2006/main">
+              <a:ext uri="{FF2B5EF4-FFF2-40B4-BE49-F238E27FC236}">
+                <a16:creationId xmlns:a16="http://schemas.microsoft.com/office/drawing/2014/main" id="{AF74E373-DB18-4D3A-BBA0-9C6DD83ED32C}"/>
+              </a:ext>
+            </a:extLst>
+          </p:cNvPr>
+          <p:cNvSpPr>
+            <a:spLocks xmlns:a="http://schemas.openxmlformats.org/drawingml/2006/main" noGrp="1"/>
+          </p:cNvSpPr>
+          <p:nvPr/>
+        </p:nvSpPr>
+        <p:spPr>
+          <a:xfrm xmlns:a="http://schemas.openxmlformats.org/drawingml/2006/main">
+            <a:off x="6096000" y="3981450"/>
+            <a:ext cx="2095500" cy="609600"/>
+          </a:xfrm>
+          <a:prstGeom xmlns:a="http://schemas.openxmlformats.org/drawingml/2006/main" prst="roundRect">
+            <a:avLst>
+              <a:gd name="adj" fmla="val 15625"/>
+            </a:avLst>
+          </a:prstGeom>
+          <a:solidFill xmlns:a="http://schemas.openxmlformats.org/drawingml/2006/main">
+            <a:srgbClr val="EAF7EE"/>
+          </a:solidFill>
+          <a:ln xmlns:a="http://schemas.openxmlformats.org/drawingml/2006/main" w="14288">
+            <a:solidFill>
+              <a:srgbClr val="15803D"/>
+            </a:solidFill>
+            <a:prstDash val="solid"/>
+          </a:ln>
+        </p:spPr>
+        <p:txBody>
+          <a:bodyPr xmlns:a="http://schemas.openxmlformats.org/drawingml/2006/main" wrap="square" lIns="85725" tIns="47625" rIns="85725" bIns="47625" anchor="ctr">
+            <a:normAutofit fontScale="100000"/>
+          </a:bodyPr>
+          <a:lstStyle xmlns:a="http://schemas.openxmlformats.org/drawingml/2006/main"/>
+          <a:p xmlns:a="http://schemas.openxmlformats.org/drawingml/2006/main">
+            <a:pPr algn="ctr">
+              <a:defRPr sz="1425" b="1">
+                <a:solidFill>
+                  <a:srgbClr val="142D45"/>
+                </a:solidFill>
+                <a:latin typeface="Aptos"/>
+                <a:ea typeface="Aptos"/>
+                <a:cs typeface="Aptos"/>
+              </a:defRPr>
+            </a:pPr>
+            <a:r>
+              <a:rPr sz="1425" b="1">
+                <a:solidFill>
+                  <a:srgbClr val="142D45"/>
+                </a:solidFill>
+                <a:latin typeface="Aptos"/>
+                <a:ea typeface="Aptos"/>
+                <a:cs typeface="Aptos"/>
+              </a:rPr>
+              <a:t>ObservedMovement</a:t>
+            </a:r>
+          </a:p>
+        </p:txBody>
+      </p:sp>
+      <p:sp>
+        <p:nvSpPr>
+          <p:cNvPr id="43" name="dme">
+            <a:extLst xmlns:a="http://schemas.openxmlformats.org/drawingml/2006/main">
+              <a:ext uri="{FF2B5EF4-FFF2-40B4-BE49-F238E27FC236}">
+                <a16:creationId xmlns:a16="http://schemas.microsoft.com/office/drawing/2014/main" id="{3BF8451F-C0D7-4DB1-B424-FAE51DB778A7}"/>
+              </a:ext>
+            </a:extLst>
+          </p:cNvPr>
+          <p:cNvSpPr>
+            <a:spLocks xmlns:a="http://schemas.openxmlformats.org/drawingml/2006/main" noGrp="1"/>
+          </p:cNvSpPr>
+          <p:nvPr/>
+        </p:nvSpPr>
+        <p:spPr>
+          <a:xfrm xmlns:a="http://schemas.openxmlformats.org/drawingml/2006/main">
+            <a:off x="9048750" y="3981450"/>
+            <a:ext cx="1905000" cy="609600"/>
+          </a:xfrm>
+          <a:prstGeom xmlns:a="http://schemas.openxmlformats.org/drawingml/2006/main" prst="roundRect">
+            <a:avLst>
+              <a:gd name="adj" fmla="val 15625"/>
+            </a:avLst>
+          </a:prstGeom>
+          <a:solidFill xmlns:a="http://schemas.openxmlformats.org/drawingml/2006/main">
+            <a:srgbClr val="142D45"/>
+          </a:solidFill>
+          <a:ln xmlns:a="http://schemas.openxmlformats.org/drawingml/2006/main" w="14288">
+            <a:solidFill>
+              <a:srgbClr val="142D45"/>
+            </a:solidFill>
+            <a:prstDash val="solid"/>
+          </a:ln>
+        </p:spPr>
+        <p:txBody>
+          <a:bodyPr xmlns:a="http://schemas.openxmlformats.org/drawingml/2006/main" wrap="square" lIns="85725" tIns="47625" rIns="85725" bIns="47625" anchor="ctr">
+            <a:normAutofit fontScale="100000"/>
+          </a:bodyPr>
+          <a:lstStyle xmlns:a="http://schemas.openxmlformats.org/drawingml/2006/main"/>
+          <a:p xmlns:a="http://schemas.openxmlformats.org/drawingml/2006/main">
+            <a:pPr algn="ctr">
+              <a:defRPr sz="1650" b="1">
+                <a:solidFill>
+                  <a:srgbClr val="FFFFFF"/>
+                </a:solidFill>
+                <a:latin typeface="Aptos"/>
+                <a:ea typeface="Aptos"/>
+                <a:cs typeface="Aptos"/>
+              </a:defRPr>
+            </a:pPr>
+            <a:r>
+              <a:rPr sz="1650" b="1">
+                <a:solidFill>
+                  <a:srgbClr val="FFFFFF"/>
+                </a:solidFill>
+                <a:latin typeface="Aptos"/>
+                <a:ea typeface="Aptos"/>
+                <a:cs typeface="Aptos"/>
+              </a:rPr>
+              <a:t>DME</a:t>
+            </a:r>
+          </a:p>
+        </p:txBody>
+      </p:sp>
+      <p:cxnSp>
+        <p:nvCxnSpPr>
+          <p:cNvPr id="73" name=""/>
+          <p:cNvCxnSpPr>
+            <a:stCxn xmlns:a="http://schemas.openxmlformats.org/drawingml/2006/main" id="36" idx="3"/>
+            <a:endCxn xmlns:a="http://schemas.openxmlformats.org/drawingml/2006/main" id="37" idx="1"/>
+          </p:cNvCxnSpPr>
+          <p:nvPr/>
+        </p:nvCxnSpPr>
+        <p:spPr>
+          <a:xfrm xmlns:a="http://schemas.openxmlformats.org/drawingml/2006/main">
+            <a:off x="5000625" y="2038350"/>
+            <a:ext cx="1476375" cy="0"/>
+          </a:xfrm>
+          <a:prstGeom xmlns:a="http://schemas.openxmlformats.org/drawingml/2006/main" prst="straightConnector1">
+            <a:avLst/>
+          </a:prstGeom>
+          <a:ln xmlns:a="http://schemas.openxmlformats.org/drawingml/2006/main" w="19050">
+            <a:solidFill>
+              <a:srgbClr val="2563EB"/>
+            </a:solidFill>
+            <a:prstDash val="solid"/>
+            <a:tailEnd type="triangle" w="sm" len="sm"/>
+          </a:ln>
+        </p:spPr>
+      </p:cxnSp>
+      <p:cxnSp>
+        <p:nvCxnSpPr>
+          <p:cNvPr id="74" name=""/>
+          <p:cNvCxnSpPr>
+            <a:stCxn xmlns:a="http://schemas.openxmlformats.org/drawingml/2006/main" id="38" idx="3"/>
+            <a:endCxn xmlns:a="http://schemas.openxmlformats.org/drawingml/2006/main" id="39" idx="1"/>
+          </p:cNvCxnSpPr>
+          <p:nvPr/>
+        </p:nvCxnSpPr>
+        <p:spPr>
+          <a:xfrm xmlns:a="http://schemas.openxmlformats.org/drawingml/2006/main">
+            <a:off x="5000625" y="3114675"/>
+            <a:ext cx="1476375" cy="0"/>
+          </a:xfrm>
+          <a:prstGeom xmlns:a="http://schemas.openxmlformats.org/drawingml/2006/main" prst="straightConnector1">
+            <a:avLst/>
+          </a:prstGeom>
+          <a:ln xmlns:a="http://schemas.openxmlformats.org/drawingml/2006/main" w="19050">
+            <a:solidFill>
+              <a:srgbClr val="B45309"/>
+            </a:solidFill>
+            <a:prstDash val="solid"/>
+            <a:tailEnd type="triangle" w="sm" len="sm"/>
+          </a:ln>
+        </p:spPr>
+      </p:cxnSp>
+      <p:cxnSp>
+        <p:nvCxnSpPr>
+          <p:cNvPr id="75" name=""/>
+          <p:cNvCxnSpPr>
+            <a:stCxn xmlns:a="http://schemas.openxmlformats.org/drawingml/2006/main" id="40" idx="3"/>
+            <a:endCxn xmlns:a="http://schemas.openxmlformats.org/drawingml/2006/main" id="41" idx="1"/>
+          </p:cNvCxnSpPr>
+          <p:nvPr/>
+        </p:nvCxnSpPr>
+        <p:spPr>
+          <a:xfrm xmlns:a="http://schemas.openxmlformats.org/drawingml/2006/main">
+            <a:off x="3381375" y="4286250"/>
+            <a:ext cx="571500" cy="0"/>
+          </a:xfrm>
+          <a:prstGeom xmlns:a="http://schemas.openxmlformats.org/drawingml/2006/main" prst="straightConnector1">
+            <a:avLst/>
+          </a:prstGeom>
+          <a:ln xmlns:a="http://schemas.openxmlformats.org/drawingml/2006/main" w="19050">
+            <a:solidFill>
+              <a:srgbClr val="6D28D9"/>
+            </a:solidFill>
+            <a:prstDash val="solid"/>
+            <a:tailEnd type="triangle" w="sm" len="sm"/>
+          </a:ln>
+        </p:spPr>
+      </p:cxnSp>
+      <p:cxnSp>
+        <p:nvCxnSpPr>
+          <p:cNvPr id="76" name=""/>
+          <p:cNvCxnSpPr>
+            <a:stCxn xmlns:a="http://schemas.openxmlformats.org/drawingml/2006/main" id="41" idx="3"/>
+            <a:endCxn xmlns:a="http://schemas.openxmlformats.org/drawingml/2006/main" id="42" idx="1"/>
+          </p:cNvCxnSpPr>
+          <p:nvPr/>
+        </p:nvCxnSpPr>
+        <p:spPr>
+          <a:xfrm xmlns:a="http://schemas.openxmlformats.org/drawingml/2006/main">
+            <a:off x="5429250" y="4286250"/>
+            <a:ext cx="666750" cy="0"/>
+          </a:xfrm>
+          <a:prstGeom xmlns:a="http://schemas.openxmlformats.org/drawingml/2006/main" prst="straightConnector1">
+            <a:avLst/>
+          </a:prstGeom>
+          <a:ln xmlns:a="http://schemas.openxmlformats.org/drawingml/2006/main" w="19050">
+            <a:solidFill>
+              <a:srgbClr val="0F766E"/>
+            </a:solidFill>
+            <a:prstDash val="solid"/>
+            <a:tailEnd type="triangle" w="sm" len="sm"/>
+          </a:ln>
+        </p:spPr>
+      </p:cxnSp>
+      <p:cxnSp>
+        <p:nvCxnSpPr>
+          <p:cNvPr id="77" name=""/>
+          <p:cNvCxnSpPr>
+            <a:stCxn xmlns:a="http://schemas.openxmlformats.org/drawingml/2006/main" id="42" idx="3"/>
+            <a:endCxn xmlns:a="http://schemas.openxmlformats.org/drawingml/2006/main" id="43" idx="1"/>
+          </p:cNvCxnSpPr>
+          <p:nvPr/>
+        </p:nvCxnSpPr>
+        <p:spPr>
+          <a:xfrm xmlns:a="http://schemas.openxmlformats.org/drawingml/2006/main">
+            <a:off x="8191500" y="4286250"/>
+            <a:ext cx="857250" cy="0"/>
+          </a:xfrm>
+          <a:prstGeom xmlns:a="http://schemas.openxmlformats.org/drawingml/2006/main" prst="straightConnector1">
+            <a:avLst/>
+          </a:prstGeom>
+          <a:ln xmlns:a="http://schemas.openxmlformats.org/drawingml/2006/main" w="19050">
+            <a:solidFill>
+              <a:srgbClr val="15803D"/>
+            </a:solidFill>
+            <a:prstDash val="solid"/>
+            <a:tailEnd type="triangle" w="sm" len="sm"/>
+          </a:ln>
+        </p:spPr>
+      </p:cxnSp>
+      <p:sp>
+        <p:nvSpPr>
+          <p:cNvPr id="49" name="">
+            <a:extLst xmlns:a="http://schemas.openxmlformats.org/drawingml/2006/main">
+              <a:ext uri="{FF2B5EF4-FFF2-40B4-BE49-F238E27FC236}">
+                <a16:creationId xmlns:a16="http://schemas.microsoft.com/office/drawing/2014/main" id="{EEAB72AB-047E-4854-9E77-49D088F9038B}"/>
+              </a:ext>
+            </a:extLst>
+          </p:cNvPr>
+          <p:cNvSpPr>
+            <a:spLocks xmlns:a="http://schemas.openxmlformats.org/drawingml/2006/main" noGrp="1"/>
+          </p:cNvSpPr>
+          <p:nvPr/>
+        </p:nvSpPr>
+        <p:spPr>
+          <a:xfrm xmlns:a="http://schemas.openxmlformats.org/drawingml/2006/main">
+            <a:off x="1704975" y="2381250"/>
+            <a:ext cx="3333750" cy="409575"/>
+          </a:xfrm>
+          <a:prstGeom xmlns:a="http://schemas.openxmlformats.org/drawingml/2006/main" prst="rect">
+            <a:avLst/>
+          </a:prstGeom>
+          <a:noFill xmlns:a="http://schemas.openxmlformats.org/drawingml/2006/main"/>
+          <a:ln xmlns:a="http://schemas.openxmlformats.org/drawingml/2006/main" w="0">
+            <a:noFill/>
+            <a:prstDash val="solid"/>
+          </a:ln>
+        </p:spPr>
+        <p:txBody>
+          <a:bodyPr xmlns:a="http://schemas.openxmlformats.org/drawingml/2006/main" wrap="square" lIns="0" tIns="0" rIns="0" bIns="0" anchor="ctr">
+            <a:normAutofit fontScale="100000"/>
+          </a:bodyPr>
+          <a:lstStyle xmlns:a="http://schemas.openxmlformats.org/drawingml/2006/main"/>
+          <a:p xmlns:a="http://schemas.openxmlformats.org/drawingml/2006/main">
+            <a:pPr algn="ctr">
+              <a:defRPr sz="1200" b="0">
+                <a:solidFill>
+                  <a:srgbClr val="65758B"/>
+                </a:solidFill>
+                <a:latin typeface="Aptos"/>
+                <a:ea typeface="Aptos"/>
+                <a:cs typeface="Aptos"/>
+              </a:defRPr>
+            </a:pPr>
+            <a:r>
+              <a:rPr sz="1200" b="0">
+                <a:solidFill>
+                  <a:srgbClr val="65758B"/>
+                </a:solidFill>
+                <a:latin typeface="Aptos"/>
+                <a:ea typeface="Aptos"/>
+                <a:cs typeface="Aptos"/>
+              </a:rPr>
+              <a:t>Dataflow científico</a:t>
+            </a:r>
+          </a:p>
+          <a:p xmlns:a="http://schemas.openxmlformats.org/drawingml/2006/main">
+            <a:pPr algn="ctr">
+              <a:defRPr sz="1200" b="0">
+                <a:solidFill>
+                  <a:srgbClr val="65758B"/>
+                </a:solidFill>
+                <a:latin typeface="Aptos"/>
+                <a:ea typeface="Aptos"/>
+                <a:cs typeface="Aptos"/>
+              </a:defRPr>
+            </a:pPr>
+            <a:r>
+              <a:rPr sz="1200" b="0">
+                <a:solidFill>
+                  <a:srgbClr val="65758B"/>
+                </a:solidFill>
+                <a:latin typeface="Aptos"/>
+                <a:ea typeface="Aptos"/>
+                <a:cs typeface="Aptos"/>
+              </a:rPr>
+              <a:t>y ubicación observada</a:t>
+            </a:r>
+          </a:p>
+        </p:txBody>
+      </p:sp>
+      <p:sp>
+        <p:nvSpPr>
+          <p:cNvPr id="50" name="">
+            <a:extLst xmlns:a="http://schemas.openxmlformats.org/drawingml/2006/main">
+              <a:ext uri="{FF2B5EF4-FFF2-40B4-BE49-F238E27FC236}">
+                <a16:creationId xmlns:a16="http://schemas.microsoft.com/office/drawing/2014/main" id="{CC73B24B-4E50-40A6-8C02-36CC9E69DBD8}"/>
+              </a:ext>
+            </a:extLst>
+          </p:cNvPr>
+          <p:cNvSpPr>
+            <a:spLocks xmlns:a="http://schemas.openxmlformats.org/drawingml/2006/main" noGrp="1"/>
+          </p:cNvSpPr>
+          <p:nvPr/>
+        </p:nvSpPr>
+        <p:spPr>
+          <a:xfrm xmlns:a="http://schemas.openxmlformats.org/drawingml/2006/main">
+            <a:off x="6524625" y="2381250"/>
+            <a:ext cx="4286250" cy="409575"/>
+          </a:xfrm>
+          <a:prstGeom xmlns:a="http://schemas.openxmlformats.org/drawingml/2006/main" prst="rect">
+            <a:avLst/>
+          </a:prstGeom>
+          <a:noFill xmlns:a="http://schemas.openxmlformats.org/drawingml/2006/main"/>
+          <a:ln xmlns:a="http://schemas.openxmlformats.org/drawingml/2006/main" w="0">
+            <a:noFill/>
+            <a:prstDash val="solid"/>
+          </a:ln>
+        </p:spPr>
+        <p:txBody>
+          <a:bodyPr xmlns:a="http://schemas.openxmlformats.org/drawingml/2006/main" wrap="square" lIns="0" tIns="0" rIns="0" bIns="0" anchor="ctr">
+            <a:normAutofit fontScale="100000"/>
+          </a:bodyPr>
+          <a:lstStyle xmlns:a="http://schemas.openxmlformats.org/drawingml/2006/main"/>
+          <a:p xmlns:a="http://schemas.openxmlformats.org/drawingml/2006/main">
+            <a:pPr algn="ctr">
+              <a:defRPr sz="1200" b="0">
+                <a:solidFill>
+                  <a:srgbClr val="65758B"/>
+                </a:solidFill>
+                <a:latin typeface="Aptos"/>
+                <a:ea typeface="Aptos"/>
+                <a:cs typeface="Aptos"/>
+              </a:defRPr>
+            </a:pPr>
+            <a:r>
+              <a:rPr sz="1200" b="0">
+                <a:solidFill>
+                  <a:srgbClr val="65758B"/>
+                </a:solidFill>
+                <a:latin typeface="Aptos"/>
+                <a:ea typeface="Aptos"/>
+                <a:cs typeface="Aptos"/>
+              </a:rPr>
+              <a:t>Mínimo lógico necesario</a:t>
+            </a:r>
+          </a:p>
+          <a:p xmlns:a="http://schemas.openxmlformats.org/drawingml/2006/main">
+            <a:pPr algn="ctr">
+              <a:defRPr sz="1200" b="0">
+                <a:solidFill>
+                  <a:srgbClr val="65758B"/>
+                </a:solidFill>
+                <a:latin typeface="Aptos"/>
+                <a:ea typeface="Aptos"/>
+                <a:cs typeface="Aptos"/>
+              </a:defRPr>
+            </a:pPr>
+            <a:r>
+              <a:rPr sz="1200" b="0">
+                <a:solidFill>
+                  <a:srgbClr val="65758B"/>
+                </a:solidFill>
+                <a:latin typeface="Aptos"/>
+                <a:ea typeface="Aptos"/>
+                <a:cs typeface="Aptos"/>
+              </a:rPr>
+              <a:t>para ese placement</a:t>
+            </a:r>
+          </a:p>
+        </p:txBody>
+      </p:sp>
+      <p:sp>
+        <p:nvSpPr>
+          <p:cNvPr id="51" name="">
+            <a:extLst xmlns:a="http://schemas.openxmlformats.org/drawingml/2006/main">
+              <a:ext uri="{FF2B5EF4-FFF2-40B4-BE49-F238E27FC236}">
+                <a16:creationId xmlns:a16="http://schemas.microsoft.com/office/drawing/2014/main" id="{B7CC1A1A-65F5-447A-9A36-B40813FFEA3B}"/>
+              </a:ext>
+            </a:extLst>
+          </p:cNvPr>
+          <p:cNvSpPr>
+            <a:spLocks xmlns:a="http://schemas.openxmlformats.org/drawingml/2006/main" noGrp="1"/>
+          </p:cNvSpPr>
+          <p:nvPr/>
+        </p:nvSpPr>
+        <p:spPr>
+          <a:xfrm xmlns:a="http://schemas.openxmlformats.org/drawingml/2006/main">
+            <a:off x="1704975" y="3457575"/>
+            <a:ext cx="3333750" cy="409575"/>
+          </a:xfrm>
+          <a:prstGeom xmlns:a="http://schemas.openxmlformats.org/drawingml/2006/main" prst="rect">
+            <a:avLst/>
+          </a:prstGeom>
+          <a:noFill xmlns:a="http://schemas.openxmlformats.org/drawingml/2006/main"/>
+          <a:ln xmlns:a="http://schemas.openxmlformats.org/drawingml/2006/main" w="0">
+            <a:noFill/>
+            <a:prstDash val="solid"/>
+          </a:ln>
+        </p:spPr>
+        <p:txBody>
+          <a:bodyPr xmlns:a="http://schemas.openxmlformats.org/drawingml/2006/main" wrap="square" lIns="0" tIns="0" rIns="0" bIns="0" anchor="ctr">
+            <a:normAutofit fontScale="100000"/>
+          </a:bodyPr>
+          <a:lstStyle xmlns:a="http://schemas.openxmlformats.org/drawingml/2006/main"/>
+          <a:p xmlns:a="http://schemas.openxmlformats.org/drawingml/2006/main">
+            <a:pPr algn="ctr">
+              <a:defRPr sz="1200" b="0">
+                <a:solidFill>
+                  <a:srgbClr val="65758B"/>
+                </a:solidFill>
+                <a:latin typeface="Aptos"/>
+                <a:ea typeface="Aptos"/>
+                <a:cs typeface="Aptos"/>
+              </a:defRPr>
+            </a:pPr>
+            <a:r>
+              <a:rPr sz="1200" b="0">
+                <a:solidFill>
+                  <a:srgbClr val="65758B"/>
+                </a:solidFill>
+                <a:latin typeface="Aptos"/>
+                <a:ea typeface="Aptos"/>
+                <a:cs typeface="Aptos"/>
+              </a:rPr>
+              <a:t>Perfil del modelo</a:t>
+            </a:r>
+          </a:p>
+          <a:p xmlns:a="http://schemas.openxmlformats.org/drawingml/2006/main">
+            <a:pPr algn="ctr">
+              <a:defRPr sz="1200" b="0">
+                <a:solidFill>
+                  <a:srgbClr val="65758B"/>
+                </a:solidFill>
+                <a:latin typeface="Aptos"/>
+                <a:ea typeface="Aptos"/>
+                <a:cs typeface="Aptos"/>
+              </a:defRPr>
+            </a:pPr>
+            <a:r>
+              <a:rPr sz="1200" b="0">
+                <a:solidFill>
+                  <a:srgbClr val="65758B"/>
+                </a:solidFill>
+                <a:latin typeface="Aptos"/>
+                <a:ea typeface="Aptos"/>
+                <a:cs typeface="Aptos"/>
+              </a:rPr>
+              <a:t>de ejecución</a:t>
+            </a:r>
+          </a:p>
+        </p:txBody>
+      </p:sp>
+      <p:sp>
+        <p:nvSpPr>
+          <p:cNvPr id="52" name="">
+            <a:extLst xmlns:a="http://schemas.openxmlformats.org/drawingml/2006/main">
+              <a:ext uri="{FF2B5EF4-FFF2-40B4-BE49-F238E27FC236}">
+                <a16:creationId xmlns:a16="http://schemas.microsoft.com/office/drawing/2014/main" id="{21594FFB-E19D-4E3E-803C-47913AC1840B}"/>
+              </a:ext>
+            </a:extLst>
+          </p:cNvPr>
+          <p:cNvSpPr>
+            <a:spLocks xmlns:a="http://schemas.openxmlformats.org/drawingml/2006/main" noGrp="1"/>
+          </p:cNvSpPr>
+          <p:nvPr/>
+        </p:nvSpPr>
+        <p:spPr>
+          <a:xfrm xmlns:a="http://schemas.openxmlformats.org/drawingml/2006/main">
+            <a:off x="6524625" y="3457575"/>
+            <a:ext cx="4286250" cy="409575"/>
+          </a:xfrm>
+          <a:prstGeom xmlns:a="http://schemas.openxmlformats.org/drawingml/2006/main" prst="rect">
+            <a:avLst/>
+          </a:prstGeom>
+          <a:noFill xmlns:a="http://schemas.openxmlformats.org/drawingml/2006/main"/>
+          <a:ln xmlns:a="http://schemas.openxmlformats.org/drawingml/2006/main" w="0">
+            <a:noFill/>
+            <a:prstDash val="solid"/>
+          </a:ln>
+        </p:spPr>
+        <p:txBody>
+          <a:bodyPr xmlns:a="http://schemas.openxmlformats.org/drawingml/2006/main" wrap="square" lIns="0" tIns="0" rIns="0" bIns="0" anchor="ctr">
+            <a:normAutofit fontScale="100000"/>
+          </a:bodyPr>
+          <a:lstStyle xmlns:a="http://schemas.openxmlformats.org/drawingml/2006/main"/>
+          <a:p xmlns:a="http://schemas.openxmlformats.org/drawingml/2006/main">
+            <a:pPr algn="ctr">
+              <a:defRPr sz="1200" b="0">
+                <a:solidFill>
+                  <a:srgbClr val="65758B"/>
+                </a:solidFill>
+                <a:latin typeface="Aptos"/>
+                <a:ea typeface="Aptos"/>
+                <a:cs typeface="Aptos"/>
+              </a:defRPr>
+            </a:pPr>
+            <a:r>
+              <a:rPr sz="1200" b="0">
+                <a:solidFill>
+                  <a:srgbClr val="65758B"/>
+                </a:solidFill>
+                <a:latin typeface="Aptos"/>
+                <a:ea typeface="Aptos"/>
+                <a:cs typeface="Aptos"/>
+              </a:rPr>
+              <a:t>Transferencia declarada</a:t>
+            </a:r>
+          </a:p>
+          <a:p xmlns:a="http://schemas.openxmlformats.org/drawingml/2006/main">
+            <a:pPr algn="ctr">
+              <a:defRPr sz="1200" b="0">
+                <a:solidFill>
+                  <a:srgbClr val="65758B"/>
+                </a:solidFill>
+                <a:latin typeface="Aptos"/>
+                <a:ea typeface="Aptos"/>
+                <a:cs typeface="Aptos"/>
+              </a:defRPr>
+            </a:pPr>
+            <a:r>
+              <a:rPr sz="1200" b="0">
+                <a:solidFill>
+                  <a:srgbClr val="65758B"/>
+                </a:solidFill>
+                <a:latin typeface="Aptos"/>
+                <a:ea typeface="Aptos"/>
+                <a:cs typeface="Aptos"/>
+              </a:rPr>
+              <a:t>por el execution model</a:t>
+            </a:r>
+          </a:p>
+        </p:txBody>
+      </p:sp>
+      <p:sp>
+        <p:nvSpPr>
+          <p:cNvPr id="53" name="">
+            <a:extLst xmlns:a="http://schemas.openxmlformats.org/drawingml/2006/main">
+              <a:ext uri="{FF2B5EF4-FFF2-40B4-BE49-F238E27FC236}">
+                <a16:creationId xmlns:a16="http://schemas.microsoft.com/office/drawing/2014/main" id="{214B2D24-C3AF-4547-A675-A23967688EB7}"/>
+              </a:ext>
+            </a:extLst>
+          </p:cNvPr>
+          <p:cNvSpPr>
+            <a:spLocks xmlns:a="http://schemas.openxmlformats.org/drawingml/2006/main" noGrp="1"/>
+          </p:cNvSpPr>
+          <p:nvPr/>
+        </p:nvSpPr>
+        <p:spPr>
+          <a:xfrm xmlns:a="http://schemas.openxmlformats.org/drawingml/2006/main">
+            <a:off x="1047750" y="4610100"/>
+            <a:ext cx="2428875" cy="400050"/>
+          </a:xfrm>
+          <a:prstGeom xmlns:a="http://schemas.openxmlformats.org/drawingml/2006/main" prst="rect">
+            <a:avLst/>
+          </a:prstGeom>
+          <a:noFill xmlns:a="http://schemas.openxmlformats.org/drawingml/2006/main"/>
+          <a:ln xmlns:a="http://schemas.openxmlformats.org/drawingml/2006/main" w="0">
+            <a:noFill/>
+            <a:prstDash val="solid"/>
+          </a:ln>
+        </p:spPr>
+        <p:txBody>
+          <a:bodyPr xmlns:a="http://schemas.openxmlformats.org/drawingml/2006/main" wrap="square" lIns="0" tIns="0" rIns="0" bIns="0" anchor="ctr">
+            <a:normAutofit fontScale="100000"/>
+          </a:bodyPr>
+          <a:lstStyle xmlns:a="http://schemas.openxmlformats.org/drawingml/2006/main"/>
+          <a:p xmlns:a="http://schemas.openxmlformats.org/drawingml/2006/main">
+            <a:pPr algn="ctr">
+              <a:defRPr sz="1125" b="0">
+                <a:solidFill>
+                  <a:srgbClr val="65758B"/>
+                </a:solidFill>
+                <a:latin typeface="Aptos"/>
+                <a:ea typeface="Aptos"/>
+                <a:cs typeface="Aptos"/>
+              </a:defRPr>
+            </a:pPr>
+            <a:r>
+              <a:rPr sz="1125" b="0">
+                <a:solidFill>
+                  <a:srgbClr val="65758B"/>
+                </a:solidFill>
+                <a:latin typeface="Aptos"/>
+                <a:ea typeface="Aptos"/>
+                <a:cs typeface="Aptos"/>
+              </a:rPr>
+              <a:t>Ocurrencias científicas</a:t>
+            </a:r>
+          </a:p>
+          <a:p xmlns:a="http://schemas.openxmlformats.org/drawingml/2006/main">
+            <a:pPr algn="ctr">
+              <a:defRPr sz="1125" b="0">
+                <a:solidFill>
+                  <a:srgbClr val="65758B"/>
+                </a:solidFill>
+                <a:latin typeface="Aptos"/>
+                <a:ea typeface="Aptos"/>
+                <a:cs typeface="Aptos"/>
+              </a:defRPr>
+            </a:pPr>
+            <a:r>
+              <a:rPr sz="1125" b="0">
+                <a:solidFill>
+                  <a:srgbClr val="65758B"/>
+                </a:solidFill>
+                <a:latin typeface="Aptos"/>
+                <a:ea typeface="Aptos"/>
+                <a:cs typeface="Aptos"/>
+              </a:rPr>
+              <a:t>confirmadas / esperadas</a:t>
+            </a:r>
+          </a:p>
+        </p:txBody>
+      </p:sp>
+      <p:sp>
+        <p:nvSpPr>
+          <p:cNvPr id="54" name="">
+            <a:extLst xmlns:a="http://schemas.openxmlformats.org/drawingml/2006/main">
+              <a:ext uri="{FF2B5EF4-FFF2-40B4-BE49-F238E27FC236}">
+                <a16:creationId xmlns:a16="http://schemas.microsoft.com/office/drawing/2014/main" id="{64760FD1-9FBE-4808-B799-15D7F8FCEAAD}"/>
+              </a:ext>
+            </a:extLst>
+          </p:cNvPr>
+          <p:cNvSpPr>
+            <a:spLocks xmlns:a="http://schemas.openxmlformats.org/drawingml/2006/main" noGrp="1"/>
+          </p:cNvSpPr>
+          <p:nvPr/>
+        </p:nvSpPr>
+        <p:spPr>
+          <a:xfrm xmlns:a="http://schemas.openxmlformats.org/drawingml/2006/main">
+            <a:off x="3905250" y="4610100"/>
+            <a:ext cx="1571625" cy="400050"/>
+          </a:xfrm>
+          <a:prstGeom xmlns:a="http://schemas.openxmlformats.org/drawingml/2006/main" prst="rect">
+            <a:avLst/>
+          </a:prstGeom>
+          <a:noFill xmlns:a="http://schemas.openxmlformats.org/drawingml/2006/main"/>
+          <a:ln xmlns:a="http://schemas.openxmlformats.org/drawingml/2006/main" w="0">
+            <a:noFill/>
+            <a:prstDash val="solid"/>
+          </a:ln>
+        </p:spPr>
+        <p:txBody>
+          <a:bodyPr xmlns:a="http://schemas.openxmlformats.org/drawingml/2006/main" wrap="square" lIns="0" tIns="0" rIns="0" bIns="0" anchor="ctr">
+            <a:normAutofit fontScale="100000"/>
+          </a:bodyPr>
+          <a:lstStyle xmlns:a="http://schemas.openxmlformats.org/drawingml/2006/main"/>
+          <a:p xmlns:a="http://schemas.openxmlformats.org/drawingml/2006/main">
+            <a:pPr algn="ctr">
+              <a:defRPr sz="1125" b="1">
+                <a:solidFill>
+                  <a:srgbClr val="0F766E"/>
+                </a:solidFill>
+                <a:latin typeface="Aptos"/>
+                <a:ea typeface="Aptos"/>
+                <a:cs typeface="Aptos"/>
+              </a:defRPr>
+            </a:pPr>
+            <a:r>
+              <a:rPr sz="1125" b="1">
+                <a:solidFill>
+                  <a:srgbClr val="0F766E"/>
+                </a:solidFill>
+                <a:latin typeface="Aptos"/>
+                <a:ea typeface="Aptos"/>
+                <a:cs typeface="Aptos"/>
+              </a:rPr>
+              <a:t>Coverage = 1</a:t>
+            </a:r>
+          </a:p>
+          <a:p xmlns:a="http://schemas.openxmlformats.org/drawingml/2006/main">
+            <a:pPr algn="ctr">
+              <a:defRPr sz="1125" b="1">
+                <a:solidFill>
+                  <a:srgbClr val="0F766E"/>
+                </a:solidFill>
+                <a:latin typeface="Aptos"/>
+                <a:ea typeface="Aptos"/>
+                <a:cs typeface="Aptos"/>
+              </a:defRPr>
+            </a:pPr>
+            <a:r>
+              <a:rPr sz="1125" b="1">
+                <a:solidFill>
+                  <a:srgbClr val="0F766E"/>
+                </a:solidFill>
+                <a:latin typeface="Aptos"/>
+                <a:ea typeface="Aptos"/>
+                <a:cs typeface="Aptos"/>
+              </a:rPr>
+              <a:t>requerido</a:t>
+            </a:r>
+          </a:p>
+        </p:txBody>
+      </p:sp>
+      <p:sp>
+        <p:nvSpPr>
+          <p:cNvPr id="55" name="">
+            <a:extLst xmlns:a="http://schemas.openxmlformats.org/drawingml/2006/main">
+              <a:ext uri="{FF2B5EF4-FFF2-40B4-BE49-F238E27FC236}">
+                <a16:creationId xmlns:a16="http://schemas.microsoft.com/office/drawing/2014/main" id="{50F1E7A6-8C1C-4D4D-9DE6-82AE19DBD12E}"/>
+              </a:ext>
+            </a:extLst>
+          </p:cNvPr>
+          <p:cNvSpPr>
+            <a:spLocks xmlns:a="http://schemas.openxmlformats.org/drawingml/2006/main" noGrp="1"/>
+          </p:cNvSpPr>
+          <p:nvPr/>
+        </p:nvSpPr>
+        <p:spPr>
+          <a:xfrm xmlns:a="http://schemas.openxmlformats.org/drawingml/2006/main">
+            <a:off x="5953125" y="4610100"/>
+            <a:ext cx="2381250" cy="400050"/>
+          </a:xfrm>
+          <a:prstGeom xmlns:a="http://schemas.openxmlformats.org/drawingml/2006/main" prst="rect">
+            <a:avLst/>
+          </a:prstGeom>
+          <a:noFill xmlns:a="http://schemas.openxmlformats.org/drawingml/2006/main"/>
+          <a:ln xmlns:a="http://schemas.openxmlformats.org/drawingml/2006/main" w="0">
+            <a:noFill/>
+            <a:prstDash val="solid"/>
+          </a:ln>
+        </p:spPr>
+        <p:txBody>
+          <a:bodyPr xmlns:a="http://schemas.openxmlformats.org/drawingml/2006/main" wrap="square" lIns="0" tIns="0" rIns="0" bIns="0" anchor="ctr">
+            <a:normAutofit fontScale="100000"/>
+          </a:bodyPr>
+          <a:lstStyle xmlns:a="http://schemas.openxmlformats.org/drawingml/2006/main"/>
+          <a:p xmlns:a="http://schemas.openxmlformats.org/drawingml/2006/main">
+            <a:pPr algn="ctr">
+              <a:defRPr sz="1125" b="0">
+                <a:solidFill>
+                  <a:srgbClr val="15803D"/>
+                </a:solidFill>
+                <a:latin typeface="Aptos"/>
+                <a:ea typeface="Aptos"/>
+                <a:cs typeface="Aptos"/>
+              </a:defRPr>
+            </a:pPr>
+            <a:r>
+              <a:rPr sz="1125" b="0">
+                <a:solidFill>
+                  <a:srgbClr val="15803D"/>
+                </a:solidFill>
+                <a:latin typeface="Aptos"/>
+                <a:ea typeface="Aptos"/>
+                <a:cs typeface="Aptos"/>
+              </a:rPr>
+              <a:t>Bytes científicos</a:t>
+            </a:r>
+          </a:p>
+          <a:p xmlns:a="http://schemas.openxmlformats.org/drawingml/2006/main">
+            <a:pPr algn="ctr">
+              <a:defRPr sz="1125" b="0">
+                <a:solidFill>
+                  <a:srgbClr val="15803D"/>
+                </a:solidFill>
+                <a:latin typeface="Aptos"/>
+                <a:ea typeface="Aptos"/>
+                <a:cs typeface="Aptos"/>
+              </a:defRPr>
+            </a:pPr>
+            <a:r>
+              <a:rPr sz="1125" b="0">
+                <a:solidFill>
+                  <a:srgbClr val="15803D"/>
+                </a:solidFill>
+                <a:latin typeface="Aptos"/>
+                <a:ea typeface="Aptos"/>
+                <a:cs typeface="Aptos"/>
+              </a:rPr>
+              <a:t>confirmados</a:t>
+            </a:r>
+          </a:p>
+        </p:txBody>
+      </p:sp>
+      <p:sp>
+        <p:nvSpPr>
+          <p:cNvPr id="56" name="">
+            <a:extLst xmlns:a="http://schemas.openxmlformats.org/drawingml/2006/main">
+              <a:ext uri="{FF2B5EF4-FFF2-40B4-BE49-F238E27FC236}">
+                <a16:creationId xmlns:a16="http://schemas.microsoft.com/office/drawing/2014/main" id="{850D37E4-F071-4E0E-B1A6-E27FB967B266}"/>
+              </a:ext>
+            </a:extLst>
+          </p:cNvPr>
+          <p:cNvSpPr>
+            <a:spLocks xmlns:a="http://schemas.openxmlformats.org/drawingml/2006/main" noGrp="1"/>
+          </p:cNvSpPr>
+          <p:nvPr/>
+        </p:nvSpPr>
+        <p:spPr>
+          <a:xfrm xmlns:a="http://schemas.openxmlformats.org/drawingml/2006/main">
+            <a:off x="8953500" y="4610100"/>
+            <a:ext cx="2095500" cy="400050"/>
+          </a:xfrm>
+          <a:prstGeom xmlns:a="http://schemas.openxmlformats.org/drawingml/2006/main" prst="rect">
+            <a:avLst/>
+          </a:prstGeom>
+          <a:noFill xmlns:a="http://schemas.openxmlformats.org/drawingml/2006/main"/>
+          <a:ln xmlns:a="http://schemas.openxmlformats.org/drawingml/2006/main" w="0">
+            <a:noFill/>
+            <a:prstDash val="solid"/>
+          </a:ln>
+        </p:spPr>
+        <p:txBody>
+          <a:bodyPr xmlns:a="http://schemas.openxmlformats.org/drawingml/2006/main" wrap="square" lIns="0" tIns="0" rIns="0" bIns="0" anchor="ctr">
+            <a:normAutofit fontScale="100000"/>
+          </a:bodyPr>
+          <a:lstStyle xmlns:a="http://schemas.openxmlformats.org/drawingml/2006/main"/>
+          <a:p xmlns:a="http://schemas.openxmlformats.org/drawingml/2006/main">
+            <a:pPr algn="ctr">
+              <a:defRPr sz="1275" b="1">
+                <a:solidFill>
+                  <a:srgbClr val="142D45"/>
+                </a:solidFill>
+                <a:latin typeface="Aptos"/>
+                <a:ea typeface="Aptos"/>
+                <a:cs typeface="Aptos"/>
+              </a:defRPr>
+            </a:pPr>
+            <a:r>
+              <a:rPr sz="1275" b="1">
+                <a:solidFill>
+                  <a:srgbClr val="142D45"/>
+                </a:solidFill>
+                <a:latin typeface="Aptos"/>
+                <a:ea typeface="Aptos"/>
+                <a:cs typeface="Aptos"/>
+              </a:rPr>
+              <a:t>M₍req₎ / M₍obs₎</a:t>
+            </a:r>
+          </a:p>
+        </p:txBody>
+      </p:sp>
+      <p:sp>
+        <p:nvSpPr>
+          <p:cNvPr id="57" name="">
+            <a:extLst xmlns:a="http://schemas.openxmlformats.org/drawingml/2006/main">
+              <a:ext uri="{FF2B5EF4-FFF2-40B4-BE49-F238E27FC236}">
+                <a16:creationId xmlns:a16="http://schemas.microsoft.com/office/drawing/2014/main" id="{88BBC840-EF4F-4C8B-ABAD-CE6B1927E833}"/>
+              </a:ext>
+            </a:extLst>
+          </p:cNvPr>
+          <p:cNvSpPr>
+            <a:spLocks xmlns:a="http://schemas.openxmlformats.org/drawingml/2006/main" noGrp="1"/>
+          </p:cNvSpPr>
+          <p:nvPr/>
+        </p:nvSpPr>
+        <p:spPr>
+          <a:xfrm xmlns:a="http://schemas.openxmlformats.org/drawingml/2006/main">
+            <a:off x="962025" y="5391150"/>
+            <a:ext cx="10267950" cy="419100"/>
+          </a:xfrm>
+          <a:prstGeom xmlns:a="http://schemas.openxmlformats.org/drawingml/2006/main" prst="rect">
+            <a:avLst/>
+          </a:prstGeom>
+          <a:noFill xmlns:a="http://schemas.openxmlformats.org/drawingml/2006/main"/>
+          <a:ln xmlns:a="http://schemas.openxmlformats.org/drawingml/2006/main" w="0">
+            <a:noFill/>
+            <a:prstDash val="solid"/>
+          </a:ln>
+        </p:spPr>
+        <p:txBody>
+          <a:bodyPr xmlns:a="http://schemas.openxmlformats.org/drawingml/2006/main" wrap="square" lIns="76200" tIns="28575" rIns="76200" bIns="28575" anchor="ctr">
+            <a:normAutofit fontScale="100000"/>
+          </a:bodyPr>
+          <a:lstStyle xmlns:a="http://schemas.openxmlformats.org/drawingml/2006/main"/>
+          <a:p xmlns:a="http://schemas.openxmlformats.org/drawingml/2006/main">
+            <a:pPr algn="ctr">
+              <a:defRPr sz="1275" b="0">
+                <a:solidFill>
+                  <a:srgbClr val="34485D"/>
+                </a:solidFill>
+                <a:latin typeface="Aptos"/>
+                <a:ea typeface="Aptos"/>
+                <a:cs typeface="Aptos"/>
+              </a:defRPr>
+            </a:pPr>
+            <a:r>
+              <a:rPr sz="1275" b="0">
+                <a:solidFill>
+                  <a:srgbClr val="34485D"/>
+                </a:solidFill>
+                <a:latin typeface="Aptos"/>
+                <a:ea typeface="Aptos"/>
+                <a:cs typeface="Aptos"/>
+              </a:rPr>
+              <a:t>Si Coverage &lt; 1, M₍obs₎ y DME quedan indeterminadas. El manifest expresa el contrato de transferencia; no sustituye evidencia de ejecución.</a:t>
+            </a:r>
           </a:p>
         </p:txBody>
       </p:sp>
@@ -11568,7 +11942,7 @@
                 <a:ea typeface="Aptos"/>
                 <a:cs typeface="Aptos"/>
               </a:rPr>
-              <a:t>ALCANCE</a:t>
+              <a:t>REFERENCIA CONCEPTUAL</a:t>
             </a:r>
             <a:endParaRPr sz="850"/>
           </a:p>
@@ -11600,7 +11974,7 @@
         </p:spPr>
         <p:txBody>
           <a:bodyPr xmlns:a="http://schemas.openxmlformats.org/drawingml/2006/main" wrap="square" lIns="254" tIns="254" rIns="254" bIns="254" anchor="ctr">
-            <a:normAutofit/>
+            <a:normAutofit fontScale="100000"/>
           </a:bodyPr>
           <a:lstStyle xmlns:a="http://schemas.openxmlformats.org/drawingml/2006/main"/>
           <a:p xmlns:a="http://schemas.openxmlformats.org/drawingml/2006/main">
@@ -11616,323 +11990,9 @@
                 <a:ea typeface="Aptos Display"/>
                 <a:cs typeface="Aptos Display"/>
               </a:rPr>
-              <a:t>16. Limitaciones y riesgos metodológicos</a:t>
+              <a:t>16. Lower bound lógico y ruta condorio</a:t>
             </a:r>
             <a:endParaRPr sz="2500"/>
-          </a:p>
-        </p:txBody>
-      </p:sp>
-      <p:sp>
-        <p:nvSpPr>
-          <p:cNvPr id="5" name="Text 3">
-            <a:extLst xmlns:a="http://schemas.openxmlformats.org/drawingml/2006/main">
-              <a:ext uri="{FF2B5EF4-FFF2-40B4-BE49-F238E27FC236}">
-                <a16:creationId xmlns:a16="http://schemas.microsoft.com/office/drawing/2014/main" id="{450DE6B1-4541-4758-9F84-6CFDC364B25B}"/>
-              </a:ext>
-            </a:extLst>
-          </p:cNvPr>
-          <p:cNvSpPr>
-            <a:spLocks xmlns:a="http://schemas.openxmlformats.org/drawingml/2006/main" noGrp="1"/>
-          </p:cNvSpPr>
-          <p:nvPr/>
-        </p:nvSpPr>
-        <p:spPr>
-          <a:xfrm xmlns:a="http://schemas.openxmlformats.org/drawingml/2006/main">
-            <a:off x="868680" y="1417320"/>
-            <a:ext cx="5303520" cy="3474720"/>
-          </a:xfrm>
-          <a:prstGeom xmlns:a="http://schemas.openxmlformats.org/drawingml/2006/main" prst="rect">
-            <a:avLst/>
-          </a:prstGeom>
-          <a:noFill xmlns:a="http://schemas.openxmlformats.org/drawingml/2006/main"/>
-        </p:spPr>
-        <p:txBody>
-          <a:bodyPr xmlns:a="http://schemas.openxmlformats.org/drawingml/2006/main" wrap="square" lIns="381" tIns="381" rIns="381" bIns="381" anchor="ctr">
-            <a:normAutofit/>
-          </a:bodyPr>
-          <a:lstStyle xmlns:a="http://schemas.openxmlformats.org/drawingml/2006/main"/>
-          <a:p xmlns:a="http://schemas.openxmlformats.org/drawingml/2006/main">
-            <a:pPr marL="203200" indent="-203200">
-              <a:buSzPct val="100000"/>
-              <a:buChar char="•"/>
-            </a:pPr>
-            <a:r>
-              <a:rPr sz="1300">
-                <a:solidFill>
-                  <a:srgbClr val="334155"/>
-                </a:solidFill>
-                <a:latin typeface="Aptos"/>
-                <a:ea typeface="Aptos"/>
-                <a:cs typeface="Aptos"/>
-              </a:rPr>
-              <a:t>Execution model v1 limitado a Pegasus 5.x + condorio + HTCondor vanilla con file transfer administrado por HTCondor.</a:t>
-            </a:r>
-            <a:endParaRPr sz="1300"/>
-          </a:p>
-          <a:p xmlns:a="http://schemas.openxmlformats.org/drawingml/2006/main">
-            <a:pPr marL="203200" indent="-203200">
-              <a:buSzPct val="100000"/>
-              <a:buChar char="•"/>
-            </a:pPr>
-            <a:r>
-              <a:rPr sz="1300">
-                <a:solidFill>
-                  <a:srgbClr val="334155"/>
-                </a:solidFill>
-                <a:latin typeface="Aptos"/>
-                <a:ea typeface="Aptos"/>
-                <a:cs typeface="Aptos"/>
-              </a:rPr>
-              <a:t>La métrica no estima tiempo, latencia, ancho de banda ni costo económico.</a:t>
-            </a:r>
-            <a:endParaRPr sz="1300"/>
-          </a:p>
-          <a:p xmlns:a="http://schemas.openxmlformats.org/drawingml/2006/main">
-            <a:pPr marL="203200" indent="-203200">
-              <a:buSzPct val="100000"/>
-              <a:buChar char="•"/>
-            </a:pPr>
-            <a:r>
-              <a:rPr sz="1300">
-                <a:solidFill>
-                  <a:srgbClr val="334155"/>
-                </a:solidFill>
-                <a:latin typeface="Aptos"/>
-                <a:ea typeface="Aptos"/>
-                <a:cs typeface="Aptos"/>
-              </a:rPr>
-              <a:t>El exceso ObservedMovement − RequiredMovement no implica bytes ahorrables sin demostrar un execution model alternativo.</a:t>
-            </a:r>
-            <a:endParaRPr sz="1300"/>
-          </a:p>
-          <a:p xmlns:a="http://schemas.openxmlformats.org/drawingml/2006/main">
-            <a:pPr marL="203200" indent="-203200">
-              <a:buSzPct val="100000"/>
-              <a:buChar char="•"/>
-            </a:pPr>
-            <a:r>
-              <a:rPr sz="1300">
-                <a:solidFill>
-                  <a:srgbClr val="334155"/>
-                </a:solidFill>
-                <a:latin typeface="Aptos"/>
-                <a:ea typeface="Aptos"/>
-                <a:cs typeface="Aptos"/>
-              </a:rPr>
-              <a:t>Los retries, plugins no contabilizados o trazas incompletas deben producir resultados indeterminados, no aproximaciones.</a:t>
-            </a:r>
-            <a:endParaRPr sz="1300"/>
-          </a:p>
-        </p:txBody>
-      </p:sp>
-      <p:sp>
-        <p:nvSpPr>
-          <p:cNvPr id="6" name="Shape 4">
-            <a:extLst xmlns:a="http://schemas.openxmlformats.org/drawingml/2006/main">
-              <a:ext uri="{FF2B5EF4-FFF2-40B4-BE49-F238E27FC236}">
-                <a16:creationId xmlns:a16="http://schemas.microsoft.com/office/drawing/2014/main" id="{3DA4B18F-016A-401E-969F-AEDD4E9DB85C}"/>
-              </a:ext>
-            </a:extLst>
-          </p:cNvPr>
-          <p:cNvSpPr>
-            <a:spLocks xmlns:a="http://schemas.openxmlformats.org/drawingml/2006/main" noGrp="1"/>
-          </p:cNvSpPr>
-          <p:nvPr/>
-        </p:nvSpPr>
-        <p:spPr>
-          <a:xfrm xmlns:a="http://schemas.openxmlformats.org/drawingml/2006/main">
-            <a:off x="6720840" y="1508760"/>
-            <a:ext cx="1920240" cy="457200"/>
-          </a:xfrm>
-          <a:prstGeom xmlns:a="http://schemas.openxmlformats.org/drawingml/2006/main" prst="roundRect">
-            <a:avLst>
-              <a:gd name="adj" fmla="val 16000"/>
-            </a:avLst>
-          </a:prstGeom>
-          <a:solidFill xmlns:a="http://schemas.openxmlformats.org/drawingml/2006/main">
-            <a:srgbClr val="FEE2E2"/>
-          </a:solidFill>
-          <a:ln xmlns:a="http://schemas.openxmlformats.org/drawingml/2006/main" w="10160">
-            <a:solidFill>
-              <a:srgbClr val="B91C1C"/>
-            </a:solidFill>
-            <a:prstDash val="solid"/>
-          </a:ln>
-        </p:spPr>
-      </p:sp>
-      <p:sp>
-        <p:nvSpPr>
-          <p:cNvPr id="7" name="Text 5">
-            <a:extLst xmlns:a="http://schemas.openxmlformats.org/drawingml/2006/main">
-              <a:ext uri="{FF2B5EF4-FFF2-40B4-BE49-F238E27FC236}">
-                <a16:creationId xmlns:a16="http://schemas.microsoft.com/office/drawing/2014/main" id="{630C57B6-75E7-4D16-8DF6-6BE18473A67D}"/>
-              </a:ext>
-            </a:extLst>
-          </p:cNvPr>
-          <p:cNvSpPr>
-            <a:spLocks xmlns:a="http://schemas.openxmlformats.org/drawingml/2006/main" noGrp="1"/>
-          </p:cNvSpPr>
-          <p:nvPr/>
-        </p:nvSpPr>
-        <p:spPr>
-          <a:xfrm xmlns:a="http://schemas.openxmlformats.org/drawingml/2006/main">
-            <a:off x="6830568" y="1600200"/>
-            <a:ext cx="1700784" cy="274320"/>
-          </a:xfrm>
-          <a:prstGeom xmlns:a="http://schemas.openxmlformats.org/drawingml/2006/main" prst="rect">
-            <a:avLst/>
-          </a:prstGeom>
-          <a:noFill xmlns:a="http://schemas.openxmlformats.org/drawingml/2006/main"/>
-        </p:spPr>
-        <p:txBody>
-          <a:bodyPr xmlns:a="http://schemas.openxmlformats.org/drawingml/2006/main" wrap="square" lIns="381" tIns="381" rIns="381" bIns="381" anchor="ctr">
-            <a:normAutofit/>
-          </a:bodyPr>
-          <a:lstStyle xmlns:a="http://schemas.openxmlformats.org/drawingml/2006/main"/>
-          <a:p xmlns:a="http://schemas.openxmlformats.org/drawingml/2006/main">
-            <a:pPr marL="0" indent="0" algn="ctr">
-              <a:buNone/>
-            </a:pPr>
-            <a:r>
-              <a:rPr sz="1200" b="1">
-                <a:solidFill>
-                  <a:srgbClr val="B91C1C"/>
-                </a:solidFill>
-                <a:latin typeface="Aptos"/>
-                <a:ea typeface="Aptos"/>
-                <a:cs typeface="Aptos"/>
-              </a:rPr>
-              <a:t>Riesgo principal</a:t>
-            </a:r>
-            <a:endParaRPr sz="1200"/>
-          </a:p>
-        </p:txBody>
-      </p:sp>
-      <p:sp>
-        <p:nvSpPr>
-          <p:cNvPr id="8" name="Text 6">
-            <a:extLst xmlns:a="http://schemas.openxmlformats.org/drawingml/2006/main">
-              <a:ext uri="{FF2B5EF4-FFF2-40B4-BE49-F238E27FC236}">
-                <a16:creationId xmlns:a16="http://schemas.microsoft.com/office/drawing/2014/main" id="{65702A40-EA58-4ACD-B4D9-16D0F7967E0A}"/>
-              </a:ext>
-            </a:extLst>
-          </p:cNvPr>
-          <p:cNvSpPr>
-            <a:spLocks xmlns:a="http://schemas.openxmlformats.org/drawingml/2006/main" noGrp="1"/>
-          </p:cNvSpPr>
-          <p:nvPr/>
-        </p:nvSpPr>
-        <p:spPr>
-          <a:xfrm xmlns:a="http://schemas.openxmlformats.org/drawingml/2006/main">
-            <a:off x="6858000" y="2148840"/>
-            <a:ext cx="3657600" cy="868680"/>
-          </a:xfrm>
-          <a:prstGeom xmlns:a="http://schemas.openxmlformats.org/drawingml/2006/main" prst="rect">
-            <a:avLst/>
-          </a:prstGeom>
-          <a:noFill xmlns:a="http://schemas.openxmlformats.org/drawingml/2006/main"/>
-        </p:spPr>
-        <p:txBody>
-          <a:bodyPr xmlns:a="http://schemas.openxmlformats.org/drawingml/2006/main" wrap="square" lIns="254" tIns="254" rIns="254" bIns="254" anchor="ctr">
-            <a:normAutofit/>
-          </a:bodyPr>
-          <a:lstStyle xmlns:a="http://schemas.openxmlformats.org/drawingml/2006/main"/>
-          <a:p xmlns:a="http://schemas.openxmlformats.org/drawingml/2006/main">
-            <a:pPr marL="0" indent="0">
-              <a:buNone/>
-            </a:pPr>
-            <a:r>
-              <a:rPr sz="1800" b="1">
-                <a:solidFill>
-                  <a:srgbClr val="102A43"/>
-                </a:solidFill>
-              </a:rPr>
-              <a:t>Confundir confirmación de movimiento científico con estadísticas agregadas de sandbox o tráfico total.</a:t>
-            </a:r>
-            <a:endParaRPr sz="1800"/>
-          </a:p>
-        </p:txBody>
-      </p:sp>
-      <p:sp>
-        <p:nvSpPr>
-          <p:cNvPr id="9" name="Shape 7">
-            <a:extLst xmlns:a="http://schemas.openxmlformats.org/drawingml/2006/main">
-              <a:ext uri="{FF2B5EF4-FFF2-40B4-BE49-F238E27FC236}">
-                <a16:creationId xmlns:a16="http://schemas.microsoft.com/office/drawing/2014/main" id="{2BBF9016-DFD6-4B7C-BABC-0A8CDEBF8EC5}"/>
-              </a:ext>
-            </a:extLst>
-          </p:cNvPr>
-          <p:cNvSpPr>
-            <a:spLocks xmlns:a="http://schemas.openxmlformats.org/drawingml/2006/main" noGrp="1"/>
-          </p:cNvSpPr>
-          <p:nvPr/>
-        </p:nvSpPr>
-        <p:spPr>
-          <a:xfrm xmlns:a="http://schemas.openxmlformats.org/drawingml/2006/main">
-            <a:off x="6812280" y="3794760"/>
-            <a:ext cx="3703320" cy="914400"/>
-          </a:xfrm>
-          <a:prstGeom xmlns:a="http://schemas.openxmlformats.org/drawingml/2006/main" prst="roundRect">
-            <a:avLst>
-              <a:gd name="adj" fmla="val 8000"/>
-            </a:avLst>
-          </a:prstGeom>
-          <a:solidFill xmlns:a="http://schemas.openxmlformats.org/drawingml/2006/main">
-            <a:srgbClr val="FFFFFF"/>
-          </a:solidFill>
-          <a:ln xmlns:a="http://schemas.openxmlformats.org/drawingml/2006/main" w="10160">
-            <a:solidFill>
-              <a:srgbClr val="CBD5E1"/>
-            </a:solidFill>
-            <a:prstDash val="solid"/>
-          </a:ln>
-        </p:spPr>
-      </p:sp>
-      <p:sp>
-        <p:nvSpPr>
-          <p:cNvPr id="10" name="Text 8">
-            <a:extLst xmlns:a="http://schemas.openxmlformats.org/drawingml/2006/main">
-              <a:ext uri="{FF2B5EF4-FFF2-40B4-BE49-F238E27FC236}">
-                <a16:creationId xmlns:a16="http://schemas.microsoft.com/office/drawing/2014/main" id="{8BA41E0F-9243-4D3A-9B6F-627BAE2B35D5}"/>
-              </a:ext>
-            </a:extLst>
-          </p:cNvPr>
-          <p:cNvSpPr>
-            <a:spLocks xmlns:a="http://schemas.openxmlformats.org/drawingml/2006/main" noGrp="1"/>
-          </p:cNvSpPr>
-          <p:nvPr/>
-        </p:nvSpPr>
-        <p:spPr>
-          <a:xfrm xmlns:a="http://schemas.openxmlformats.org/drawingml/2006/main">
-            <a:off x="6976872" y="3922776"/>
-            <a:ext cx="3374136" cy="658368"/>
-          </a:xfrm>
-          <a:prstGeom xmlns:a="http://schemas.openxmlformats.org/drawingml/2006/main" prst="rect">
-            <a:avLst/>
-          </a:prstGeom>
-          <a:noFill xmlns:a="http://schemas.openxmlformats.org/drawingml/2006/main"/>
-        </p:spPr>
-        <p:txBody>
-          <a:bodyPr xmlns:a="http://schemas.openxmlformats.org/drawingml/2006/main" wrap="square" lIns="381" tIns="381" rIns="381" bIns="381" anchor="ctr">
-            <a:normAutofit/>
-          </a:bodyPr>
-          <a:lstStyle xmlns:a="http://schemas.openxmlformats.org/drawingml/2006/main"/>
-          <a:p xmlns:a="http://schemas.openxmlformats.org/drawingml/2006/main">
-            <a:pPr marL="0" indent="0">
-              <a:buNone/>
-            </a:pPr>
-            <a:r>
-              <a:rPr sz="1120">
-                <a:solidFill>
-                  <a:srgbClr val="334155"/>
-                </a:solidFill>
-                <a:latin typeface="Aptos"/>
-                <a:ea typeface="Aptos"/>
-                <a:cs typeface="Aptos"/>
-              </a:rPr>
-              <a:t>Respuesta metodológica: separación semántica, evidence levels, Coverage y reportes N/A cuando las precondiciones no se cumplen.</a:t>
-            </a:r>
-            <a:endParaRPr sz="1120"/>
           </a:p>
         </p:txBody>
       </p:sp>
@@ -12007,7 +12067,7 @@
                 <a:ea typeface="Aptos"/>
                 <a:cs typeface="Aptos"/>
               </a:rPr>
-              <a:t>Limitaciones</a:t>
+              <a:t>Lower bound y condorio</a:t>
             </a:r>
             <a:endParaRPr sz="750"/>
           </a:p>
@@ -12056,6 +12116,813 @@
               <a:t>17</a:t>
             </a:r>
             <a:endParaRPr sz="800"/>
+          </a:p>
+        </p:txBody>
+      </p:sp>
+      <p:sp>
+        <p:nvSpPr>
+          <p:cNvPr id="14" name="lower-bound-heading">
+            <a:extLst xmlns:a="http://schemas.openxmlformats.org/drawingml/2006/main">
+              <a:ext uri="{FF2B5EF4-FFF2-40B4-BE49-F238E27FC236}">
+                <a16:creationId xmlns:a16="http://schemas.microsoft.com/office/drawing/2014/main" id="{453C6ABF-7993-4382-919F-C677293810AA}"/>
+              </a:ext>
+            </a:extLst>
+          </p:cNvPr>
+          <p:cNvSpPr>
+            <a:spLocks xmlns:a="http://schemas.openxmlformats.org/drawingml/2006/main" noGrp="1"/>
+          </p:cNvSpPr>
+          <p:nvPr/>
+        </p:nvSpPr>
+        <p:spPr>
+          <a:xfrm xmlns:a="http://schemas.openxmlformats.org/drawingml/2006/main">
+            <a:off x="914400" y="1438275"/>
+            <a:ext cx="10382250" cy="304800"/>
+          </a:xfrm>
+          <a:prstGeom xmlns:a="http://schemas.openxmlformats.org/drawingml/2006/main" prst="rect">
+            <a:avLst/>
+          </a:prstGeom>
+          <a:noFill xmlns:a="http://schemas.openxmlformats.org/drawingml/2006/main"/>
+          <a:ln xmlns:a="http://schemas.openxmlformats.org/drawingml/2006/main" w="0">
+            <a:noFill/>
+            <a:prstDash val="solid"/>
+          </a:ln>
+        </p:spPr>
+        <p:txBody>
+          <a:bodyPr xmlns:a="http://schemas.openxmlformats.org/drawingml/2006/main" wrap="square" lIns="0" tIns="0" rIns="0" bIns="0" anchor="ctr">
+            <a:normAutofit fontScale="100000"/>
+          </a:bodyPr>
+          <a:lstStyle xmlns:a="http://schemas.openxmlformats.org/drawingml/2006/main"/>
+          <a:p xmlns:a="http://schemas.openxmlformats.org/drawingml/2006/main">
+            <a:pPr algn="l">
+              <a:defRPr sz="1425" b="1">
+                <a:solidFill>
+                  <a:srgbClr val="2563EB"/>
+                </a:solidFill>
+                <a:latin typeface="Aptos"/>
+                <a:ea typeface="Aptos"/>
+                <a:cs typeface="Aptos"/>
+              </a:defRPr>
+            </a:pPr>
+            <a:r>
+              <a:rPr sz="1425" b="1">
+                <a:solidFill>
+                  <a:srgbClr val="2563EB"/>
+                </a:solidFill>
+                <a:latin typeface="Aptos"/>
+                <a:ea typeface="Aptos"/>
+                <a:cs typeface="Aptos"/>
+              </a:rPr>
+              <a:t>LOWER BOUND LÓGICO · REFERENCIA</a:t>
+            </a:r>
+          </a:p>
+        </p:txBody>
+      </p:sp>
+      <p:sp>
+        <p:nvSpPr>
+          <p:cNvPr id="15" name="lower-bound-worker1">
+            <a:extLst xmlns:a="http://schemas.openxmlformats.org/drawingml/2006/main">
+              <a:ext uri="{FF2B5EF4-FFF2-40B4-BE49-F238E27FC236}">
+                <a16:creationId xmlns:a16="http://schemas.microsoft.com/office/drawing/2014/main" id="{99912206-6A9E-4255-BE8B-B4A8088B9510}"/>
+              </a:ext>
+            </a:extLst>
+          </p:cNvPr>
+          <p:cNvSpPr>
+            <a:spLocks xmlns:a="http://schemas.openxmlformats.org/drawingml/2006/main" noGrp="1"/>
+          </p:cNvSpPr>
+          <p:nvPr/>
+        </p:nvSpPr>
+        <p:spPr>
+          <a:xfrm xmlns:a="http://schemas.openxmlformats.org/drawingml/2006/main">
+            <a:off x="1428750" y="1809750"/>
+            <a:ext cx="1952625" cy="590550"/>
+          </a:xfrm>
+          <a:prstGeom xmlns:a="http://schemas.openxmlformats.org/drawingml/2006/main" prst="roundRect">
+            <a:avLst>
+              <a:gd name="adj" fmla="val 16129"/>
+            </a:avLst>
+          </a:prstGeom>
+          <a:solidFill xmlns:a="http://schemas.openxmlformats.org/drawingml/2006/main">
+            <a:srgbClr val="EAF2FF"/>
+          </a:solidFill>
+          <a:ln xmlns:a="http://schemas.openxmlformats.org/drawingml/2006/main" w="14288">
+            <a:solidFill>
+              <a:srgbClr val="2563EB"/>
+            </a:solidFill>
+            <a:prstDash val="solid"/>
+          </a:ln>
+        </p:spPr>
+        <p:txBody>
+          <a:bodyPr xmlns:a="http://schemas.openxmlformats.org/drawingml/2006/main" wrap="square" lIns="85725" tIns="47625" rIns="85725" bIns="47625" anchor="ctr">
+            <a:normAutofit fontScale="100000"/>
+          </a:bodyPr>
+          <a:lstStyle xmlns:a="http://schemas.openxmlformats.org/drawingml/2006/main"/>
+          <a:p xmlns:a="http://schemas.openxmlformats.org/drawingml/2006/main">
+            <a:pPr algn="ctr">
+              <a:defRPr sz="1575" b="1">
+                <a:solidFill>
+                  <a:srgbClr val="142D45"/>
+                </a:solidFill>
+                <a:latin typeface="Aptos"/>
+                <a:ea typeface="Aptos"/>
+                <a:cs typeface="Aptos"/>
+              </a:defRPr>
+            </a:pPr>
+            <a:r>
+              <a:rPr sz="1575" b="1">
+                <a:solidFill>
+                  <a:srgbClr val="142D45"/>
+                </a:solidFill>
+                <a:latin typeface="Aptos"/>
+                <a:ea typeface="Aptos"/>
+                <a:cs typeface="Aptos"/>
+              </a:rPr>
+              <a:t>worker1</a:t>
+            </a:r>
+          </a:p>
+        </p:txBody>
+      </p:sp>
+      <p:sp>
+        <p:nvSpPr>
+          <p:cNvPr id="16" name="lower-bound-file">
+            <a:extLst xmlns:a="http://schemas.openxmlformats.org/drawingml/2006/main">
+              <a:ext uri="{FF2B5EF4-FFF2-40B4-BE49-F238E27FC236}">
+                <a16:creationId xmlns:a16="http://schemas.microsoft.com/office/drawing/2014/main" id="{AA918C7C-F78C-4ADD-A3ED-56F5F803726C}"/>
+              </a:ext>
+            </a:extLst>
+          </p:cNvPr>
+          <p:cNvSpPr>
+            <a:spLocks xmlns:a="http://schemas.openxmlformats.org/drawingml/2006/main" noGrp="1"/>
+          </p:cNvSpPr>
+          <p:nvPr/>
+        </p:nvSpPr>
+        <p:spPr>
+          <a:xfrm xmlns:a="http://schemas.openxmlformats.org/drawingml/2006/main">
+            <a:off x="5105400" y="1809750"/>
+            <a:ext cx="2095500" cy="590550"/>
+          </a:xfrm>
+          <a:prstGeom xmlns:a="http://schemas.openxmlformats.org/drawingml/2006/main" prst="roundRect">
+            <a:avLst>
+              <a:gd name="adj" fmla="val 16129"/>
+            </a:avLst>
+          </a:prstGeom>
+          <a:solidFill xmlns:a="http://schemas.openxmlformats.org/drawingml/2006/main">
+            <a:srgbClr val="FFFFFF"/>
+          </a:solidFill>
+          <a:ln xmlns:a="http://schemas.openxmlformats.org/drawingml/2006/main" w="14288">
+            <a:solidFill>
+              <a:srgbClr val="2563EB"/>
+            </a:solidFill>
+            <a:prstDash val="solid"/>
+          </a:ln>
+        </p:spPr>
+        <p:txBody>
+          <a:bodyPr xmlns:a="http://schemas.openxmlformats.org/drawingml/2006/main" wrap="square" lIns="85725" tIns="47625" rIns="85725" bIns="47625" anchor="ctr">
+            <a:normAutofit fontScale="100000"/>
+          </a:bodyPr>
+          <a:lstStyle xmlns:a="http://schemas.openxmlformats.org/drawingml/2006/main"/>
+          <a:p xmlns:a="http://schemas.openxmlformats.org/drawingml/2006/main">
+            <a:pPr algn="ctr">
+              <a:defRPr sz="1500" b="1">
+                <a:solidFill>
+                  <a:srgbClr val="142D45"/>
+                </a:solidFill>
+                <a:latin typeface="Aptos"/>
+                <a:ea typeface="Aptos"/>
+                <a:cs typeface="Aptos"/>
+              </a:defRPr>
+            </a:pPr>
+            <a:r>
+              <a:rPr sz="1500" b="1">
+                <a:solidFill>
+                  <a:srgbClr val="142D45"/>
+                </a:solidFill>
+                <a:latin typeface="Aptos"/>
+                <a:ea typeface="Aptos"/>
+                <a:cs typeface="Aptos"/>
+              </a:rPr>
+              <a:t>archivo científico</a:t>
+            </a:r>
+          </a:p>
+        </p:txBody>
+      </p:sp>
+      <p:sp>
+        <p:nvSpPr>
+          <p:cNvPr id="17" name="lower-bound-worker2">
+            <a:extLst xmlns:a="http://schemas.openxmlformats.org/drawingml/2006/main">
+              <a:ext uri="{FF2B5EF4-FFF2-40B4-BE49-F238E27FC236}">
+                <a16:creationId xmlns:a16="http://schemas.microsoft.com/office/drawing/2014/main" id="{78054010-252A-475D-A979-82EAEE10354C}"/>
+              </a:ext>
+            </a:extLst>
+          </p:cNvPr>
+          <p:cNvSpPr>
+            <a:spLocks xmlns:a="http://schemas.openxmlformats.org/drawingml/2006/main" noGrp="1"/>
+          </p:cNvSpPr>
+          <p:nvPr/>
+        </p:nvSpPr>
+        <p:spPr>
+          <a:xfrm xmlns:a="http://schemas.openxmlformats.org/drawingml/2006/main">
+            <a:off x="8858250" y="1809750"/>
+            <a:ext cx="1952625" cy="590550"/>
+          </a:xfrm>
+          <a:prstGeom xmlns:a="http://schemas.openxmlformats.org/drawingml/2006/main" prst="roundRect">
+            <a:avLst>
+              <a:gd name="adj" fmla="val 16129"/>
+            </a:avLst>
+          </a:prstGeom>
+          <a:solidFill xmlns:a="http://schemas.openxmlformats.org/drawingml/2006/main">
+            <a:srgbClr val="EAF2FF"/>
+          </a:solidFill>
+          <a:ln xmlns:a="http://schemas.openxmlformats.org/drawingml/2006/main" w="14288">
+            <a:solidFill>
+              <a:srgbClr val="2563EB"/>
+            </a:solidFill>
+            <a:prstDash val="solid"/>
+          </a:ln>
+        </p:spPr>
+        <p:txBody>
+          <a:bodyPr xmlns:a="http://schemas.openxmlformats.org/drawingml/2006/main" wrap="square" lIns="85725" tIns="47625" rIns="85725" bIns="47625" anchor="ctr">
+            <a:normAutofit fontScale="100000"/>
+          </a:bodyPr>
+          <a:lstStyle xmlns:a="http://schemas.openxmlformats.org/drawingml/2006/main"/>
+          <a:p xmlns:a="http://schemas.openxmlformats.org/drawingml/2006/main">
+            <a:pPr algn="ctr">
+              <a:defRPr sz="1575" b="1">
+                <a:solidFill>
+                  <a:srgbClr val="142D45"/>
+                </a:solidFill>
+                <a:latin typeface="Aptos"/>
+                <a:ea typeface="Aptos"/>
+                <a:cs typeface="Aptos"/>
+              </a:defRPr>
+            </a:pPr>
+            <a:r>
+              <a:rPr sz="1575" b="1">
+                <a:solidFill>
+                  <a:srgbClr val="142D45"/>
+                </a:solidFill>
+                <a:latin typeface="Aptos"/>
+                <a:ea typeface="Aptos"/>
+                <a:cs typeface="Aptos"/>
+              </a:rPr>
+              <a:t>worker2</a:t>
+            </a:r>
+          </a:p>
+        </p:txBody>
+      </p:sp>
+      <p:cxnSp>
+        <p:nvCxnSpPr>
+          <p:cNvPr id="39" name=""/>
+          <p:cNvCxnSpPr>
+            <a:stCxn xmlns:a="http://schemas.openxmlformats.org/drawingml/2006/main" id="15" idx="3"/>
+            <a:endCxn xmlns:a="http://schemas.openxmlformats.org/drawingml/2006/main" id="16" idx="1"/>
+          </p:cNvCxnSpPr>
+          <p:nvPr/>
+        </p:nvCxnSpPr>
+        <p:spPr>
+          <a:xfrm xmlns:a="http://schemas.openxmlformats.org/drawingml/2006/main">
+            <a:off x="3381375" y="2105025"/>
+            <a:ext cx="1724025" cy="0"/>
+          </a:xfrm>
+          <a:prstGeom xmlns:a="http://schemas.openxmlformats.org/drawingml/2006/main" prst="straightConnector1">
+            <a:avLst/>
+          </a:prstGeom>
+          <a:ln xmlns:a="http://schemas.openxmlformats.org/drawingml/2006/main" w="19050">
+            <a:solidFill>
+              <a:srgbClr val="2563EB"/>
+            </a:solidFill>
+            <a:prstDash val="solid"/>
+            <a:tailEnd type="triangle" w="sm" len="sm"/>
+          </a:ln>
+        </p:spPr>
+      </p:cxnSp>
+      <p:cxnSp>
+        <p:nvCxnSpPr>
+          <p:cNvPr id="40" name=""/>
+          <p:cNvCxnSpPr>
+            <a:stCxn xmlns:a="http://schemas.openxmlformats.org/drawingml/2006/main" id="16" idx="3"/>
+            <a:endCxn xmlns:a="http://schemas.openxmlformats.org/drawingml/2006/main" id="17" idx="1"/>
+          </p:cNvCxnSpPr>
+          <p:nvPr/>
+        </p:nvCxnSpPr>
+        <p:spPr>
+          <a:xfrm xmlns:a="http://schemas.openxmlformats.org/drawingml/2006/main">
+            <a:off x="7200900" y="2105025"/>
+            <a:ext cx="1657350" cy="0"/>
+          </a:xfrm>
+          <a:prstGeom xmlns:a="http://schemas.openxmlformats.org/drawingml/2006/main" prst="straightConnector1">
+            <a:avLst/>
+          </a:prstGeom>
+          <a:ln xmlns:a="http://schemas.openxmlformats.org/drawingml/2006/main" w="19050">
+            <a:solidFill>
+              <a:srgbClr val="2563EB"/>
+            </a:solidFill>
+            <a:prstDash val="solid"/>
+            <a:tailEnd type="triangle" w="sm" len="sm"/>
+          </a:ln>
+        </p:spPr>
+      </p:cxnSp>
+      <p:sp>
+        <p:nvSpPr>
+          <p:cNvPr id="20" name="">
+            <a:extLst xmlns:a="http://schemas.openxmlformats.org/drawingml/2006/main">
+              <a:ext uri="{FF2B5EF4-FFF2-40B4-BE49-F238E27FC236}">
+                <a16:creationId xmlns:a16="http://schemas.microsoft.com/office/drawing/2014/main" id="{D8EE64D0-1F84-46EB-B075-22EDFC41F9B5}"/>
+              </a:ext>
+            </a:extLst>
+          </p:cNvPr>
+          <p:cNvSpPr>
+            <a:spLocks xmlns:a="http://schemas.openxmlformats.org/drawingml/2006/main" noGrp="1"/>
+          </p:cNvSpPr>
+          <p:nvPr/>
+        </p:nvSpPr>
+        <p:spPr>
+          <a:xfrm xmlns:a="http://schemas.openxmlformats.org/drawingml/2006/main">
+            <a:off x="1428750" y="2438400"/>
+            <a:ext cx="9382125" cy="314325"/>
+          </a:xfrm>
+          <a:prstGeom xmlns:a="http://schemas.openxmlformats.org/drawingml/2006/main" prst="rect">
+            <a:avLst/>
+          </a:prstGeom>
+          <a:noFill xmlns:a="http://schemas.openxmlformats.org/drawingml/2006/main"/>
+          <a:ln xmlns:a="http://schemas.openxmlformats.org/drawingml/2006/main" w="0">
+            <a:noFill/>
+            <a:prstDash val="solid"/>
+          </a:ln>
+        </p:spPr>
+        <p:txBody>
+          <a:bodyPr xmlns:a="http://schemas.openxmlformats.org/drawingml/2006/main" wrap="square" lIns="0" tIns="0" rIns="0" bIns="0" anchor="ctr">
+            <a:normAutofit fontScale="100000"/>
+          </a:bodyPr>
+          <a:lstStyle xmlns:a="http://schemas.openxmlformats.org/drawingml/2006/main"/>
+          <a:p xmlns:a="http://schemas.openxmlformats.org/drawingml/2006/main">
+            <a:pPr algn="ctr">
+              <a:defRPr sz="1200" b="0">
+                <a:solidFill>
+                  <a:srgbClr val="65758B"/>
+                </a:solidFill>
+                <a:latin typeface="Aptos"/>
+                <a:ea typeface="Aptos"/>
+                <a:cs typeface="Aptos"/>
+              </a:defRPr>
+            </a:pPr>
+            <a:r>
+              <a:rPr sz="1200" b="0">
+                <a:solidFill>
+                  <a:srgbClr val="65758B"/>
+                </a:solidFill>
+                <a:latin typeface="Aptos"/>
+                <a:ea typeface="Aptos"/>
+                <a:cs typeface="Aptos"/>
+              </a:rPr>
+              <a:t>Movimiento file-centric requerido por el placement observado</a:t>
+            </a:r>
+          </a:p>
+        </p:txBody>
+      </p:sp>
+      <p:sp>
+        <p:nvSpPr>
+          <p:cNvPr id="21" name="condorio-route-heading">
+            <a:extLst xmlns:a="http://schemas.openxmlformats.org/drawingml/2006/main">
+              <a:ext uri="{FF2B5EF4-FFF2-40B4-BE49-F238E27FC236}">
+                <a16:creationId xmlns:a16="http://schemas.microsoft.com/office/drawing/2014/main" id="{2F1003E6-1F19-49AA-AE75-362BF30294E4}"/>
+              </a:ext>
+            </a:extLst>
+          </p:cNvPr>
+          <p:cNvSpPr>
+            <a:spLocks xmlns:a="http://schemas.openxmlformats.org/drawingml/2006/main" noGrp="1"/>
+          </p:cNvSpPr>
+          <p:nvPr/>
+        </p:nvSpPr>
+        <p:spPr>
+          <a:xfrm xmlns:a="http://schemas.openxmlformats.org/drawingml/2006/main">
+            <a:off x="914400" y="3038475"/>
+            <a:ext cx="10382250" cy="304800"/>
+          </a:xfrm>
+          <a:prstGeom xmlns:a="http://schemas.openxmlformats.org/drawingml/2006/main" prst="rect">
+            <a:avLst/>
+          </a:prstGeom>
+          <a:noFill xmlns:a="http://schemas.openxmlformats.org/drawingml/2006/main"/>
+          <a:ln xmlns:a="http://schemas.openxmlformats.org/drawingml/2006/main" w="0">
+            <a:noFill/>
+            <a:prstDash val="solid"/>
+          </a:ln>
+        </p:spPr>
+        <p:txBody>
+          <a:bodyPr xmlns:a="http://schemas.openxmlformats.org/drawingml/2006/main" wrap="square" lIns="0" tIns="0" rIns="0" bIns="0" anchor="ctr">
+            <a:normAutofit fontScale="100000"/>
+          </a:bodyPr>
+          <a:lstStyle xmlns:a="http://schemas.openxmlformats.org/drawingml/2006/main"/>
+          <a:p xmlns:a="http://schemas.openxmlformats.org/drawingml/2006/main">
+            <a:pPr algn="l">
+              <a:defRPr sz="1425" b="1">
+                <a:solidFill>
+                  <a:srgbClr val="B45309"/>
+                </a:solidFill>
+                <a:latin typeface="Aptos"/>
+                <a:ea typeface="Aptos"/>
+                <a:cs typeface="Aptos"/>
+              </a:defRPr>
+            </a:pPr>
+            <a:r>
+              <a:rPr sz="1425" b="1">
+                <a:solidFill>
+                  <a:srgbClr val="B45309"/>
+                </a:solidFill>
+                <a:latin typeface="Aptos"/>
+                <a:ea typeface="Aptos"/>
+                <a:cs typeface="Aptos"/>
+              </a:rPr>
+              <a:t>CONDORIO OBSERVADO · RUTA DE STAGING</a:t>
+            </a:r>
+          </a:p>
+        </p:txBody>
+      </p:sp>
+      <p:sp>
+        <p:nvSpPr>
+          <p:cNvPr id="22" name="condorio-worker1">
+            <a:extLst xmlns:a="http://schemas.openxmlformats.org/drawingml/2006/main">
+              <a:ext uri="{FF2B5EF4-FFF2-40B4-BE49-F238E27FC236}">
+                <a16:creationId xmlns:a16="http://schemas.microsoft.com/office/drawing/2014/main" id="{E9D8EB27-47BC-4086-88AB-1F9E95DE80C0}"/>
+              </a:ext>
+            </a:extLst>
+          </p:cNvPr>
+          <p:cNvSpPr>
+            <a:spLocks xmlns:a="http://schemas.openxmlformats.org/drawingml/2006/main" noGrp="1"/>
+          </p:cNvSpPr>
+          <p:nvPr/>
+        </p:nvSpPr>
+        <p:spPr>
+          <a:xfrm xmlns:a="http://schemas.openxmlformats.org/drawingml/2006/main">
+            <a:off x="1428750" y="3409950"/>
+            <a:ext cx="1952625" cy="590550"/>
+          </a:xfrm>
+          <a:prstGeom xmlns:a="http://schemas.openxmlformats.org/drawingml/2006/main" prst="roundRect">
+            <a:avLst>
+              <a:gd name="adj" fmla="val 16129"/>
+            </a:avLst>
+          </a:prstGeom>
+          <a:solidFill xmlns:a="http://schemas.openxmlformats.org/drawingml/2006/main">
+            <a:srgbClr val="EAF2FF"/>
+          </a:solidFill>
+          <a:ln xmlns:a="http://schemas.openxmlformats.org/drawingml/2006/main" w="14288">
+            <a:solidFill>
+              <a:srgbClr val="2563EB"/>
+            </a:solidFill>
+            <a:prstDash val="solid"/>
+          </a:ln>
+        </p:spPr>
+        <p:txBody>
+          <a:bodyPr xmlns:a="http://schemas.openxmlformats.org/drawingml/2006/main" wrap="square" lIns="85725" tIns="47625" rIns="85725" bIns="47625" anchor="ctr">
+            <a:normAutofit fontScale="100000"/>
+          </a:bodyPr>
+          <a:lstStyle xmlns:a="http://schemas.openxmlformats.org/drawingml/2006/main"/>
+          <a:p xmlns:a="http://schemas.openxmlformats.org/drawingml/2006/main">
+            <a:pPr algn="ctr">
+              <a:defRPr sz="1575" b="1">
+                <a:solidFill>
+                  <a:srgbClr val="142D45"/>
+                </a:solidFill>
+                <a:latin typeface="Aptos"/>
+                <a:ea typeface="Aptos"/>
+                <a:cs typeface="Aptos"/>
+              </a:defRPr>
+            </a:pPr>
+            <a:r>
+              <a:rPr sz="1575" b="1">
+                <a:solidFill>
+                  <a:srgbClr val="142D45"/>
+                </a:solidFill>
+                <a:latin typeface="Aptos"/>
+                <a:ea typeface="Aptos"/>
+                <a:cs typeface="Aptos"/>
+              </a:rPr>
+              <a:t>worker1</a:t>
+            </a:r>
+          </a:p>
+        </p:txBody>
+      </p:sp>
+      <p:sp>
+        <p:nvSpPr>
+          <p:cNvPr id="23" name="condorio-master">
+            <a:extLst xmlns:a="http://schemas.openxmlformats.org/drawingml/2006/main">
+              <a:ext uri="{FF2B5EF4-FFF2-40B4-BE49-F238E27FC236}">
+                <a16:creationId xmlns:a16="http://schemas.microsoft.com/office/drawing/2014/main" id="{82B7AE11-30FF-40AE-85F5-673A807B2AA8}"/>
+              </a:ext>
+            </a:extLst>
+          </p:cNvPr>
+          <p:cNvSpPr>
+            <a:spLocks xmlns:a="http://schemas.openxmlformats.org/drawingml/2006/main" noGrp="1"/>
+          </p:cNvSpPr>
+          <p:nvPr/>
+        </p:nvSpPr>
+        <p:spPr>
+          <a:xfrm xmlns:a="http://schemas.openxmlformats.org/drawingml/2006/main">
+            <a:off x="5105400" y="3409950"/>
+            <a:ext cx="2095500" cy="590550"/>
+          </a:xfrm>
+          <a:prstGeom xmlns:a="http://schemas.openxmlformats.org/drawingml/2006/main" prst="roundRect">
+            <a:avLst>
+              <a:gd name="adj" fmla="val 16129"/>
+            </a:avLst>
+          </a:prstGeom>
+          <a:solidFill xmlns:a="http://schemas.openxmlformats.org/drawingml/2006/main">
+            <a:srgbClr val="FFF4D6"/>
+          </a:solidFill>
+          <a:ln xmlns:a="http://schemas.openxmlformats.org/drawingml/2006/main" w="14288">
+            <a:solidFill>
+              <a:srgbClr val="B45309"/>
+            </a:solidFill>
+            <a:prstDash val="solid"/>
+          </a:ln>
+        </p:spPr>
+        <p:txBody>
+          <a:bodyPr xmlns:a="http://schemas.openxmlformats.org/drawingml/2006/main" wrap="square" lIns="85725" tIns="47625" rIns="85725" bIns="47625" anchor="ctr">
+            <a:normAutofit fontScale="100000"/>
+          </a:bodyPr>
+          <a:lstStyle xmlns:a="http://schemas.openxmlformats.org/drawingml/2006/main"/>
+          <a:p xmlns:a="http://schemas.openxmlformats.org/drawingml/2006/main">
+            <a:pPr algn="ctr">
+              <a:defRPr sz="1575" b="1">
+                <a:solidFill>
+                  <a:srgbClr val="142D45"/>
+                </a:solidFill>
+                <a:latin typeface="Aptos"/>
+                <a:ea typeface="Aptos"/>
+                <a:cs typeface="Aptos"/>
+              </a:defRPr>
+            </a:pPr>
+            <a:r>
+              <a:rPr sz="1575" b="1">
+                <a:solidFill>
+                  <a:srgbClr val="142D45"/>
+                </a:solidFill>
+                <a:latin typeface="Aptos"/>
+                <a:ea typeface="Aptos"/>
+                <a:cs typeface="Aptos"/>
+              </a:rPr>
+              <a:t>master</a:t>
+            </a:r>
+          </a:p>
+        </p:txBody>
+      </p:sp>
+      <p:sp>
+        <p:nvSpPr>
+          <p:cNvPr id="24" name="condorio-worker2">
+            <a:extLst xmlns:a="http://schemas.openxmlformats.org/drawingml/2006/main">
+              <a:ext uri="{FF2B5EF4-FFF2-40B4-BE49-F238E27FC236}">
+                <a16:creationId xmlns:a16="http://schemas.microsoft.com/office/drawing/2014/main" id="{C0FBF9CB-00CE-40B1-87E7-EBC55E7598D3}"/>
+              </a:ext>
+            </a:extLst>
+          </p:cNvPr>
+          <p:cNvSpPr>
+            <a:spLocks xmlns:a="http://schemas.openxmlformats.org/drawingml/2006/main" noGrp="1"/>
+          </p:cNvSpPr>
+          <p:nvPr/>
+        </p:nvSpPr>
+        <p:spPr>
+          <a:xfrm xmlns:a="http://schemas.openxmlformats.org/drawingml/2006/main">
+            <a:off x="8858250" y="3409950"/>
+            <a:ext cx="1952625" cy="590550"/>
+          </a:xfrm>
+          <a:prstGeom xmlns:a="http://schemas.openxmlformats.org/drawingml/2006/main" prst="roundRect">
+            <a:avLst>
+              <a:gd name="adj" fmla="val 16129"/>
+            </a:avLst>
+          </a:prstGeom>
+          <a:solidFill xmlns:a="http://schemas.openxmlformats.org/drawingml/2006/main">
+            <a:srgbClr val="EAF2FF"/>
+          </a:solidFill>
+          <a:ln xmlns:a="http://schemas.openxmlformats.org/drawingml/2006/main" w="14288">
+            <a:solidFill>
+              <a:srgbClr val="2563EB"/>
+            </a:solidFill>
+            <a:prstDash val="solid"/>
+          </a:ln>
+        </p:spPr>
+        <p:txBody>
+          <a:bodyPr xmlns:a="http://schemas.openxmlformats.org/drawingml/2006/main" wrap="square" lIns="85725" tIns="47625" rIns="85725" bIns="47625" anchor="ctr">
+            <a:normAutofit fontScale="100000"/>
+          </a:bodyPr>
+          <a:lstStyle xmlns:a="http://schemas.openxmlformats.org/drawingml/2006/main"/>
+          <a:p xmlns:a="http://schemas.openxmlformats.org/drawingml/2006/main">
+            <a:pPr algn="ctr">
+              <a:defRPr sz="1575" b="1">
+                <a:solidFill>
+                  <a:srgbClr val="142D45"/>
+                </a:solidFill>
+                <a:latin typeface="Aptos"/>
+                <a:ea typeface="Aptos"/>
+                <a:cs typeface="Aptos"/>
+              </a:defRPr>
+            </a:pPr>
+            <a:r>
+              <a:rPr sz="1575" b="1">
+                <a:solidFill>
+                  <a:srgbClr val="142D45"/>
+                </a:solidFill>
+                <a:latin typeface="Aptos"/>
+                <a:ea typeface="Aptos"/>
+                <a:cs typeface="Aptos"/>
+              </a:rPr>
+              <a:t>worker2</a:t>
+            </a:r>
+          </a:p>
+        </p:txBody>
+      </p:sp>
+      <p:cxnSp>
+        <p:nvCxnSpPr>
+          <p:cNvPr id="46" name=""/>
+          <p:cNvCxnSpPr>
+            <a:stCxn xmlns:a="http://schemas.openxmlformats.org/drawingml/2006/main" id="22" idx="3"/>
+            <a:endCxn xmlns:a="http://schemas.openxmlformats.org/drawingml/2006/main" id="23" idx="1"/>
+          </p:cNvCxnSpPr>
+          <p:nvPr/>
+        </p:nvCxnSpPr>
+        <p:spPr>
+          <a:xfrm xmlns:a="http://schemas.openxmlformats.org/drawingml/2006/main">
+            <a:off x="3381375" y="3705225"/>
+            <a:ext cx="1724025" cy="0"/>
+          </a:xfrm>
+          <a:prstGeom xmlns:a="http://schemas.openxmlformats.org/drawingml/2006/main" prst="straightConnector1">
+            <a:avLst/>
+          </a:prstGeom>
+          <a:ln xmlns:a="http://schemas.openxmlformats.org/drawingml/2006/main" w="19050">
+            <a:solidFill>
+              <a:srgbClr val="B45309"/>
+            </a:solidFill>
+            <a:prstDash val="solid"/>
+            <a:tailEnd type="triangle" w="sm" len="sm"/>
+          </a:ln>
+        </p:spPr>
+      </p:cxnSp>
+      <p:cxnSp>
+        <p:nvCxnSpPr>
+          <p:cNvPr id="47" name=""/>
+          <p:cNvCxnSpPr>
+            <a:stCxn xmlns:a="http://schemas.openxmlformats.org/drawingml/2006/main" id="23" idx="3"/>
+            <a:endCxn xmlns:a="http://schemas.openxmlformats.org/drawingml/2006/main" id="24" idx="1"/>
+          </p:cNvCxnSpPr>
+          <p:nvPr/>
+        </p:nvCxnSpPr>
+        <p:spPr>
+          <a:xfrm xmlns:a="http://schemas.openxmlformats.org/drawingml/2006/main">
+            <a:off x="7200900" y="3705225"/>
+            <a:ext cx="1657350" cy="0"/>
+          </a:xfrm>
+          <a:prstGeom xmlns:a="http://schemas.openxmlformats.org/drawingml/2006/main" prst="straightConnector1">
+            <a:avLst/>
+          </a:prstGeom>
+          <a:ln xmlns:a="http://schemas.openxmlformats.org/drawingml/2006/main" w="19050">
+            <a:solidFill>
+              <a:srgbClr val="B45309"/>
+            </a:solidFill>
+            <a:prstDash val="solid"/>
+            <a:tailEnd type="triangle" w="sm" len="sm"/>
+          </a:ln>
+        </p:spPr>
+      </p:cxnSp>
+      <p:sp>
+        <p:nvSpPr>
+          <p:cNvPr id="27" name="">
+            <a:extLst xmlns:a="http://schemas.openxmlformats.org/drawingml/2006/main">
+              <a:ext uri="{FF2B5EF4-FFF2-40B4-BE49-F238E27FC236}">
+                <a16:creationId xmlns:a16="http://schemas.microsoft.com/office/drawing/2014/main" id="{875AEE3B-18B5-4C75-831B-BF04315C154D}"/>
+              </a:ext>
+            </a:extLst>
+          </p:cNvPr>
+          <p:cNvSpPr>
+            <a:spLocks xmlns:a="http://schemas.openxmlformats.org/drawingml/2006/main" noGrp="1"/>
+          </p:cNvSpPr>
+          <p:nvPr/>
+        </p:nvSpPr>
+        <p:spPr>
+          <a:xfrm xmlns:a="http://schemas.openxmlformats.org/drawingml/2006/main">
+            <a:off x="1428750" y="4038600"/>
+            <a:ext cx="9382125" cy="304800"/>
+          </a:xfrm>
+          <a:prstGeom xmlns:a="http://schemas.openxmlformats.org/drawingml/2006/main" prst="rect">
+            <a:avLst/>
+          </a:prstGeom>
+          <a:noFill xmlns:a="http://schemas.openxmlformats.org/drawingml/2006/main"/>
+          <a:ln xmlns:a="http://schemas.openxmlformats.org/drawingml/2006/main" w="0">
+            <a:noFill/>
+            <a:prstDash val="solid"/>
+          </a:ln>
+        </p:spPr>
+        <p:txBody>
+          <a:bodyPr xmlns:a="http://schemas.openxmlformats.org/drawingml/2006/main" wrap="square" lIns="0" tIns="0" rIns="0" bIns="0" anchor="ctr">
+            <a:normAutofit fontScale="100000"/>
+          </a:bodyPr>
+          <a:lstStyle xmlns:a="http://schemas.openxmlformats.org/drawingml/2006/main"/>
+          <a:p xmlns:a="http://schemas.openxmlformats.org/drawingml/2006/main">
+            <a:pPr algn="ctr">
+              <a:defRPr sz="1200" b="0">
+                <a:solidFill>
+                  <a:srgbClr val="65758B"/>
+                </a:solidFill>
+                <a:latin typeface="Aptos"/>
+                <a:ea typeface="Aptos"/>
+                <a:cs typeface="Aptos"/>
+              </a:defRPr>
+            </a:pPr>
+            <a:r>
+              <a:rPr sz="1200" b="0">
+                <a:solidFill>
+                  <a:srgbClr val="65758B"/>
+                </a:solidFill>
+                <a:latin typeface="Aptos"/>
+                <a:ea typeface="Aptos"/>
+                <a:cs typeface="Aptos"/>
+              </a:rPr>
+              <a:t>El staging por el master puede añadir un salto frente al lower bound.</a:t>
+            </a:r>
+          </a:p>
+        </p:txBody>
+      </p:sp>
+      <p:sp>
+        <p:nvSpPr>
+          <p:cNvPr id="28" name="interpretation-note">
+            <a:extLst xmlns:a="http://schemas.openxmlformats.org/drawingml/2006/main">
+              <a:ext uri="{FF2B5EF4-FFF2-40B4-BE49-F238E27FC236}">
+                <a16:creationId xmlns:a16="http://schemas.microsoft.com/office/drawing/2014/main" id="{F306F6EB-AD7A-4C3B-A62B-E4AA6F1FA853}"/>
+              </a:ext>
+            </a:extLst>
+          </p:cNvPr>
+          <p:cNvSpPr>
+            <a:spLocks xmlns:a="http://schemas.openxmlformats.org/drawingml/2006/main" noGrp="1"/>
+          </p:cNvSpPr>
+          <p:nvPr/>
+        </p:nvSpPr>
+        <p:spPr>
+          <a:xfrm xmlns:a="http://schemas.openxmlformats.org/drawingml/2006/main">
+            <a:off x="952500" y="4695825"/>
+            <a:ext cx="10287000" cy="1066800"/>
+          </a:xfrm>
+          <a:prstGeom xmlns:a="http://schemas.openxmlformats.org/drawingml/2006/main" prst="roundRect">
+            <a:avLst>
+              <a:gd name="adj" fmla="val 7143"/>
+            </a:avLst>
+          </a:prstGeom>
+          <a:solidFill xmlns:a="http://schemas.openxmlformats.org/drawingml/2006/main">
+            <a:srgbClr val="F2F6FA"/>
+          </a:solidFill>
+          <a:ln xmlns:a="http://schemas.openxmlformats.org/drawingml/2006/main" w="9525">
+            <a:solidFill>
+              <a:srgbClr val="CAD5E1"/>
+            </a:solidFill>
+            <a:prstDash val="solid"/>
+          </a:ln>
+        </p:spPr>
+        <p:txBody>
+          <a:bodyPr xmlns:a="http://schemas.openxmlformats.org/drawingml/2006/main" wrap="square" lIns="209550" tIns="114300" rIns="209550" bIns="114300" anchor="ctr">
+            <a:normAutofit fontScale="100000"/>
+          </a:bodyPr>
+          <a:lstStyle xmlns:a="http://schemas.openxmlformats.org/drawingml/2006/main"/>
+          <a:p xmlns:a="http://schemas.openxmlformats.org/drawingml/2006/main">
+            <a:pPr algn="l">
+              <a:defRPr sz="1425">
+                <a:solidFill>
+                  <a:srgbClr val="142D45"/>
+                </a:solidFill>
+                <a:latin typeface="Aptos"/>
+                <a:ea typeface="Aptos"/>
+                <a:cs typeface="Aptos"/>
+              </a:defRPr>
+            </a:pPr>
+            <a:r>
+              <a:rPr sz="1425">
+                <a:solidFill>
+                  <a:srgbClr val="142D45"/>
+                </a:solidFill>
+                <a:latin typeface="Aptos"/>
+                <a:ea typeface="Aptos"/>
+                <a:cs typeface="Aptos"/>
+              </a:rPr>
+              <a:t>Worker-to-worker es referencia conceptual, no el objetivo principal. Si Coverage = 1 y M₍obs₎ = M₍req₎ &gt; 0, entonces DME = 1.</a:t>
+            </a:r>
+          </a:p>
+          <a:p xmlns:a="http://schemas.openxmlformats.org/drawingml/2006/main">
+            <a:pPr algn="l">
+              <a:defRPr sz="1425">
+                <a:solidFill>
+                  <a:srgbClr val="142D45"/>
+                </a:solidFill>
+                <a:latin typeface="Aptos"/>
+                <a:ea typeface="Aptos"/>
+                <a:cs typeface="Aptos"/>
+              </a:defRPr>
+            </a:pPr>
+            <a:r>
+              <a:rPr sz="1425">
+                <a:solidFill>
+                  <a:srgbClr val="142D45"/>
+                </a:solidFill>
+                <a:latin typeface="Aptos"/>
+                <a:ea typeface="Aptos"/>
+                <a:cs typeface="Aptos"/>
+              </a:rPr>
+              <a:t>El movimiento adicional frente al lower bound no demuestra bytes ahorrables ni optimalidad; Analyzer reconcilia evidencia por job, no captura paquetes.</a:t>
+            </a:r>
           </a:p>
         </p:txBody>
       </p:sp>
@@ -12113,9 +12980,10 @@
             <a:prstDash val="solid"/>
           </a:ln>
         </p:spPr>
-        <p:txBody xmlns:a="http://schemas.openxmlformats.org/drawingml/2006/main">
-          <a:bodyPr/>
-          <a:p/>
+        <p:txBody>
+          <a:bodyPr xmlns:a="http://schemas.openxmlformats.org/drawingml/2006/main"/>
+          <a:lstStyle xmlns:a="http://schemas.openxmlformats.org/drawingml/2006/main"/>
+          <a:p xmlns:a="http://schemas.openxmlformats.org/drawingml/2006/main"/>
         </p:txBody>
       </p:sp>
       <p:sp>
@@ -12158,7 +13026,7 @@
                 <a:ea typeface="Aptos"/>
                 <a:cs typeface="Aptos"/>
               </a:rPr>
-              <a:t>ROADMAP</a:t>
+              <a:t>UTILIDAD</a:t>
             </a:r>
             <a:endParaRPr sz="850"/>
           </a:p>
@@ -12206,1304 +13074,9 @@
                 <a:ea typeface="Aptos Display"/>
                 <a:cs typeface="Aptos Display"/>
               </a:rPr>
-              <a:t>17. Roadmap después del cierre de Gate I</a:t>
+              <a:t>17. Utilidad práctica y límites de DME</a:t>
             </a:r>
             <a:endParaRPr sz="2500"/>
-          </a:p>
-        </p:txBody>
-      </p:sp>
-      <p:sp>
-        <p:nvSpPr>
-          <p:cNvPr id="5" name="Shape 3">
-            <a:extLst xmlns:a="http://schemas.openxmlformats.org/drawingml/2006/main">
-              <a:ext uri="{FF2B5EF4-FFF2-40B4-BE49-F238E27FC236}">
-                <a16:creationId xmlns:a16="http://schemas.microsoft.com/office/drawing/2014/main" id="{75694B10-A675-4CA6-85B9-8416F4AF14C4}"/>
-              </a:ext>
-            </a:extLst>
-          </p:cNvPr>
-          <p:cNvSpPr>
-            <a:spLocks xmlns:a="http://schemas.openxmlformats.org/drawingml/2006/main" noGrp="1"/>
-          </p:cNvSpPr>
-          <p:nvPr/>
-        </p:nvSpPr>
-        <p:spPr>
-          <a:xfrm xmlns:a="http://schemas.openxmlformats.org/drawingml/2006/main">
-            <a:off x="1188720" y="1828800"/>
-            <a:ext cx="530352" cy="530352"/>
-          </a:xfrm>
-          <a:prstGeom xmlns:a="http://schemas.openxmlformats.org/drawingml/2006/main" prst="ellipse">
-            <a:avLst/>
-          </a:prstGeom>
-          <a:solidFill xmlns:a="http://schemas.openxmlformats.org/drawingml/2006/main">
-            <a:srgbClr val="F59E0B"/>
-          </a:solidFill>
-          <a:ln xmlns:a="http://schemas.openxmlformats.org/drawingml/2006/main" w="12700">
-            <a:solidFill>
-              <a:srgbClr val="F59E0B"/>
-            </a:solidFill>
-            <a:prstDash val="solid"/>
-          </a:ln>
-        </p:spPr>
-        <p:txBody xmlns:a="http://schemas.openxmlformats.org/drawingml/2006/main">
-          <a:bodyPr/>
-          <a:p/>
-        </p:txBody>
-      </p:sp>
-      <p:sp>
-        <p:nvSpPr>
-          <p:cNvPr id="6" name="Text 4">
-            <a:extLst xmlns:a="http://schemas.openxmlformats.org/drawingml/2006/main">
-              <a:ext uri="{FF2B5EF4-FFF2-40B4-BE49-F238E27FC236}">
-                <a16:creationId xmlns:a16="http://schemas.microsoft.com/office/drawing/2014/main" id="{4F218BBA-27A1-4D58-B46E-2C253B84183C}"/>
-              </a:ext>
-            </a:extLst>
-          </p:cNvPr>
-          <p:cNvSpPr>
-            <a:spLocks xmlns:a="http://schemas.openxmlformats.org/drawingml/2006/main" noGrp="1"/>
-          </p:cNvSpPr>
-          <p:nvPr/>
-        </p:nvSpPr>
-        <p:spPr>
-          <a:xfrm xmlns:a="http://schemas.openxmlformats.org/drawingml/2006/main">
-            <a:off x="1188720" y="1947672"/>
-            <a:ext cx="530352" cy="164592"/>
-          </a:xfrm>
-          <a:prstGeom xmlns:a="http://schemas.openxmlformats.org/drawingml/2006/main" prst="rect">
-            <a:avLst/>
-          </a:prstGeom>
-          <a:noFill xmlns:a="http://schemas.openxmlformats.org/drawingml/2006/main"/>
-        </p:spPr>
-        <p:txBody>
-          <a:bodyPr xmlns:a="http://schemas.openxmlformats.org/drawingml/2006/main" wrap="square" lIns="0" tIns="0" rIns="0" bIns="0" anchor="ctr"/>
-          <a:lstStyle xmlns:a="http://schemas.openxmlformats.org/drawingml/2006/main"/>
-          <a:p xmlns:a="http://schemas.openxmlformats.org/drawingml/2006/main">
-            <a:pPr marL="0" indent="0" algn="ctr">
-              <a:buNone/>
-            </a:pPr>
-            <a:r>
-              <a:rPr sz="900" b="1">
-                <a:solidFill>
-                  <a:srgbClr val="FFFFFF"/>
-                </a:solidFill>
-              </a:rPr>
-              <a:t>1</a:t>
-            </a:r>
-            <a:endParaRPr sz="900"/>
-          </a:p>
-        </p:txBody>
-      </p:sp>
-      <p:sp>
-        <p:nvSpPr>
-          <p:cNvPr id="7" name="Shape 5">
-            <a:extLst xmlns:a="http://schemas.openxmlformats.org/drawingml/2006/main">
-              <a:ext uri="{FF2B5EF4-FFF2-40B4-BE49-F238E27FC236}">
-                <a16:creationId xmlns:a16="http://schemas.microsoft.com/office/drawing/2014/main" id="{0818A195-1CEC-4035-A4D1-CB2F088A8C99}"/>
-              </a:ext>
-            </a:extLst>
-          </p:cNvPr>
-          <p:cNvSpPr>
-            <a:spLocks xmlns:a="http://schemas.openxmlformats.org/drawingml/2006/main" noGrp="1"/>
-          </p:cNvSpPr>
-          <p:nvPr/>
-        </p:nvSpPr>
-        <p:spPr>
-          <a:xfrm xmlns:a="http://schemas.openxmlformats.org/drawingml/2006/main">
-            <a:off x="1828800" y="2093976"/>
-            <a:ext cx="868680" cy="0"/>
-          </a:xfrm>
-          <a:prstGeom xmlns:a="http://schemas.openxmlformats.org/drawingml/2006/main" prst="line">
-            <a:avLst/>
-          </a:prstGeom>
-          <a:noFill xmlns:a="http://schemas.openxmlformats.org/drawingml/2006/main"/>
-          <a:ln xmlns:a="http://schemas.openxmlformats.org/drawingml/2006/main" w="11430">
-            <a:solidFill>
-              <a:srgbClr val="64748B"/>
-            </a:solidFill>
-            <a:prstDash val="solid"/>
-            <a:headEnd type="none"/>
-            <a:tailEnd type="triangle"/>
-          </a:ln>
-        </p:spPr>
-        <p:txBody xmlns:a="http://schemas.openxmlformats.org/drawingml/2006/main">
-          <a:bodyPr/>
-          <a:p/>
-        </p:txBody>
-      </p:sp>
-      <p:sp>
-        <p:nvSpPr>
-          <p:cNvPr id="8" name="Shape 6">
-            <a:extLst xmlns:a="http://schemas.openxmlformats.org/drawingml/2006/main">
-              <a:ext uri="{FF2B5EF4-FFF2-40B4-BE49-F238E27FC236}">
-                <a16:creationId xmlns:a16="http://schemas.microsoft.com/office/drawing/2014/main" id="{28C4AD5E-8D71-4707-B675-FDE32508E144}"/>
-              </a:ext>
-            </a:extLst>
-          </p:cNvPr>
-          <p:cNvSpPr>
-            <a:spLocks xmlns:a="http://schemas.openxmlformats.org/drawingml/2006/main" noGrp="1"/>
-          </p:cNvSpPr>
-          <p:nvPr/>
-        </p:nvSpPr>
-        <p:spPr>
-          <a:xfrm xmlns:a="http://schemas.openxmlformats.org/drawingml/2006/main">
-            <a:off x="640080" y="2743200"/>
-            <a:ext cx="1691640" cy="438912"/>
-          </a:xfrm>
-          <a:prstGeom xmlns:a="http://schemas.openxmlformats.org/drawingml/2006/main" prst="roundRect">
-            <a:avLst>
-              <a:gd name="adj" fmla="val 16667"/>
-            </a:avLst>
-          </a:prstGeom>
-          <a:solidFill xmlns:a="http://schemas.openxmlformats.org/drawingml/2006/main">
-            <a:srgbClr val="FFFFFF"/>
-          </a:solidFill>
-          <a:ln xmlns:a="http://schemas.openxmlformats.org/drawingml/2006/main" w="10160">
-            <a:solidFill>
-              <a:srgbClr val="F59E0B"/>
-            </a:solidFill>
-            <a:prstDash val="solid"/>
-          </a:ln>
-        </p:spPr>
-        <p:txBody xmlns:a="http://schemas.openxmlformats.org/drawingml/2006/main">
-          <a:bodyPr/>
-          <a:p/>
-        </p:txBody>
-      </p:sp>
-      <p:sp>
-        <p:nvSpPr>
-          <p:cNvPr id="9" name="Text 7">
-            <a:extLst xmlns:a="http://schemas.openxmlformats.org/drawingml/2006/main">
-              <a:ext uri="{FF2B5EF4-FFF2-40B4-BE49-F238E27FC236}">
-                <a16:creationId xmlns:a16="http://schemas.microsoft.com/office/drawing/2014/main" id="{C6BB7938-EBE1-4776-9B70-BCC2DF0A95FA}"/>
-              </a:ext>
-            </a:extLst>
-          </p:cNvPr>
-          <p:cNvSpPr>
-            <a:spLocks xmlns:a="http://schemas.openxmlformats.org/drawingml/2006/main" noGrp="1"/>
-          </p:cNvSpPr>
-          <p:nvPr/>
-        </p:nvSpPr>
-        <p:spPr>
-          <a:xfrm xmlns:a="http://schemas.openxmlformats.org/drawingml/2006/main">
-            <a:off x="749808" y="2834640"/>
-            <a:ext cx="1472184" cy="256032"/>
-          </a:xfrm>
-          <a:prstGeom xmlns:a="http://schemas.openxmlformats.org/drawingml/2006/main" prst="rect">
-            <a:avLst/>
-          </a:prstGeom>
-          <a:noFill xmlns:a="http://schemas.openxmlformats.org/drawingml/2006/main"/>
-        </p:spPr>
-        <p:txBody>
-          <a:bodyPr xmlns:a="http://schemas.openxmlformats.org/drawingml/2006/main" wrap="square" lIns="381" tIns="381" rIns="381" bIns="381" anchor="ctr">
-            <a:normAutofit/>
-          </a:bodyPr>
-          <a:lstStyle xmlns:a="http://schemas.openxmlformats.org/drawingml/2006/main"/>
-          <a:p xmlns:a="http://schemas.openxmlformats.org/drawingml/2006/main">
-            <a:pPr marL="0" indent="0" algn="ctr">
-              <a:buNone/>
-            </a:pPr>
-            <a:r>
-              <a:rPr sz="1100" b="1">
-                <a:solidFill>
-                  <a:srgbClr val="92400E"/>
-                </a:solidFill>
-                <a:latin typeface="Aptos"/>
-                <a:ea typeface="Aptos"/>
-                <a:cs typeface="Aptos"/>
-              </a:rPr>
-              <a:t>Gate I cerrado</a:t>
-            </a:r>
-            <a:endParaRPr sz="1100"/>
-          </a:p>
-        </p:txBody>
-      </p:sp>
-      <p:sp>
-        <p:nvSpPr>
-          <p:cNvPr id="10" name="Text 8">
-            <a:extLst xmlns:a="http://schemas.openxmlformats.org/drawingml/2006/main">
-              <a:ext uri="{FF2B5EF4-FFF2-40B4-BE49-F238E27FC236}">
-                <a16:creationId xmlns:a16="http://schemas.microsoft.com/office/drawing/2014/main" id="{F038655F-6AC1-41AF-B53D-2FC338F05898}"/>
-              </a:ext>
-            </a:extLst>
-          </p:cNvPr>
-          <p:cNvSpPr>
-            <a:spLocks xmlns:a="http://schemas.openxmlformats.org/drawingml/2006/main" noGrp="1"/>
-          </p:cNvSpPr>
-          <p:nvPr/>
-        </p:nvSpPr>
-        <p:spPr>
-          <a:xfrm xmlns:a="http://schemas.openxmlformats.org/drawingml/2006/main">
-            <a:off x="594360" y="3310128"/>
-            <a:ext cx="1783080" cy="411480"/>
-          </a:xfrm>
-          <a:prstGeom xmlns:a="http://schemas.openxmlformats.org/drawingml/2006/main" prst="rect">
-            <a:avLst/>
-          </a:prstGeom>
-          <a:noFill xmlns:a="http://schemas.openxmlformats.org/drawingml/2006/main"/>
-        </p:spPr>
-        <p:txBody>
-          <a:bodyPr xmlns:a="http://schemas.openxmlformats.org/drawingml/2006/main" wrap="square" lIns="0" tIns="0" rIns="0" bIns="0" anchor="ctr">
-            <a:normAutofit fontScale="100000"/>
-          </a:bodyPr>
-          <a:lstStyle xmlns:a="http://schemas.openxmlformats.org/drawingml/2006/main"/>
-          <a:p xmlns:a="http://schemas.openxmlformats.org/drawingml/2006/main">
-            <a:pPr marL="0" indent="0" algn="ctr">
-              <a:buNone/>
-            </a:pPr>
-            <a:r>
-              <a:rPr sz="880">
-                <a:solidFill>
-                  <a:srgbClr val="64748B"/>
-                </a:solidFill>
-              </a:rPr>
-              <a:t>docs, CLI y suite PASS</a:t>
-            </a:r>
-            <a:endParaRPr sz="880"/>
-          </a:p>
-        </p:txBody>
-      </p:sp>
-      <p:sp>
-        <p:nvSpPr>
-          <p:cNvPr id="11" name="Shape 9">
-            <a:extLst xmlns:a="http://schemas.openxmlformats.org/drawingml/2006/main">
-              <a:ext uri="{FF2B5EF4-FFF2-40B4-BE49-F238E27FC236}">
-                <a16:creationId xmlns:a16="http://schemas.microsoft.com/office/drawing/2014/main" id="{AB81D2EC-2360-48E9-81E4-8E8321CFD378}"/>
-              </a:ext>
-            </a:extLst>
-          </p:cNvPr>
-          <p:cNvSpPr>
-            <a:spLocks xmlns:a="http://schemas.openxmlformats.org/drawingml/2006/main" noGrp="1"/>
-          </p:cNvSpPr>
-          <p:nvPr/>
-        </p:nvSpPr>
-        <p:spPr>
-          <a:xfrm xmlns:a="http://schemas.openxmlformats.org/drawingml/2006/main">
-            <a:off x="3520440" y="1828800"/>
-            <a:ext cx="530352" cy="530352"/>
-          </a:xfrm>
-          <a:prstGeom xmlns:a="http://schemas.openxmlformats.org/drawingml/2006/main" prst="ellipse">
-            <a:avLst/>
-          </a:prstGeom>
-          <a:solidFill xmlns:a="http://schemas.openxmlformats.org/drawingml/2006/main">
-            <a:srgbClr val="6D28D9"/>
-          </a:solidFill>
-          <a:ln xmlns:a="http://schemas.openxmlformats.org/drawingml/2006/main" w="12700">
-            <a:solidFill>
-              <a:srgbClr val="6D28D9"/>
-            </a:solidFill>
-            <a:prstDash val="solid"/>
-          </a:ln>
-        </p:spPr>
-        <p:txBody xmlns:a="http://schemas.openxmlformats.org/drawingml/2006/main">
-          <a:bodyPr/>
-          <a:p/>
-        </p:txBody>
-      </p:sp>
-      <p:sp>
-        <p:nvSpPr>
-          <p:cNvPr id="12" name="Text 10">
-            <a:extLst xmlns:a="http://schemas.openxmlformats.org/drawingml/2006/main">
-              <a:ext uri="{FF2B5EF4-FFF2-40B4-BE49-F238E27FC236}">
-                <a16:creationId xmlns:a16="http://schemas.microsoft.com/office/drawing/2014/main" id="{84FABB40-F331-405D-B27B-4AACCEF4AF5D}"/>
-              </a:ext>
-            </a:extLst>
-          </p:cNvPr>
-          <p:cNvSpPr>
-            <a:spLocks xmlns:a="http://schemas.openxmlformats.org/drawingml/2006/main" noGrp="1"/>
-          </p:cNvSpPr>
-          <p:nvPr/>
-        </p:nvSpPr>
-        <p:spPr>
-          <a:xfrm xmlns:a="http://schemas.openxmlformats.org/drawingml/2006/main">
-            <a:off x="3520440" y="1947672"/>
-            <a:ext cx="530352" cy="164592"/>
-          </a:xfrm>
-          <a:prstGeom xmlns:a="http://schemas.openxmlformats.org/drawingml/2006/main" prst="rect">
-            <a:avLst/>
-          </a:prstGeom>
-          <a:noFill xmlns:a="http://schemas.openxmlformats.org/drawingml/2006/main"/>
-        </p:spPr>
-        <p:txBody>
-          <a:bodyPr xmlns:a="http://schemas.openxmlformats.org/drawingml/2006/main" wrap="square" lIns="0" tIns="0" rIns="0" bIns="0" anchor="ctr"/>
-          <a:lstStyle xmlns:a="http://schemas.openxmlformats.org/drawingml/2006/main"/>
-          <a:p xmlns:a="http://schemas.openxmlformats.org/drawingml/2006/main">
-            <a:pPr marL="0" indent="0" algn="ctr">
-              <a:buNone/>
-            </a:pPr>
-            <a:r>
-              <a:rPr sz="900" b="1">
-                <a:solidFill>
-                  <a:srgbClr val="FFFFFF"/>
-                </a:solidFill>
-              </a:rPr>
-              <a:t>2</a:t>
-            </a:r>
-            <a:endParaRPr sz="900"/>
-          </a:p>
-        </p:txBody>
-      </p:sp>
-      <p:sp>
-        <p:nvSpPr>
-          <p:cNvPr id="13" name="Shape 11">
-            <a:extLst xmlns:a="http://schemas.openxmlformats.org/drawingml/2006/main">
-              <a:ext uri="{FF2B5EF4-FFF2-40B4-BE49-F238E27FC236}">
-                <a16:creationId xmlns:a16="http://schemas.microsoft.com/office/drawing/2014/main" id="{29A99732-44D0-4E6B-93DD-043CFD968828}"/>
-              </a:ext>
-            </a:extLst>
-          </p:cNvPr>
-          <p:cNvSpPr>
-            <a:spLocks xmlns:a="http://schemas.openxmlformats.org/drawingml/2006/main" noGrp="1"/>
-          </p:cNvSpPr>
-          <p:nvPr/>
-        </p:nvSpPr>
-        <p:spPr>
-          <a:xfrm xmlns:a="http://schemas.openxmlformats.org/drawingml/2006/main">
-            <a:off x="4160520" y="2093976"/>
-            <a:ext cx="868680" cy="0"/>
-          </a:xfrm>
-          <a:prstGeom xmlns:a="http://schemas.openxmlformats.org/drawingml/2006/main" prst="line">
-            <a:avLst/>
-          </a:prstGeom>
-          <a:noFill xmlns:a="http://schemas.openxmlformats.org/drawingml/2006/main"/>
-          <a:ln xmlns:a="http://schemas.openxmlformats.org/drawingml/2006/main" w="11430">
-            <a:solidFill>
-              <a:srgbClr val="64748B"/>
-            </a:solidFill>
-            <a:prstDash val="solid"/>
-            <a:headEnd type="none"/>
-            <a:tailEnd type="triangle"/>
-          </a:ln>
-        </p:spPr>
-        <p:txBody xmlns:a="http://schemas.openxmlformats.org/drawingml/2006/main">
-          <a:bodyPr/>
-          <a:p/>
-        </p:txBody>
-      </p:sp>
-      <p:sp>
-        <p:nvSpPr>
-          <p:cNvPr id="14" name="Shape 12">
-            <a:extLst xmlns:a="http://schemas.openxmlformats.org/drawingml/2006/main">
-              <a:ext uri="{FF2B5EF4-FFF2-40B4-BE49-F238E27FC236}">
-                <a16:creationId xmlns:a16="http://schemas.microsoft.com/office/drawing/2014/main" id="{94924331-5B10-4280-86CD-A57B24E948DF}"/>
-              </a:ext>
-            </a:extLst>
-          </p:cNvPr>
-          <p:cNvSpPr>
-            <a:spLocks xmlns:a="http://schemas.openxmlformats.org/drawingml/2006/main" noGrp="1"/>
-          </p:cNvSpPr>
-          <p:nvPr/>
-        </p:nvSpPr>
-        <p:spPr>
-          <a:xfrm xmlns:a="http://schemas.openxmlformats.org/drawingml/2006/main">
-            <a:off x="2971800" y="2743200"/>
-            <a:ext cx="1691640" cy="438912"/>
-          </a:xfrm>
-          <a:prstGeom xmlns:a="http://schemas.openxmlformats.org/drawingml/2006/main" prst="roundRect">
-            <a:avLst>
-              <a:gd name="adj" fmla="val 16667"/>
-            </a:avLst>
-          </a:prstGeom>
-          <a:solidFill xmlns:a="http://schemas.openxmlformats.org/drawingml/2006/main">
-            <a:srgbClr val="FFFFFF"/>
-          </a:solidFill>
-          <a:ln xmlns:a="http://schemas.openxmlformats.org/drawingml/2006/main" w="10160">
-            <a:solidFill>
-              <a:srgbClr val="6D28D9"/>
-            </a:solidFill>
-            <a:prstDash val="solid"/>
-          </a:ln>
-        </p:spPr>
-        <p:txBody xmlns:a="http://schemas.openxmlformats.org/drawingml/2006/main">
-          <a:bodyPr/>
-          <a:p/>
-        </p:txBody>
-      </p:sp>
-      <p:sp>
-        <p:nvSpPr>
-          <p:cNvPr id="15" name="Text 13">
-            <a:extLst xmlns:a="http://schemas.openxmlformats.org/drawingml/2006/main">
-              <a:ext uri="{FF2B5EF4-FFF2-40B4-BE49-F238E27FC236}">
-                <a16:creationId xmlns:a16="http://schemas.microsoft.com/office/drawing/2014/main" id="{46AB1F23-578A-4AFF-BEC6-751642106370}"/>
-              </a:ext>
-            </a:extLst>
-          </p:cNvPr>
-          <p:cNvSpPr>
-            <a:spLocks xmlns:a="http://schemas.openxmlformats.org/drawingml/2006/main" noGrp="1"/>
-          </p:cNvSpPr>
-          <p:nvPr/>
-        </p:nvSpPr>
-        <p:spPr>
-          <a:xfrm xmlns:a="http://schemas.openxmlformats.org/drawingml/2006/main">
-            <a:off x="3081528" y="2834640"/>
-            <a:ext cx="1472184" cy="256032"/>
-          </a:xfrm>
-          <a:prstGeom xmlns:a="http://schemas.openxmlformats.org/drawingml/2006/main" prst="rect">
-            <a:avLst/>
-          </a:prstGeom>
-          <a:noFill xmlns:a="http://schemas.openxmlformats.org/drawingml/2006/main"/>
-        </p:spPr>
-        <p:txBody>
-          <a:bodyPr xmlns:a="http://schemas.openxmlformats.org/drawingml/2006/main" wrap="square" lIns="381" tIns="381" rIns="381" bIns="381" anchor="ctr">
-            <a:normAutofit fontScale="100000"/>
-          </a:bodyPr>
-          <a:lstStyle xmlns:a="http://schemas.openxmlformats.org/drawingml/2006/main"/>
-          <a:p xmlns:a="http://schemas.openxmlformats.org/drawingml/2006/main">
-            <a:pPr marL="0" indent="0" algn="ctr">
-              <a:buNone/>
-            </a:pPr>
-            <a:r>
-              <a:rPr sz="1100" b="1">
-                <a:solidFill>
-                  <a:srgbClr val="6D28D9"/>
-                </a:solidFill>
-                <a:latin typeface="Aptos"/>
-                <a:ea typeface="Aptos"/>
-                <a:cs typeface="Aptos"/>
-              </a:rPr>
-              <a:t>I14 pendiente</a:t>
-            </a:r>
-            <a:endParaRPr sz="1100"/>
-          </a:p>
-        </p:txBody>
-      </p:sp>
-      <p:sp>
-        <p:nvSpPr>
-          <p:cNvPr id="16" name="Text 14">
-            <a:extLst xmlns:a="http://schemas.openxmlformats.org/drawingml/2006/main">
-              <a:ext uri="{FF2B5EF4-FFF2-40B4-BE49-F238E27FC236}">
-                <a16:creationId xmlns:a16="http://schemas.microsoft.com/office/drawing/2014/main" id="{82421365-2913-419A-AEFB-8F362BDD3D09}"/>
-              </a:ext>
-            </a:extLst>
-          </p:cNvPr>
-          <p:cNvSpPr>
-            <a:spLocks xmlns:a="http://schemas.openxmlformats.org/drawingml/2006/main" noGrp="1"/>
-          </p:cNvSpPr>
-          <p:nvPr/>
-        </p:nvSpPr>
-        <p:spPr>
-          <a:xfrm xmlns:a="http://schemas.openxmlformats.org/drawingml/2006/main">
-            <a:off x="2926080" y="3310128"/>
-            <a:ext cx="1783080" cy="411480"/>
-          </a:xfrm>
-          <a:prstGeom xmlns:a="http://schemas.openxmlformats.org/drawingml/2006/main" prst="rect">
-            <a:avLst/>
-          </a:prstGeom>
-          <a:noFill xmlns:a="http://schemas.openxmlformats.org/drawingml/2006/main"/>
-        </p:spPr>
-        <p:txBody>
-          <a:bodyPr xmlns:a="http://schemas.openxmlformats.org/drawingml/2006/main" wrap="square" lIns="0" tIns="0" rIns="0" bIns="0" anchor="ctr">
-            <a:normAutofit fontScale="100000"/>
-          </a:bodyPr>
-          <a:lstStyle xmlns:a="http://schemas.openxmlformats.org/drawingml/2006/main"/>
-          <a:p xmlns:a="http://schemas.openxmlformats.org/drawingml/2006/main">
-            <a:pPr marL="0" indent="0" algn="ctr">
-              <a:buNone/>
-            </a:pPr>
-            <a:r>
-              <a:rPr sz="880">
-                <a:solidFill>
-                  <a:srgbClr val="64748B"/>
-                </a:solidFill>
-              </a:rPr>
-              <a:t>pool y runner pendientes</a:t>
-            </a:r>
-            <a:endParaRPr sz="880"/>
-          </a:p>
-        </p:txBody>
-      </p:sp>
-      <p:sp>
-        <p:nvSpPr>
-          <p:cNvPr id="17" name="Shape 15">
-            <a:extLst xmlns:a="http://schemas.openxmlformats.org/drawingml/2006/main">
-              <a:ext uri="{FF2B5EF4-FFF2-40B4-BE49-F238E27FC236}">
-                <a16:creationId xmlns:a16="http://schemas.microsoft.com/office/drawing/2014/main" id="{4C88BABD-3B85-473A-BA8D-CFD6CF39063E}"/>
-              </a:ext>
-            </a:extLst>
-          </p:cNvPr>
-          <p:cNvSpPr>
-            <a:spLocks xmlns:a="http://schemas.openxmlformats.org/drawingml/2006/main" noGrp="1"/>
-          </p:cNvSpPr>
-          <p:nvPr/>
-        </p:nvSpPr>
-        <p:spPr>
-          <a:xfrm xmlns:a="http://schemas.openxmlformats.org/drawingml/2006/main">
-            <a:off x="5852160" y="1828800"/>
-            <a:ext cx="530352" cy="530352"/>
-          </a:xfrm>
-          <a:prstGeom xmlns:a="http://schemas.openxmlformats.org/drawingml/2006/main" prst="ellipse">
-            <a:avLst/>
-          </a:prstGeom>
-          <a:solidFill xmlns:a="http://schemas.openxmlformats.org/drawingml/2006/main">
-            <a:srgbClr val="6D28D9"/>
-          </a:solidFill>
-          <a:ln xmlns:a="http://schemas.openxmlformats.org/drawingml/2006/main" w="12700">
-            <a:solidFill>
-              <a:srgbClr val="6D28D9"/>
-            </a:solidFill>
-            <a:prstDash val="solid"/>
-          </a:ln>
-        </p:spPr>
-        <p:txBody xmlns:a="http://schemas.openxmlformats.org/drawingml/2006/main">
-          <a:bodyPr/>
-          <a:p/>
-        </p:txBody>
-      </p:sp>
-      <p:sp>
-        <p:nvSpPr>
-          <p:cNvPr id="18" name="Text 16">
-            <a:extLst xmlns:a="http://schemas.openxmlformats.org/drawingml/2006/main">
-              <a:ext uri="{FF2B5EF4-FFF2-40B4-BE49-F238E27FC236}">
-                <a16:creationId xmlns:a16="http://schemas.microsoft.com/office/drawing/2014/main" id="{379F6ADF-7BB2-42D8-80D6-06D4FEEDF753}"/>
-              </a:ext>
-            </a:extLst>
-          </p:cNvPr>
-          <p:cNvSpPr>
-            <a:spLocks xmlns:a="http://schemas.openxmlformats.org/drawingml/2006/main" noGrp="1"/>
-          </p:cNvSpPr>
-          <p:nvPr/>
-        </p:nvSpPr>
-        <p:spPr>
-          <a:xfrm xmlns:a="http://schemas.openxmlformats.org/drawingml/2006/main">
-            <a:off x="5852160" y="1947672"/>
-            <a:ext cx="530352" cy="164592"/>
-          </a:xfrm>
-          <a:prstGeom xmlns:a="http://schemas.openxmlformats.org/drawingml/2006/main" prst="rect">
-            <a:avLst/>
-          </a:prstGeom>
-          <a:noFill xmlns:a="http://schemas.openxmlformats.org/drawingml/2006/main"/>
-        </p:spPr>
-        <p:txBody>
-          <a:bodyPr xmlns:a="http://schemas.openxmlformats.org/drawingml/2006/main" wrap="square" lIns="0" tIns="0" rIns="0" bIns="0" anchor="ctr"/>
-          <a:lstStyle xmlns:a="http://schemas.openxmlformats.org/drawingml/2006/main"/>
-          <a:p xmlns:a="http://schemas.openxmlformats.org/drawingml/2006/main">
-            <a:pPr marL="0" indent="0" algn="ctr">
-              <a:buNone/>
-            </a:pPr>
-            <a:r>
-              <a:rPr sz="900" b="1">
-                <a:solidFill>
-                  <a:srgbClr val="FFFFFF"/>
-                </a:solidFill>
-              </a:rPr>
-              <a:t>3</a:t>
-            </a:r>
-            <a:endParaRPr sz="900"/>
-          </a:p>
-        </p:txBody>
-      </p:sp>
-      <p:sp>
-        <p:nvSpPr>
-          <p:cNvPr id="19" name="Shape 17">
-            <a:extLst xmlns:a="http://schemas.openxmlformats.org/drawingml/2006/main">
-              <a:ext uri="{FF2B5EF4-FFF2-40B4-BE49-F238E27FC236}">
-                <a16:creationId xmlns:a16="http://schemas.microsoft.com/office/drawing/2014/main" id="{8D87282E-75C8-4A9A-A15B-B6579CA1CC0D}"/>
-              </a:ext>
-            </a:extLst>
-          </p:cNvPr>
-          <p:cNvSpPr>
-            <a:spLocks xmlns:a="http://schemas.openxmlformats.org/drawingml/2006/main" noGrp="1"/>
-          </p:cNvSpPr>
-          <p:nvPr/>
-        </p:nvSpPr>
-        <p:spPr>
-          <a:xfrm xmlns:a="http://schemas.openxmlformats.org/drawingml/2006/main">
-            <a:off x="6492240" y="2093976"/>
-            <a:ext cx="868680" cy="0"/>
-          </a:xfrm>
-          <a:prstGeom xmlns:a="http://schemas.openxmlformats.org/drawingml/2006/main" prst="line">
-            <a:avLst/>
-          </a:prstGeom>
-          <a:noFill xmlns:a="http://schemas.openxmlformats.org/drawingml/2006/main"/>
-          <a:ln xmlns:a="http://schemas.openxmlformats.org/drawingml/2006/main" w="11430">
-            <a:solidFill>
-              <a:srgbClr val="64748B"/>
-            </a:solidFill>
-            <a:prstDash val="solid"/>
-            <a:headEnd type="none"/>
-            <a:tailEnd type="triangle"/>
-          </a:ln>
-        </p:spPr>
-        <p:txBody xmlns:a="http://schemas.openxmlformats.org/drawingml/2006/main">
-          <a:bodyPr/>
-          <a:p/>
-        </p:txBody>
-      </p:sp>
-      <p:sp>
-        <p:nvSpPr>
-          <p:cNvPr id="20" name="Shape 18">
-            <a:extLst xmlns:a="http://schemas.openxmlformats.org/drawingml/2006/main">
-              <a:ext uri="{FF2B5EF4-FFF2-40B4-BE49-F238E27FC236}">
-                <a16:creationId xmlns:a16="http://schemas.microsoft.com/office/drawing/2014/main" id="{76F64D0E-0AF1-42DF-AE75-CF2AF5F6970C}"/>
-              </a:ext>
-            </a:extLst>
-          </p:cNvPr>
-          <p:cNvSpPr>
-            <a:spLocks xmlns:a="http://schemas.openxmlformats.org/drawingml/2006/main" noGrp="1"/>
-          </p:cNvSpPr>
-          <p:nvPr/>
-        </p:nvSpPr>
-        <p:spPr>
-          <a:xfrm xmlns:a="http://schemas.openxmlformats.org/drawingml/2006/main">
-            <a:off x="5303520" y="2743200"/>
-            <a:ext cx="1691640" cy="438912"/>
-          </a:xfrm>
-          <a:prstGeom xmlns:a="http://schemas.openxmlformats.org/drawingml/2006/main" prst="roundRect">
-            <a:avLst>
-              <a:gd name="adj" fmla="val 16667"/>
-            </a:avLst>
-          </a:prstGeom>
-          <a:solidFill xmlns:a="http://schemas.openxmlformats.org/drawingml/2006/main">
-            <a:srgbClr val="FFFFFF"/>
-          </a:solidFill>
-          <a:ln xmlns:a="http://schemas.openxmlformats.org/drawingml/2006/main" w="10160">
-            <a:solidFill>
-              <a:srgbClr val="6D28D9"/>
-            </a:solidFill>
-            <a:prstDash val="solid"/>
-          </a:ln>
-        </p:spPr>
-        <p:txBody xmlns:a="http://schemas.openxmlformats.org/drawingml/2006/main">
-          <a:bodyPr/>
-          <a:p/>
-        </p:txBody>
-      </p:sp>
-      <p:sp>
-        <p:nvSpPr>
-          <p:cNvPr id="21" name="Text 19">
-            <a:extLst xmlns:a="http://schemas.openxmlformats.org/drawingml/2006/main">
-              <a:ext uri="{FF2B5EF4-FFF2-40B4-BE49-F238E27FC236}">
-                <a16:creationId xmlns:a16="http://schemas.microsoft.com/office/drawing/2014/main" id="{C7E6A750-5A40-484C-9306-32DE316DF311}"/>
-              </a:ext>
-            </a:extLst>
-          </p:cNvPr>
-          <p:cNvSpPr>
-            <a:spLocks xmlns:a="http://schemas.openxmlformats.org/drawingml/2006/main" noGrp="1"/>
-          </p:cNvSpPr>
-          <p:nvPr/>
-        </p:nvSpPr>
-        <p:spPr>
-          <a:xfrm xmlns:a="http://schemas.openxmlformats.org/drawingml/2006/main">
-            <a:off x="5413248" y="2834640"/>
-            <a:ext cx="1472184" cy="256032"/>
-          </a:xfrm>
-          <a:prstGeom xmlns:a="http://schemas.openxmlformats.org/drawingml/2006/main" prst="rect">
-            <a:avLst/>
-          </a:prstGeom>
-          <a:noFill xmlns:a="http://schemas.openxmlformats.org/drawingml/2006/main"/>
-        </p:spPr>
-        <p:txBody>
-          <a:bodyPr xmlns:a="http://schemas.openxmlformats.org/drawingml/2006/main" wrap="square" lIns="381" tIns="381" rIns="381" bIns="381" anchor="ctr">
-            <a:normAutofit fontScale="100000"/>
-          </a:bodyPr>
-          <a:lstStyle xmlns:a="http://schemas.openxmlformats.org/drawingml/2006/main"/>
-          <a:p xmlns:a="http://schemas.openxmlformats.org/drawingml/2006/main">
-            <a:pPr marL="0" indent="0" algn="ctr">
-              <a:buNone/>
-            </a:pPr>
-            <a:r>
-              <a:rPr sz="1100" b="1">
-                <a:solidFill>
-                  <a:srgbClr val="6D28D9"/>
-                </a:solidFill>
-                <a:latin typeface="Aptos"/>
-                <a:ea typeface="Aptos"/>
-                <a:cs typeface="Aptos"/>
-              </a:rPr>
-              <a:t>Gate V preparado</a:t>
-            </a:r>
-            <a:endParaRPr sz="1100"/>
-          </a:p>
-        </p:txBody>
-      </p:sp>
-      <p:sp>
-        <p:nvSpPr>
-          <p:cNvPr id="22" name="Text 20">
-            <a:extLst xmlns:a="http://schemas.openxmlformats.org/drawingml/2006/main">
-              <a:ext uri="{FF2B5EF4-FFF2-40B4-BE49-F238E27FC236}">
-                <a16:creationId xmlns:a16="http://schemas.microsoft.com/office/drawing/2014/main" id="{446C3FAF-7053-484E-856E-4A94CE6701FE}"/>
-              </a:ext>
-            </a:extLst>
-          </p:cNvPr>
-          <p:cNvSpPr>
-            <a:spLocks xmlns:a="http://schemas.openxmlformats.org/drawingml/2006/main" noGrp="1"/>
-          </p:cNvSpPr>
-          <p:nvPr/>
-        </p:nvSpPr>
-        <p:spPr>
-          <a:xfrm xmlns:a="http://schemas.openxmlformats.org/drawingml/2006/main">
-            <a:off x="5257800" y="3310128"/>
-            <a:ext cx="1783080" cy="411480"/>
-          </a:xfrm>
-          <a:prstGeom xmlns:a="http://schemas.openxmlformats.org/drawingml/2006/main" prst="rect">
-            <a:avLst/>
-          </a:prstGeom>
-          <a:noFill xmlns:a="http://schemas.openxmlformats.org/drawingml/2006/main"/>
-        </p:spPr>
-        <p:txBody>
-          <a:bodyPr xmlns:a="http://schemas.openxmlformats.org/drawingml/2006/main" wrap="square" lIns="0" tIns="0" rIns="0" bIns="0" anchor="ctr">
-            <a:normAutofit fontScale="100000"/>
-          </a:bodyPr>
-          <a:lstStyle xmlns:a="http://schemas.openxmlformats.org/drawingml/2006/main"/>
-          <a:p xmlns:a="http://schemas.openxmlformats.org/drawingml/2006/main">
-            <a:pPr marL="0" indent="0" algn="ctr">
-              <a:buNone/>
-            </a:pPr>
-            <a:r>
-              <a:rPr sz="880">
-                <a:solidFill>
-                  <a:srgbClr val="64748B"/>
-                </a:solidFill>
-              </a:rPr>
-              <a:t>matriz y oráculos listos</a:t>
-            </a:r>
-            <a:endParaRPr sz="880"/>
-          </a:p>
-        </p:txBody>
-      </p:sp>
-      <p:sp>
-        <p:nvSpPr>
-          <p:cNvPr id="23" name="Shape 21">
-            <a:extLst xmlns:a="http://schemas.openxmlformats.org/drawingml/2006/main">
-              <a:ext uri="{FF2B5EF4-FFF2-40B4-BE49-F238E27FC236}">
-                <a16:creationId xmlns:a16="http://schemas.microsoft.com/office/drawing/2014/main" id="{10E272E7-5067-4E48-9055-C43DDEFD39C4}"/>
-              </a:ext>
-            </a:extLst>
-          </p:cNvPr>
-          <p:cNvSpPr>
-            <a:spLocks xmlns:a="http://schemas.openxmlformats.org/drawingml/2006/main" noGrp="1"/>
-          </p:cNvSpPr>
-          <p:nvPr/>
-        </p:nvSpPr>
-        <p:spPr>
-          <a:xfrm xmlns:a="http://schemas.openxmlformats.org/drawingml/2006/main">
-            <a:off x="8183880" y="1828800"/>
-            <a:ext cx="530352" cy="530352"/>
-          </a:xfrm>
-          <a:prstGeom xmlns:a="http://schemas.openxmlformats.org/drawingml/2006/main" prst="ellipse">
-            <a:avLst/>
-          </a:prstGeom>
-          <a:solidFill xmlns:a="http://schemas.openxmlformats.org/drawingml/2006/main">
-            <a:srgbClr val="6D28D9"/>
-          </a:solidFill>
-          <a:ln xmlns:a="http://schemas.openxmlformats.org/drawingml/2006/main" w="12700">
-            <a:solidFill>
-              <a:srgbClr val="6D28D9"/>
-            </a:solidFill>
-            <a:prstDash val="solid"/>
-          </a:ln>
-        </p:spPr>
-        <p:txBody xmlns:a="http://schemas.openxmlformats.org/drawingml/2006/main">
-          <a:bodyPr/>
-          <a:p/>
-        </p:txBody>
-      </p:sp>
-      <p:sp>
-        <p:nvSpPr>
-          <p:cNvPr id="24" name="Text 22">
-            <a:extLst xmlns:a="http://schemas.openxmlformats.org/drawingml/2006/main">
-              <a:ext uri="{FF2B5EF4-FFF2-40B4-BE49-F238E27FC236}">
-                <a16:creationId xmlns:a16="http://schemas.microsoft.com/office/drawing/2014/main" id="{9BAA5A0E-05B0-4A9B-9A4E-3ACD6590D01A}"/>
-              </a:ext>
-            </a:extLst>
-          </p:cNvPr>
-          <p:cNvSpPr>
-            <a:spLocks xmlns:a="http://schemas.openxmlformats.org/drawingml/2006/main" noGrp="1"/>
-          </p:cNvSpPr>
-          <p:nvPr/>
-        </p:nvSpPr>
-        <p:spPr>
-          <a:xfrm xmlns:a="http://schemas.openxmlformats.org/drawingml/2006/main">
-            <a:off x="8183880" y="1947672"/>
-            <a:ext cx="530352" cy="164592"/>
-          </a:xfrm>
-          <a:prstGeom xmlns:a="http://schemas.openxmlformats.org/drawingml/2006/main" prst="rect">
-            <a:avLst/>
-          </a:prstGeom>
-          <a:noFill xmlns:a="http://schemas.openxmlformats.org/drawingml/2006/main"/>
-        </p:spPr>
-        <p:txBody>
-          <a:bodyPr xmlns:a="http://schemas.openxmlformats.org/drawingml/2006/main" wrap="square" lIns="0" tIns="0" rIns="0" bIns="0" anchor="ctr"/>
-          <a:lstStyle xmlns:a="http://schemas.openxmlformats.org/drawingml/2006/main"/>
-          <a:p xmlns:a="http://schemas.openxmlformats.org/drawingml/2006/main">
-            <a:pPr marL="0" indent="0" algn="ctr">
-              <a:buNone/>
-            </a:pPr>
-            <a:r>
-              <a:rPr sz="900" b="1">
-                <a:solidFill>
-                  <a:srgbClr val="FFFFFF"/>
-                </a:solidFill>
-              </a:rPr>
-              <a:t>4</a:t>
-            </a:r>
-            <a:endParaRPr sz="900"/>
-          </a:p>
-        </p:txBody>
-      </p:sp>
-      <p:sp>
-        <p:nvSpPr>
-          <p:cNvPr id="25" name="Shape 23">
-            <a:extLst xmlns:a="http://schemas.openxmlformats.org/drawingml/2006/main">
-              <a:ext uri="{FF2B5EF4-FFF2-40B4-BE49-F238E27FC236}">
-                <a16:creationId xmlns:a16="http://schemas.microsoft.com/office/drawing/2014/main" id="{0252B125-C99F-43F0-AACD-E1085CB0FDAC}"/>
-              </a:ext>
-            </a:extLst>
-          </p:cNvPr>
-          <p:cNvSpPr>
-            <a:spLocks xmlns:a="http://schemas.openxmlformats.org/drawingml/2006/main" noGrp="1"/>
-          </p:cNvSpPr>
-          <p:nvPr/>
-        </p:nvSpPr>
-        <p:spPr>
-          <a:xfrm xmlns:a="http://schemas.openxmlformats.org/drawingml/2006/main">
-            <a:off x="8823960" y="2093976"/>
-            <a:ext cx="868680" cy="0"/>
-          </a:xfrm>
-          <a:prstGeom xmlns:a="http://schemas.openxmlformats.org/drawingml/2006/main" prst="line">
-            <a:avLst/>
-          </a:prstGeom>
-          <a:noFill xmlns:a="http://schemas.openxmlformats.org/drawingml/2006/main"/>
-          <a:ln xmlns:a="http://schemas.openxmlformats.org/drawingml/2006/main" w="11430">
-            <a:solidFill>
-              <a:srgbClr val="64748B"/>
-            </a:solidFill>
-            <a:prstDash val="solid"/>
-            <a:headEnd type="none"/>
-            <a:tailEnd type="triangle"/>
-          </a:ln>
-        </p:spPr>
-        <p:txBody xmlns:a="http://schemas.openxmlformats.org/drawingml/2006/main">
-          <a:bodyPr/>
-          <a:p/>
-        </p:txBody>
-      </p:sp>
-      <p:sp>
-        <p:nvSpPr>
-          <p:cNvPr id="26" name="Shape 24">
-            <a:extLst xmlns:a="http://schemas.openxmlformats.org/drawingml/2006/main">
-              <a:ext uri="{FF2B5EF4-FFF2-40B4-BE49-F238E27FC236}">
-                <a16:creationId xmlns:a16="http://schemas.microsoft.com/office/drawing/2014/main" id="{00ADD519-A9C4-4D54-B298-AD02881C0311}"/>
-              </a:ext>
-            </a:extLst>
-          </p:cNvPr>
-          <p:cNvSpPr>
-            <a:spLocks xmlns:a="http://schemas.openxmlformats.org/drawingml/2006/main" noGrp="1"/>
-          </p:cNvSpPr>
-          <p:nvPr/>
-        </p:nvSpPr>
-        <p:spPr>
-          <a:xfrm xmlns:a="http://schemas.openxmlformats.org/drawingml/2006/main">
-            <a:off x="7635240" y="2743200"/>
-            <a:ext cx="1691640" cy="438912"/>
-          </a:xfrm>
-          <a:prstGeom xmlns:a="http://schemas.openxmlformats.org/drawingml/2006/main" prst="roundRect">
-            <a:avLst>
-              <a:gd name="adj" fmla="val 16667"/>
-            </a:avLst>
-          </a:prstGeom>
-          <a:solidFill xmlns:a="http://schemas.openxmlformats.org/drawingml/2006/main">
-            <a:srgbClr val="FFFFFF"/>
-          </a:solidFill>
-          <a:ln xmlns:a="http://schemas.openxmlformats.org/drawingml/2006/main" w="10160">
-            <a:solidFill>
-              <a:srgbClr val="6D28D9"/>
-            </a:solidFill>
-            <a:prstDash val="solid"/>
-          </a:ln>
-        </p:spPr>
-        <p:txBody xmlns:a="http://schemas.openxmlformats.org/drawingml/2006/main">
-          <a:bodyPr/>
-          <a:p/>
-        </p:txBody>
-      </p:sp>
-      <p:sp>
-        <p:nvSpPr>
-          <p:cNvPr id="27" name="Text 25">
-            <a:extLst xmlns:a="http://schemas.openxmlformats.org/drawingml/2006/main">
-              <a:ext uri="{FF2B5EF4-FFF2-40B4-BE49-F238E27FC236}">
-                <a16:creationId xmlns:a16="http://schemas.microsoft.com/office/drawing/2014/main" id="{8533CC14-4CEE-43BD-93DF-2954557D363E}"/>
-              </a:ext>
-            </a:extLst>
-          </p:cNvPr>
-          <p:cNvSpPr>
-            <a:spLocks xmlns:a="http://schemas.openxmlformats.org/drawingml/2006/main" noGrp="1"/>
-          </p:cNvSpPr>
-          <p:nvPr/>
-        </p:nvSpPr>
-        <p:spPr>
-          <a:xfrm xmlns:a="http://schemas.openxmlformats.org/drawingml/2006/main">
-            <a:off x="7744968" y="2834640"/>
-            <a:ext cx="1472184" cy="256032"/>
-          </a:xfrm>
-          <a:prstGeom xmlns:a="http://schemas.openxmlformats.org/drawingml/2006/main" prst="rect">
-            <a:avLst/>
-          </a:prstGeom>
-          <a:noFill xmlns:a="http://schemas.openxmlformats.org/drawingml/2006/main"/>
-        </p:spPr>
-        <p:txBody>
-          <a:bodyPr xmlns:a="http://schemas.openxmlformats.org/drawingml/2006/main" wrap="square" lIns="381" tIns="381" rIns="381" bIns="381" anchor="ctr">
-            <a:normAutofit fontScale="100000"/>
-          </a:bodyPr>
-          <a:lstStyle xmlns:a="http://schemas.openxmlformats.org/drawingml/2006/main"/>
-          <a:p xmlns:a="http://schemas.openxmlformats.org/drawingml/2006/main">
-            <a:pPr marL="0" indent="0" algn="ctr">
-              <a:buNone/>
-            </a:pPr>
-            <a:r>
-              <a:rPr sz="1100" b="1">
-                <a:solidFill>
-                  <a:srgbClr val="6D28D9"/>
-                </a:solidFill>
-                <a:latin typeface="Aptos"/>
-                <a:ea typeface="Aptos"/>
-                <a:cs typeface="Aptos"/>
-              </a:rPr>
-              <a:t>Evaluación</a:t>
-            </a:r>
-            <a:endParaRPr sz="1100"/>
-          </a:p>
-        </p:txBody>
-      </p:sp>
-      <p:sp>
-        <p:nvSpPr>
-          <p:cNvPr id="28" name="Text 26">
-            <a:extLst xmlns:a="http://schemas.openxmlformats.org/drawingml/2006/main">
-              <a:ext uri="{FF2B5EF4-FFF2-40B4-BE49-F238E27FC236}">
-                <a16:creationId xmlns:a16="http://schemas.microsoft.com/office/drawing/2014/main" id="{C9BFFD0E-9F01-4CB8-A331-EF333B93EFB0}"/>
-              </a:ext>
-            </a:extLst>
-          </p:cNvPr>
-          <p:cNvSpPr>
-            <a:spLocks xmlns:a="http://schemas.openxmlformats.org/drawingml/2006/main" noGrp="1"/>
-          </p:cNvSpPr>
-          <p:nvPr/>
-        </p:nvSpPr>
-        <p:spPr>
-          <a:xfrm xmlns:a="http://schemas.openxmlformats.org/drawingml/2006/main">
-            <a:off x="7589520" y="3310128"/>
-            <a:ext cx="1783080" cy="411480"/>
-          </a:xfrm>
-          <a:prstGeom xmlns:a="http://schemas.openxmlformats.org/drawingml/2006/main" prst="rect">
-            <a:avLst/>
-          </a:prstGeom>
-          <a:noFill xmlns:a="http://schemas.openxmlformats.org/drawingml/2006/main"/>
-        </p:spPr>
-        <p:txBody>
-          <a:bodyPr xmlns:a="http://schemas.openxmlformats.org/drawingml/2006/main" wrap="square" lIns="0" tIns="0" rIns="0" bIns="0" anchor="ctr">
-            <a:normAutofit/>
-          </a:bodyPr>
-          <a:lstStyle xmlns:a="http://schemas.openxmlformats.org/drawingml/2006/main"/>
-          <a:p xmlns:a="http://schemas.openxmlformats.org/drawingml/2006/main">
-            <a:pPr marL="0" indent="0" algn="ctr">
-              <a:buNone/>
-            </a:pPr>
-            <a:r>
-              <a:rPr sz="880">
-                <a:solidFill>
-                  <a:srgbClr val="64748B"/>
-                </a:solidFill>
-              </a:rPr>
-              <a:t>patrones, sensibilidad y límites</a:t>
-            </a:r>
-            <a:endParaRPr sz="880"/>
-          </a:p>
-        </p:txBody>
-      </p:sp>
-      <p:sp>
-        <p:nvSpPr>
-          <p:cNvPr id="29" name="Shape 27">
-            <a:extLst xmlns:a="http://schemas.openxmlformats.org/drawingml/2006/main">
-              <a:ext uri="{FF2B5EF4-FFF2-40B4-BE49-F238E27FC236}">
-                <a16:creationId xmlns:a16="http://schemas.microsoft.com/office/drawing/2014/main" id="{C991B1EA-2938-480F-8027-1C3D80C96367}"/>
-              </a:ext>
-            </a:extLst>
-          </p:cNvPr>
-          <p:cNvSpPr>
-            <a:spLocks xmlns:a="http://schemas.openxmlformats.org/drawingml/2006/main" noGrp="1"/>
-          </p:cNvSpPr>
-          <p:nvPr/>
-        </p:nvSpPr>
-        <p:spPr>
-          <a:xfrm xmlns:a="http://schemas.openxmlformats.org/drawingml/2006/main">
-            <a:off x="10515600" y="1828800"/>
-            <a:ext cx="530352" cy="530352"/>
-          </a:xfrm>
-          <a:prstGeom xmlns:a="http://schemas.openxmlformats.org/drawingml/2006/main" prst="ellipse">
-            <a:avLst/>
-          </a:prstGeom>
-          <a:solidFill xmlns:a="http://schemas.openxmlformats.org/drawingml/2006/main">
-            <a:srgbClr val="6D28D9"/>
-          </a:solidFill>
-          <a:ln xmlns:a="http://schemas.openxmlformats.org/drawingml/2006/main" w="12700">
-            <a:solidFill>
-              <a:srgbClr val="6D28D9"/>
-            </a:solidFill>
-            <a:prstDash val="solid"/>
-          </a:ln>
-        </p:spPr>
-        <p:txBody xmlns:a="http://schemas.openxmlformats.org/drawingml/2006/main">
-          <a:bodyPr/>
-          <a:p/>
-        </p:txBody>
-      </p:sp>
-      <p:sp>
-        <p:nvSpPr>
-          <p:cNvPr id="30" name="Text 28">
-            <a:extLst xmlns:a="http://schemas.openxmlformats.org/drawingml/2006/main">
-              <a:ext uri="{FF2B5EF4-FFF2-40B4-BE49-F238E27FC236}">
-                <a16:creationId xmlns:a16="http://schemas.microsoft.com/office/drawing/2014/main" id="{77DE8E95-2198-4283-B69D-6A03CE6E2230}"/>
-              </a:ext>
-            </a:extLst>
-          </p:cNvPr>
-          <p:cNvSpPr>
-            <a:spLocks xmlns:a="http://schemas.openxmlformats.org/drawingml/2006/main" noGrp="1"/>
-          </p:cNvSpPr>
-          <p:nvPr/>
-        </p:nvSpPr>
-        <p:spPr>
-          <a:xfrm xmlns:a="http://schemas.openxmlformats.org/drawingml/2006/main">
-            <a:off x="10515600" y="1947672"/>
-            <a:ext cx="530352" cy="164592"/>
-          </a:xfrm>
-          <a:prstGeom xmlns:a="http://schemas.openxmlformats.org/drawingml/2006/main" prst="rect">
-            <a:avLst/>
-          </a:prstGeom>
-          <a:noFill xmlns:a="http://schemas.openxmlformats.org/drawingml/2006/main"/>
-        </p:spPr>
-        <p:txBody>
-          <a:bodyPr xmlns:a="http://schemas.openxmlformats.org/drawingml/2006/main" wrap="square" lIns="0" tIns="0" rIns="0" bIns="0" anchor="ctr"/>
-          <a:lstStyle xmlns:a="http://schemas.openxmlformats.org/drawingml/2006/main"/>
-          <a:p xmlns:a="http://schemas.openxmlformats.org/drawingml/2006/main">
-            <a:pPr marL="0" indent="0" algn="ctr">
-              <a:buNone/>
-            </a:pPr>
-            <a:r>
-              <a:rPr sz="900" b="1">
-                <a:solidFill>
-                  <a:srgbClr val="FFFFFF"/>
-                </a:solidFill>
-              </a:rPr>
-              <a:t>5</a:t>
-            </a:r>
-            <a:endParaRPr sz="900"/>
-          </a:p>
-        </p:txBody>
-      </p:sp>
-      <p:sp>
-        <p:nvSpPr>
-          <p:cNvPr id="31" name="Shape 29">
-            <a:extLst xmlns:a="http://schemas.openxmlformats.org/drawingml/2006/main">
-              <a:ext uri="{FF2B5EF4-FFF2-40B4-BE49-F238E27FC236}">
-                <a16:creationId xmlns:a16="http://schemas.microsoft.com/office/drawing/2014/main" id="{09D3E577-31FE-4093-A208-32F316074B9E}"/>
-              </a:ext>
-            </a:extLst>
-          </p:cNvPr>
-          <p:cNvSpPr>
-            <a:spLocks xmlns:a="http://schemas.openxmlformats.org/drawingml/2006/main" noGrp="1"/>
-          </p:cNvSpPr>
-          <p:nvPr/>
-        </p:nvSpPr>
-        <p:spPr>
-          <a:xfrm xmlns:a="http://schemas.openxmlformats.org/drawingml/2006/main">
-            <a:off x="9966960" y="2743200"/>
-            <a:ext cx="1691640" cy="438912"/>
-          </a:xfrm>
-          <a:prstGeom xmlns:a="http://schemas.openxmlformats.org/drawingml/2006/main" prst="roundRect">
-            <a:avLst>
-              <a:gd name="adj" fmla="val 16667"/>
-            </a:avLst>
-          </a:prstGeom>
-          <a:solidFill xmlns:a="http://schemas.openxmlformats.org/drawingml/2006/main">
-            <a:srgbClr val="FFFFFF"/>
-          </a:solidFill>
-          <a:ln xmlns:a="http://schemas.openxmlformats.org/drawingml/2006/main" w="10160">
-            <a:solidFill>
-              <a:srgbClr val="6D28D9"/>
-            </a:solidFill>
-            <a:prstDash val="solid"/>
-          </a:ln>
-        </p:spPr>
-        <p:txBody xmlns:a="http://schemas.openxmlformats.org/drawingml/2006/main">
-          <a:bodyPr/>
-          <a:p/>
-        </p:txBody>
-      </p:sp>
-      <p:sp>
-        <p:nvSpPr>
-          <p:cNvPr id="32" name="Text 30">
-            <a:extLst xmlns:a="http://schemas.openxmlformats.org/drawingml/2006/main">
-              <a:ext uri="{FF2B5EF4-FFF2-40B4-BE49-F238E27FC236}">
-                <a16:creationId xmlns:a16="http://schemas.microsoft.com/office/drawing/2014/main" id="{8B999FF4-8B77-4A9E-893C-FCD334D8C20A}"/>
-              </a:ext>
-            </a:extLst>
-          </p:cNvPr>
-          <p:cNvSpPr>
-            <a:spLocks xmlns:a="http://schemas.openxmlformats.org/drawingml/2006/main" noGrp="1"/>
-          </p:cNvSpPr>
-          <p:nvPr/>
-        </p:nvSpPr>
-        <p:spPr>
-          <a:xfrm xmlns:a="http://schemas.openxmlformats.org/drawingml/2006/main">
-            <a:off x="10076688" y="2834640"/>
-            <a:ext cx="1472184" cy="256032"/>
-          </a:xfrm>
-          <a:prstGeom xmlns:a="http://schemas.openxmlformats.org/drawingml/2006/main" prst="rect">
-            <a:avLst/>
-          </a:prstGeom>
-          <a:noFill xmlns:a="http://schemas.openxmlformats.org/drawingml/2006/main"/>
-        </p:spPr>
-        <p:txBody>
-          <a:bodyPr xmlns:a="http://schemas.openxmlformats.org/drawingml/2006/main" wrap="square" lIns="381" tIns="381" rIns="381" bIns="381" anchor="ctr">
-            <a:normAutofit fontScale="100000"/>
-          </a:bodyPr>
-          <a:lstStyle xmlns:a="http://schemas.openxmlformats.org/drawingml/2006/main"/>
-          <a:p xmlns:a="http://schemas.openxmlformats.org/drawingml/2006/main">
-            <a:pPr marL="0" indent="0" algn="ctr">
-              <a:buNone/>
-            </a:pPr>
-            <a:r>
-              <a:rPr sz="1100" b="1">
-                <a:solidFill>
-                  <a:srgbClr val="6D28D9"/>
-                </a:solidFill>
-                <a:latin typeface="Aptos"/>
-                <a:ea typeface="Aptos"/>
-                <a:cs typeface="Aptos"/>
-              </a:rPr>
-              <a:t>Tesis y defensa</a:t>
-            </a:r>
-            <a:endParaRPr sz="1100"/>
-          </a:p>
-        </p:txBody>
-      </p:sp>
-      <p:sp>
-        <p:nvSpPr>
-          <p:cNvPr id="33" name="Text 31">
-            <a:extLst xmlns:a="http://schemas.openxmlformats.org/drawingml/2006/main">
-              <a:ext uri="{FF2B5EF4-FFF2-40B4-BE49-F238E27FC236}">
-                <a16:creationId xmlns:a16="http://schemas.microsoft.com/office/drawing/2014/main" id="{D618EDC3-19CC-4E98-96B8-312E07ADC2F1}"/>
-              </a:ext>
-            </a:extLst>
-          </p:cNvPr>
-          <p:cNvSpPr>
-            <a:spLocks xmlns:a="http://schemas.openxmlformats.org/drawingml/2006/main" noGrp="1"/>
-          </p:cNvSpPr>
-          <p:nvPr/>
-        </p:nvSpPr>
-        <p:spPr>
-          <a:xfrm xmlns:a="http://schemas.openxmlformats.org/drawingml/2006/main">
-            <a:off x="9921240" y="3310128"/>
-            <a:ext cx="1783080" cy="411480"/>
-          </a:xfrm>
-          <a:prstGeom xmlns:a="http://schemas.openxmlformats.org/drawingml/2006/main" prst="rect">
-            <a:avLst/>
-          </a:prstGeom>
-          <a:noFill xmlns:a="http://schemas.openxmlformats.org/drawingml/2006/main"/>
-        </p:spPr>
-        <p:txBody>
-          <a:bodyPr xmlns:a="http://schemas.openxmlformats.org/drawingml/2006/main" wrap="square" lIns="0" tIns="0" rIns="0" bIns="0" anchor="ctr">
-            <a:normAutofit fontScale="100000"/>
-          </a:bodyPr>
-          <a:lstStyle xmlns:a="http://schemas.openxmlformats.org/drawingml/2006/main"/>
-          <a:p xmlns:a="http://schemas.openxmlformats.org/drawingml/2006/main">
-            <a:pPr marL="0" indent="0" algn="ctr">
-              <a:buNone/>
-            </a:pPr>
-            <a:r>
-              <a:rPr sz="880">
-                <a:solidFill>
-                  <a:srgbClr val="64748B"/>
-                </a:solidFill>
-              </a:rPr>
-              <a:t>capítulos y presentación</a:t>
-            </a:r>
-            <a:endParaRPr sz="880"/>
-          </a:p>
-        </p:txBody>
-      </p:sp>
-      <p:sp>
-        <p:nvSpPr>
-          <p:cNvPr id="34" name="Shape 32">
-            <a:extLst xmlns:a="http://schemas.openxmlformats.org/drawingml/2006/main">
-              <a:ext uri="{FF2B5EF4-FFF2-40B4-BE49-F238E27FC236}">
-                <a16:creationId xmlns:a16="http://schemas.microsoft.com/office/drawing/2014/main" id="{FE580889-FA1B-4E30-B4E5-77903E4817DA}"/>
-              </a:ext>
-            </a:extLst>
-          </p:cNvPr>
-          <p:cNvSpPr>
-            <a:spLocks xmlns:a="http://schemas.openxmlformats.org/drawingml/2006/main" noGrp="1"/>
-          </p:cNvSpPr>
-          <p:nvPr/>
-        </p:nvSpPr>
-        <p:spPr>
-          <a:xfrm xmlns:a="http://schemas.openxmlformats.org/drawingml/2006/main">
-            <a:off x="1280160" y="4800600"/>
-            <a:ext cx="9601200" cy="594360"/>
-          </a:xfrm>
-          <a:prstGeom xmlns:a="http://schemas.openxmlformats.org/drawingml/2006/main" prst="roundRect">
-            <a:avLst>
-              <a:gd name="adj" fmla="val 12308"/>
-            </a:avLst>
-          </a:prstGeom>
-          <a:solidFill xmlns:a="http://schemas.openxmlformats.org/drawingml/2006/main">
-            <a:srgbClr val="FFFFFF"/>
-          </a:solidFill>
-          <a:ln xmlns:a="http://schemas.openxmlformats.org/drawingml/2006/main" w="10160">
-            <a:solidFill>
-              <a:srgbClr val="CBD5E1"/>
-            </a:solidFill>
-            <a:prstDash val="solid"/>
-          </a:ln>
-        </p:spPr>
-        <p:txBody xmlns:a="http://schemas.openxmlformats.org/drawingml/2006/main">
-          <a:bodyPr/>
-          <a:p/>
-        </p:txBody>
-      </p:sp>
-      <p:sp>
-        <p:nvSpPr>
-          <p:cNvPr id="35" name="Text 33">
-            <a:extLst xmlns:a="http://schemas.openxmlformats.org/drawingml/2006/main">
-              <a:ext uri="{FF2B5EF4-FFF2-40B4-BE49-F238E27FC236}">
-                <a16:creationId xmlns:a16="http://schemas.microsoft.com/office/drawing/2014/main" id="{322F4BCB-CB97-4D27-A69E-32EFD823F956}"/>
-              </a:ext>
-            </a:extLst>
-          </p:cNvPr>
-          <p:cNvSpPr>
-            <a:spLocks xmlns:a="http://schemas.openxmlformats.org/drawingml/2006/main" noGrp="1"/>
-          </p:cNvSpPr>
-          <p:nvPr/>
-        </p:nvSpPr>
-        <p:spPr>
-          <a:xfrm xmlns:a="http://schemas.openxmlformats.org/drawingml/2006/main">
-            <a:off x="1444752" y="4928616"/>
-            <a:ext cx="9272016" cy="338328"/>
-          </a:xfrm>
-          <a:prstGeom xmlns:a="http://schemas.openxmlformats.org/drawingml/2006/main" prst="rect">
-            <a:avLst/>
-          </a:prstGeom>
-          <a:noFill xmlns:a="http://schemas.openxmlformats.org/drawingml/2006/main"/>
-        </p:spPr>
-        <p:txBody>
-          <a:bodyPr xmlns:a="http://schemas.openxmlformats.org/drawingml/2006/main" wrap="square" lIns="381" tIns="381" rIns="381" bIns="381" anchor="ctr">
-            <a:normAutofit fontScale="100000"/>
-          </a:bodyPr>
-          <a:lstStyle xmlns:a="http://schemas.openxmlformats.org/drawingml/2006/main"/>
-          <a:p xmlns:a="http://schemas.openxmlformats.org/drawingml/2006/main">
-            <a:pPr marL="0" indent="0">
-              <a:buNone/>
-            </a:pPr>
-            <a:r>
-              <a:rPr sz="1120">
-                <a:solidFill>
-                  <a:srgbClr val="334155"/>
-                </a:solidFill>
-                <a:latin typeface="Aptos"/>
-                <a:ea typeface="Aptos"/>
-                <a:cs typeface="Aptos"/>
-              </a:rPr>
-              <a:t>Gate I cerró en 3f44f30. Se proponen 129 workflows: 117 base y 12 estructurales. Requieren workers activos y decisión de ejecución.</a:t>
-            </a:r>
-            <a:endParaRPr sz="1120"/>
           </a:p>
         </p:txBody>
       </p:sp>
@@ -13537,9 +13110,10 @@
             <a:prstDash val="solid"/>
           </a:ln>
         </p:spPr>
-        <p:txBody xmlns:a="http://schemas.openxmlformats.org/drawingml/2006/main">
-          <a:bodyPr/>
-          <a:p/>
+        <p:txBody>
+          <a:bodyPr xmlns:a="http://schemas.openxmlformats.org/drawingml/2006/main"/>
+          <a:lstStyle xmlns:a="http://schemas.openxmlformats.org/drawingml/2006/main"/>
+          <a:p xmlns:a="http://schemas.openxmlformats.org/drawingml/2006/main"/>
         </p:txBody>
       </p:sp>
       <p:sp>
@@ -13582,7 +13156,7 @@
                 <a:ea typeface="Aptos"/>
                 <a:cs typeface="Aptos"/>
               </a:rPr>
-              <a:t>Roadmap</a:t>
+              <a:t>Utilidad y alcance</a:t>
             </a:r>
             <a:endParaRPr sz="750"/>
           </a:p>
@@ -13631,6 +13205,913 @@
               <a:t>18</a:t>
             </a:r>
             <a:endParaRPr sz="800"/>
+          </a:p>
+        </p:txBody>
+      </p:sp>
+      <p:sp>
+        <p:nvSpPr>
+          <p:cNvPr id="39" name="practical-uses-heading">
+            <a:extLst xmlns:a="http://schemas.openxmlformats.org/drawingml/2006/main">
+              <a:ext uri="{FF2B5EF4-FFF2-40B4-BE49-F238E27FC236}">
+                <a16:creationId xmlns:a16="http://schemas.microsoft.com/office/drawing/2014/main" id="{F8DF18DA-F973-4BDE-B185-CAE81BFA31E3}"/>
+              </a:ext>
+            </a:extLst>
+          </p:cNvPr>
+          <p:cNvSpPr>
+            <a:spLocks xmlns:a="http://schemas.openxmlformats.org/drawingml/2006/main" noGrp="1"/>
+          </p:cNvSpPr>
+          <p:nvPr/>
+        </p:nvSpPr>
+        <p:spPr>
+          <a:xfrm xmlns:a="http://schemas.openxmlformats.org/drawingml/2006/main">
+            <a:off x="857250" y="1447800"/>
+            <a:ext cx="4762500" cy="333375"/>
+          </a:xfrm>
+          <a:prstGeom xmlns:a="http://schemas.openxmlformats.org/drawingml/2006/main" prst="rect">
+            <a:avLst/>
+          </a:prstGeom>
+          <a:noFill xmlns:a="http://schemas.openxmlformats.org/drawingml/2006/main"/>
+          <a:ln xmlns:a="http://schemas.openxmlformats.org/drawingml/2006/main" w="0">
+            <a:noFill/>
+            <a:prstDash val="solid"/>
+          </a:ln>
+        </p:spPr>
+        <p:txBody>
+          <a:bodyPr xmlns:a="http://schemas.openxmlformats.org/drawingml/2006/main" wrap="square" lIns="0" tIns="0" rIns="0" bIns="0" anchor="ctr">
+            <a:normAutofit fontScale="100000"/>
+          </a:bodyPr>
+          <a:lstStyle xmlns:a="http://schemas.openxmlformats.org/drawingml/2006/main"/>
+          <a:p xmlns:a="http://schemas.openxmlformats.org/drawingml/2006/main">
+            <a:pPr algn="l">
+              <a:defRPr sz="1500" b="1">
+                <a:solidFill>
+                  <a:srgbClr val="2563EB"/>
+                </a:solidFill>
+                <a:latin typeface="Aptos"/>
+                <a:ea typeface="Aptos"/>
+                <a:cs typeface="Aptos"/>
+              </a:defRPr>
+            </a:pPr>
+            <a:r>
+              <a:rPr sz="1500" b="1">
+                <a:solidFill>
+                  <a:srgbClr val="2563EB"/>
+                </a:solidFill>
+                <a:latin typeface="Aptos"/>
+                <a:ea typeface="Aptos"/>
+                <a:cs typeface="Aptos"/>
+              </a:rPr>
+              <a:t>PARA QUÉ SIRVE</a:t>
+            </a:r>
+          </a:p>
+        </p:txBody>
+      </p:sp>
+      <p:sp>
+        <p:nvSpPr>
+          <p:cNvPr id="40" name="measurement-limits-heading">
+            <a:extLst xmlns:a="http://schemas.openxmlformats.org/drawingml/2006/main">
+              <a:ext uri="{FF2B5EF4-FFF2-40B4-BE49-F238E27FC236}">
+                <a16:creationId xmlns:a16="http://schemas.microsoft.com/office/drawing/2014/main" id="{ECDD0248-D402-4A02-8F80-B30FE9201255}"/>
+              </a:ext>
+            </a:extLst>
+          </p:cNvPr>
+          <p:cNvSpPr>
+            <a:spLocks xmlns:a="http://schemas.openxmlformats.org/drawingml/2006/main" noGrp="1"/>
+          </p:cNvSpPr>
+          <p:nvPr/>
+        </p:nvSpPr>
+        <p:spPr>
+          <a:xfrm xmlns:a="http://schemas.openxmlformats.org/drawingml/2006/main">
+            <a:off x="6496050" y="1447800"/>
+            <a:ext cx="4762500" cy="333375"/>
+          </a:xfrm>
+          <a:prstGeom xmlns:a="http://schemas.openxmlformats.org/drawingml/2006/main" prst="rect">
+            <a:avLst/>
+          </a:prstGeom>
+          <a:noFill xmlns:a="http://schemas.openxmlformats.org/drawingml/2006/main"/>
+          <a:ln xmlns:a="http://schemas.openxmlformats.org/drawingml/2006/main" w="0">
+            <a:noFill/>
+            <a:prstDash val="solid"/>
+          </a:ln>
+        </p:spPr>
+        <p:txBody>
+          <a:bodyPr xmlns:a="http://schemas.openxmlformats.org/drawingml/2006/main" wrap="square" lIns="0" tIns="0" rIns="0" bIns="0" anchor="ctr">
+            <a:normAutofit fontScale="100000"/>
+          </a:bodyPr>
+          <a:lstStyle xmlns:a="http://schemas.openxmlformats.org/drawingml/2006/main"/>
+          <a:p xmlns:a="http://schemas.openxmlformats.org/drawingml/2006/main">
+            <a:pPr algn="l">
+              <a:defRPr sz="1500" b="1">
+                <a:solidFill>
+                  <a:srgbClr val="B91C1C"/>
+                </a:solidFill>
+                <a:latin typeface="Aptos"/>
+                <a:ea typeface="Aptos"/>
+                <a:cs typeface="Aptos"/>
+              </a:defRPr>
+            </a:pPr>
+            <a:r>
+              <a:rPr sz="1500" b="1">
+                <a:solidFill>
+                  <a:srgbClr val="B91C1C"/>
+                </a:solidFill>
+                <a:latin typeface="Aptos"/>
+                <a:ea typeface="Aptos"/>
+                <a:cs typeface="Aptos"/>
+              </a:rPr>
+              <a:t>QUÉ NO MIDE</a:t>
+            </a:r>
+          </a:p>
+        </p:txBody>
+      </p:sp>
+      <p:sp>
+        <p:nvSpPr>
+          <p:cNvPr id="41" name="column-divider">
+            <a:extLst xmlns:a="http://schemas.openxmlformats.org/drawingml/2006/main">
+              <a:ext uri="{FF2B5EF4-FFF2-40B4-BE49-F238E27FC236}">
+                <a16:creationId xmlns:a16="http://schemas.microsoft.com/office/drawing/2014/main" id="{F1D3D826-CD8F-4030-8675-1604FAFB959C}"/>
+              </a:ext>
+            </a:extLst>
+          </p:cNvPr>
+          <p:cNvSpPr>
+            <a:spLocks xmlns:a="http://schemas.openxmlformats.org/drawingml/2006/main" noGrp="1"/>
+          </p:cNvSpPr>
+          <p:nvPr/>
+        </p:nvSpPr>
+        <p:spPr>
+          <a:xfrm xmlns:a="http://schemas.openxmlformats.org/drawingml/2006/main">
+            <a:off x="6029325" y="1495425"/>
+            <a:ext cx="0" cy="3543300"/>
+          </a:xfrm>
+          <a:prstGeom xmlns:a="http://schemas.openxmlformats.org/drawingml/2006/main" prst="line">
+            <a:avLst/>
+          </a:prstGeom>
+          <a:noFill xmlns:a="http://schemas.openxmlformats.org/drawingml/2006/main"/>
+          <a:ln xmlns:a="http://schemas.openxmlformats.org/drawingml/2006/main" w="11430">
+            <a:solidFill>
+              <a:srgbClr val="CAD5E1"/>
+            </a:solidFill>
+            <a:prstDash val="solid"/>
+          </a:ln>
+        </p:spPr>
+      </p:sp>
+      <p:sp>
+        <p:nvSpPr>
+          <p:cNvPr id="42" name="use-1">
+            <a:extLst xmlns:a="http://schemas.openxmlformats.org/drawingml/2006/main">
+              <a:ext uri="{FF2B5EF4-FFF2-40B4-BE49-F238E27FC236}">
+                <a16:creationId xmlns:a16="http://schemas.microsoft.com/office/drawing/2014/main" id="{0CDEB657-A64E-4266-B95E-688ED5050378}"/>
+              </a:ext>
+            </a:extLst>
+          </p:cNvPr>
+          <p:cNvSpPr>
+            <a:spLocks xmlns:a="http://schemas.openxmlformats.org/drawingml/2006/main" noGrp="1"/>
+          </p:cNvSpPr>
+          <p:nvPr/>
+        </p:nvSpPr>
+        <p:spPr>
+          <a:xfrm xmlns:a="http://schemas.openxmlformats.org/drawingml/2006/main">
+            <a:off x="857250" y="1943100"/>
+            <a:ext cx="4762500" cy="533400"/>
+          </a:xfrm>
+          <a:prstGeom xmlns:a="http://schemas.openxmlformats.org/drawingml/2006/main" prst="rect">
+            <a:avLst/>
+          </a:prstGeom>
+          <a:noFill xmlns:a="http://schemas.openxmlformats.org/drawingml/2006/main"/>
+          <a:ln xmlns:a="http://schemas.openxmlformats.org/drawingml/2006/main" w="0">
+            <a:noFill/>
+            <a:prstDash val="solid"/>
+          </a:ln>
+        </p:spPr>
+        <p:txBody>
+          <a:bodyPr xmlns:a="http://schemas.openxmlformats.org/drawingml/2006/main" wrap="square" lIns="19050" tIns="19050" rIns="76200" bIns="19050" anchor="ctr">
+            <a:normAutofit fontScale="100000"/>
+          </a:bodyPr>
+          <a:lstStyle xmlns:a="http://schemas.openxmlformats.org/drawingml/2006/main"/>
+          <a:p xmlns:a="http://schemas.openxmlformats.org/drawingml/2006/main">
+            <a:pPr algn="l">
+              <a:defRPr sz="1500" b="0">
+                <a:solidFill>
+                  <a:srgbClr val="34485D"/>
+                </a:solidFill>
+                <a:latin typeface="Aptos"/>
+                <a:ea typeface="Aptos"/>
+                <a:cs typeface="Aptos"/>
+              </a:defRPr>
+            </a:pPr>
+            <a:r>
+              <a:rPr sz="1500" b="0">
+                <a:solidFill>
+                  <a:srgbClr val="34485D"/>
+                </a:solidFill>
+                <a:latin typeface="Aptos"/>
+                <a:ea typeface="Aptos"/>
+                <a:cs typeface="Aptos"/>
+              </a:rPr>
+              <a:t>•  Detectar movimiento científico adicional frente al mínimo lógico.</a:t>
+            </a:r>
+          </a:p>
+        </p:txBody>
+      </p:sp>
+      <p:sp>
+        <p:nvSpPr>
+          <p:cNvPr id="43" name="use-2">
+            <a:extLst xmlns:a="http://schemas.openxmlformats.org/drawingml/2006/main">
+              <a:ext uri="{FF2B5EF4-FFF2-40B4-BE49-F238E27FC236}">
+                <a16:creationId xmlns:a16="http://schemas.microsoft.com/office/drawing/2014/main" id="{C5EDCA86-6F5A-453B-AEE9-A3FADC10E80D}"/>
+              </a:ext>
+            </a:extLst>
+          </p:cNvPr>
+          <p:cNvSpPr>
+            <a:spLocks xmlns:a="http://schemas.openxmlformats.org/drawingml/2006/main" noGrp="1"/>
+          </p:cNvSpPr>
+          <p:nvPr/>
+        </p:nvSpPr>
+        <p:spPr>
+          <a:xfrm xmlns:a="http://schemas.openxmlformats.org/drawingml/2006/main">
+            <a:off x="857250" y="2562225"/>
+            <a:ext cx="4762500" cy="533400"/>
+          </a:xfrm>
+          <a:prstGeom xmlns:a="http://schemas.openxmlformats.org/drawingml/2006/main" prst="rect">
+            <a:avLst/>
+          </a:prstGeom>
+          <a:noFill xmlns:a="http://schemas.openxmlformats.org/drawingml/2006/main"/>
+          <a:ln xmlns:a="http://schemas.openxmlformats.org/drawingml/2006/main" w="0">
+            <a:noFill/>
+            <a:prstDash val="solid"/>
+          </a:ln>
+        </p:spPr>
+        <p:txBody>
+          <a:bodyPr xmlns:a="http://schemas.openxmlformats.org/drawingml/2006/main" wrap="square" lIns="19050" tIns="19050" rIns="76200" bIns="19050" anchor="ctr">
+            <a:normAutofit fontScale="100000"/>
+          </a:bodyPr>
+          <a:lstStyle xmlns:a="http://schemas.openxmlformats.org/drawingml/2006/main"/>
+          <a:p xmlns:a="http://schemas.openxmlformats.org/drawingml/2006/main">
+            <a:pPr algn="l">
+              <a:defRPr sz="1500" b="0">
+                <a:solidFill>
+                  <a:srgbClr val="34485D"/>
+                </a:solidFill>
+                <a:latin typeface="Aptos"/>
+                <a:ea typeface="Aptos"/>
+                <a:cs typeface="Aptos"/>
+              </a:defRPr>
+            </a:pPr>
+            <a:r>
+              <a:rPr sz="1500" b="0">
+                <a:solidFill>
+                  <a:srgbClr val="34485D"/>
+                </a:solidFill>
+                <a:latin typeface="Aptos"/>
+                <a:ea typeface="Aptos"/>
+                <a:cs typeface="Aptos"/>
+              </a:rPr>
+              <a:t>•  Diagnosticar staging y transferencias por job.</a:t>
+            </a:r>
+          </a:p>
+        </p:txBody>
+      </p:sp>
+      <p:sp>
+        <p:nvSpPr>
+          <p:cNvPr id="44" name="use-3">
+            <a:extLst xmlns:a="http://schemas.openxmlformats.org/drawingml/2006/main">
+              <a:ext uri="{FF2B5EF4-FFF2-40B4-BE49-F238E27FC236}">
+                <a16:creationId xmlns:a16="http://schemas.microsoft.com/office/drawing/2014/main" id="{6F039CB7-5989-47E7-9298-61C0349CFFFB}"/>
+              </a:ext>
+            </a:extLst>
+          </p:cNvPr>
+          <p:cNvSpPr>
+            <a:spLocks xmlns:a="http://schemas.openxmlformats.org/drawingml/2006/main" noGrp="1"/>
+          </p:cNvSpPr>
+          <p:nvPr/>
+        </p:nvSpPr>
+        <p:spPr>
+          <a:xfrm xmlns:a="http://schemas.openxmlformats.org/drawingml/2006/main">
+            <a:off x="857250" y="3181350"/>
+            <a:ext cx="4762500" cy="533400"/>
+          </a:xfrm>
+          <a:prstGeom xmlns:a="http://schemas.openxmlformats.org/drawingml/2006/main" prst="rect">
+            <a:avLst/>
+          </a:prstGeom>
+          <a:noFill xmlns:a="http://schemas.openxmlformats.org/drawingml/2006/main"/>
+          <a:ln xmlns:a="http://schemas.openxmlformats.org/drawingml/2006/main" w="0">
+            <a:noFill/>
+            <a:prstDash val="solid"/>
+          </a:ln>
+        </p:spPr>
+        <p:txBody>
+          <a:bodyPr xmlns:a="http://schemas.openxmlformats.org/drawingml/2006/main" wrap="square" lIns="19050" tIns="19050" rIns="76200" bIns="19050" anchor="ctr">
+            <a:normAutofit fontScale="100000"/>
+          </a:bodyPr>
+          <a:lstStyle xmlns:a="http://schemas.openxmlformats.org/drawingml/2006/main"/>
+          <a:p xmlns:a="http://schemas.openxmlformats.org/drawingml/2006/main">
+            <a:pPr algn="l">
+              <a:defRPr sz="1500" b="0">
+                <a:solidFill>
+                  <a:srgbClr val="34485D"/>
+                </a:solidFill>
+                <a:latin typeface="Aptos"/>
+                <a:ea typeface="Aptos"/>
+                <a:cs typeface="Aptos"/>
+              </a:defRPr>
+            </a:pPr>
+            <a:r>
+              <a:rPr sz="1500" b="0">
+                <a:solidFill>
+                  <a:srgbClr val="34485D"/>
+                </a:solidFill>
+                <a:latin typeface="Aptos"/>
+                <a:ea typeface="Aptos"/>
+                <a:cs typeface="Aptos"/>
+              </a:rPr>
+              <a:t>•  Comparar patrones de workflow y de placement.</a:t>
+            </a:r>
+          </a:p>
+        </p:txBody>
+      </p:sp>
+      <p:sp>
+        <p:nvSpPr>
+          <p:cNvPr id="45" name="use-4">
+            <a:extLst xmlns:a="http://schemas.openxmlformats.org/drawingml/2006/main">
+              <a:ext uri="{FF2B5EF4-FFF2-40B4-BE49-F238E27FC236}">
+                <a16:creationId xmlns:a16="http://schemas.microsoft.com/office/drawing/2014/main" id="{152F0369-F960-4B2A-8569-A6AB205A07D8}"/>
+              </a:ext>
+            </a:extLst>
+          </p:cNvPr>
+          <p:cNvSpPr>
+            <a:spLocks xmlns:a="http://schemas.openxmlformats.org/drawingml/2006/main" noGrp="1"/>
+          </p:cNvSpPr>
+          <p:nvPr/>
+        </p:nvSpPr>
+        <p:spPr>
+          <a:xfrm xmlns:a="http://schemas.openxmlformats.org/drawingml/2006/main">
+            <a:off x="857250" y="3800475"/>
+            <a:ext cx="4762500" cy="533400"/>
+          </a:xfrm>
+          <a:prstGeom xmlns:a="http://schemas.openxmlformats.org/drawingml/2006/main" prst="rect">
+            <a:avLst/>
+          </a:prstGeom>
+          <a:noFill xmlns:a="http://schemas.openxmlformats.org/drawingml/2006/main"/>
+          <a:ln xmlns:a="http://schemas.openxmlformats.org/drawingml/2006/main" w="0">
+            <a:noFill/>
+            <a:prstDash val="solid"/>
+          </a:ln>
+        </p:spPr>
+        <p:txBody>
+          <a:bodyPr xmlns:a="http://schemas.openxmlformats.org/drawingml/2006/main" wrap="square" lIns="19050" tIns="19050" rIns="76200" bIns="19050" anchor="ctr">
+            <a:normAutofit fontScale="100000"/>
+          </a:bodyPr>
+          <a:lstStyle xmlns:a="http://schemas.openxmlformats.org/drawingml/2006/main"/>
+          <a:p xmlns:a="http://schemas.openxmlformats.org/drawingml/2006/main">
+            <a:pPr algn="l">
+              <a:defRPr sz="1500" b="0">
+                <a:solidFill>
+                  <a:srgbClr val="34485D"/>
+                </a:solidFill>
+                <a:latin typeface="Aptos"/>
+                <a:ea typeface="Aptos"/>
+                <a:cs typeface="Aptos"/>
+              </a:defRPr>
+            </a:pPr>
+            <a:r>
+              <a:rPr sz="1500" b="0">
+                <a:solidFill>
+                  <a:srgbClr val="34485D"/>
+                </a:solidFill>
+                <a:latin typeface="Aptos"/>
+                <a:ea typeface="Aptos"/>
+                <a:cs typeface="Aptos"/>
+              </a:rPr>
+              <a:t>•  Informar decisiones de arquitectura con evidencia trazable.</a:t>
+            </a:r>
+          </a:p>
+        </p:txBody>
+      </p:sp>
+      <p:sp>
+        <p:nvSpPr>
+          <p:cNvPr id="46" name="use-5">
+            <a:extLst xmlns:a="http://schemas.openxmlformats.org/drawingml/2006/main">
+              <a:ext uri="{FF2B5EF4-FFF2-40B4-BE49-F238E27FC236}">
+                <a16:creationId xmlns:a16="http://schemas.microsoft.com/office/drawing/2014/main" id="{5F9F2064-1EC4-43C7-94E2-01D287DA87A3}"/>
+              </a:ext>
+            </a:extLst>
+          </p:cNvPr>
+          <p:cNvSpPr>
+            <a:spLocks xmlns:a="http://schemas.openxmlformats.org/drawingml/2006/main" noGrp="1"/>
+          </p:cNvSpPr>
+          <p:nvPr/>
+        </p:nvSpPr>
+        <p:spPr>
+          <a:xfrm xmlns:a="http://schemas.openxmlformats.org/drawingml/2006/main">
+            <a:off x="857250" y="4419600"/>
+            <a:ext cx="4762500" cy="533400"/>
+          </a:xfrm>
+          <a:prstGeom xmlns:a="http://schemas.openxmlformats.org/drawingml/2006/main" prst="rect">
+            <a:avLst/>
+          </a:prstGeom>
+          <a:noFill xmlns:a="http://schemas.openxmlformats.org/drawingml/2006/main"/>
+          <a:ln xmlns:a="http://schemas.openxmlformats.org/drawingml/2006/main" w="0">
+            <a:noFill/>
+            <a:prstDash val="solid"/>
+          </a:ln>
+        </p:spPr>
+        <p:txBody>
+          <a:bodyPr xmlns:a="http://schemas.openxmlformats.org/drawingml/2006/main" wrap="square" lIns="19050" tIns="19050" rIns="76200" bIns="19050" anchor="ctr">
+            <a:normAutofit fontScale="100000"/>
+          </a:bodyPr>
+          <a:lstStyle xmlns:a="http://schemas.openxmlformats.org/drawingml/2006/main"/>
+          <a:p xmlns:a="http://schemas.openxmlformats.org/drawingml/2006/main">
+            <a:pPr algn="l">
+              <a:defRPr sz="1500" b="0">
+                <a:solidFill>
+                  <a:srgbClr val="34485D"/>
+                </a:solidFill>
+                <a:latin typeface="Aptos"/>
+                <a:ea typeface="Aptos"/>
+                <a:cs typeface="Aptos"/>
+              </a:defRPr>
+            </a:pPr>
+            <a:r>
+              <a:rPr sz="1500" b="0">
+                <a:solidFill>
+                  <a:srgbClr val="34485D"/>
+                </a:solidFill>
+                <a:latin typeface="Aptos"/>
+                <a:ea typeface="Aptos"/>
+                <a:cs typeface="Aptos"/>
+              </a:rPr>
+              <a:t>•  Evitar conclusiones de rendimiento que los datos no respaldan.</a:t>
+            </a:r>
+          </a:p>
+        </p:txBody>
+      </p:sp>
+      <p:sp>
+        <p:nvSpPr>
+          <p:cNvPr id="47" name="limit-1">
+            <a:extLst xmlns:a="http://schemas.openxmlformats.org/drawingml/2006/main">
+              <a:ext uri="{FF2B5EF4-FFF2-40B4-BE49-F238E27FC236}">
+                <a16:creationId xmlns:a16="http://schemas.microsoft.com/office/drawing/2014/main" id="{AFF9347B-7C63-425E-8640-DC5E13439157}"/>
+              </a:ext>
+            </a:extLst>
+          </p:cNvPr>
+          <p:cNvSpPr>
+            <a:spLocks xmlns:a="http://schemas.openxmlformats.org/drawingml/2006/main" noGrp="1"/>
+          </p:cNvSpPr>
+          <p:nvPr/>
+        </p:nvSpPr>
+        <p:spPr>
+          <a:xfrm xmlns:a="http://schemas.openxmlformats.org/drawingml/2006/main">
+            <a:off x="6496050" y="1885950"/>
+            <a:ext cx="4762500" cy="409575"/>
+          </a:xfrm>
+          <a:prstGeom xmlns:a="http://schemas.openxmlformats.org/drawingml/2006/main" prst="rect">
+            <a:avLst/>
+          </a:prstGeom>
+          <a:noFill xmlns:a="http://schemas.openxmlformats.org/drawingml/2006/main"/>
+          <a:ln xmlns:a="http://schemas.openxmlformats.org/drawingml/2006/main" w="0">
+            <a:noFill/>
+            <a:prstDash val="solid"/>
+          </a:ln>
+        </p:spPr>
+        <p:txBody>
+          <a:bodyPr xmlns:a="http://schemas.openxmlformats.org/drawingml/2006/main" wrap="square" lIns="19050" tIns="19050" rIns="76200" bIns="19050" anchor="ctr">
+            <a:normAutofit fontScale="100000"/>
+          </a:bodyPr>
+          <a:lstStyle xmlns:a="http://schemas.openxmlformats.org/drawingml/2006/main"/>
+          <a:p xmlns:a="http://schemas.openxmlformats.org/drawingml/2006/main">
+            <a:pPr algn="l">
+              <a:defRPr sz="1500" b="0">
+                <a:solidFill>
+                  <a:srgbClr val="34485D"/>
+                </a:solidFill>
+                <a:latin typeface="Aptos"/>
+                <a:ea typeface="Aptos"/>
+                <a:cs typeface="Aptos"/>
+              </a:defRPr>
+            </a:pPr>
+            <a:r>
+              <a:rPr sz="1500" b="0">
+                <a:solidFill>
+                  <a:srgbClr val="34485D"/>
+                </a:solidFill>
+                <a:latin typeface="Aptos"/>
+                <a:ea typeface="Aptos"/>
+                <a:cs typeface="Aptos"/>
+              </a:rPr>
+              <a:t>•  No mide FLOPs.</a:t>
+            </a:r>
+          </a:p>
+        </p:txBody>
+      </p:sp>
+      <p:sp>
+        <p:nvSpPr>
+          <p:cNvPr id="48" name="limit-2">
+            <a:extLst xmlns:a="http://schemas.openxmlformats.org/drawingml/2006/main">
+              <a:ext uri="{FF2B5EF4-FFF2-40B4-BE49-F238E27FC236}">
+                <a16:creationId xmlns:a16="http://schemas.microsoft.com/office/drawing/2014/main" id="{A58C1A40-F07A-4A01-81D8-1363F139C037}"/>
+              </a:ext>
+            </a:extLst>
+          </p:cNvPr>
+          <p:cNvSpPr>
+            <a:spLocks xmlns:a="http://schemas.openxmlformats.org/drawingml/2006/main" noGrp="1"/>
+          </p:cNvSpPr>
+          <p:nvPr/>
+        </p:nvSpPr>
+        <p:spPr>
+          <a:xfrm xmlns:a="http://schemas.openxmlformats.org/drawingml/2006/main">
+            <a:off x="6496050" y="2352675"/>
+            <a:ext cx="4762500" cy="409575"/>
+          </a:xfrm>
+          <a:prstGeom xmlns:a="http://schemas.openxmlformats.org/drawingml/2006/main" prst="rect">
+            <a:avLst/>
+          </a:prstGeom>
+          <a:noFill xmlns:a="http://schemas.openxmlformats.org/drawingml/2006/main"/>
+          <a:ln xmlns:a="http://schemas.openxmlformats.org/drawingml/2006/main" w="0">
+            <a:noFill/>
+            <a:prstDash val="solid"/>
+          </a:ln>
+        </p:spPr>
+        <p:txBody>
+          <a:bodyPr xmlns:a="http://schemas.openxmlformats.org/drawingml/2006/main" wrap="square" lIns="19050" tIns="19050" rIns="76200" bIns="19050" anchor="ctr">
+            <a:normAutofit fontScale="100000"/>
+          </a:bodyPr>
+          <a:lstStyle xmlns:a="http://schemas.openxmlformats.org/drawingml/2006/main"/>
+          <a:p xmlns:a="http://schemas.openxmlformats.org/drawingml/2006/main">
+            <a:pPr algn="l">
+              <a:defRPr sz="1500" b="0">
+                <a:solidFill>
+                  <a:srgbClr val="34485D"/>
+                </a:solidFill>
+                <a:latin typeface="Aptos"/>
+                <a:ea typeface="Aptos"/>
+                <a:cs typeface="Aptos"/>
+              </a:defRPr>
+            </a:pPr>
+            <a:r>
+              <a:rPr sz="1500" b="0">
+                <a:solidFill>
+                  <a:srgbClr val="34485D"/>
+                </a:solidFill>
+                <a:latin typeface="Aptos"/>
+                <a:ea typeface="Aptos"/>
+                <a:cs typeface="Aptos"/>
+              </a:rPr>
+              <a:t>•  No mide la utilización de CPU/GPU.</a:t>
+            </a:r>
+          </a:p>
+        </p:txBody>
+      </p:sp>
+      <p:sp>
+        <p:nvSpPr>
+          <p:cNvPr id="49" name="limit-3">
+            <a:extLst xmlns:a="http://schemas.openxmlformats.org/drawingml/2006/main">
+              <a:ext uri="{FF2B5EF4-FFF2-40B4-BE49-F238E27FC236}">
+                <a16:creationId xmlns:a16="http://schemas.microsoft.com/office/drawing/2014/main" id="{DCF02707-40D1-4FED-8166-E8BA5232FA29}"/>
+              </a:ext>
+            </a:extLst>
+          </p:cNvPr>
+          <p:cNvSpPr>
+            <a:spLocks xmlns:a="http://schemas.openxmlformats.org/drawingml/2006/main" noGrp="1"/>
+          </p:cNvSpPr>
+          <p:nvPr/>
+        </p:nvSpPr>
+        <p:spPr>
+          <a:xfrm xmlns:a="http://schemas.openxmlformats.org/drawingml/2006/main">
+            <a:off x="6496050" y="2819400"/>
+            <a:ext cx="4762500" cy="409575"/>
+          </a:xfrm>
+          <a:prstGeom xmlns:a="http://schemas.openxmlformats.org/drawingml/2006/main" prst="rect">
+            <a:avLst/>
+          </a:prstGeom>
+          <a:noFill xmlns:a="http://schemas.openxmlformats.org/drawingml/2006/main"/>
+          <a:ln xmlns:a="http://schemas.openxmlformats.org/drawingml/2006/main" w="0">
+            <a:noFill/>
+            <a:prstDash val="solid"/>
+          </a:ln>
+        </p:spPr>
+        <p:txBody>
+          <a:bodyPr xmlns:a="http://schemas.openxmlformats.org/drawingml/2006/main" wrap="square" lIns="19050" tIns="19050" rIns="76200" bIns="19050" anchor="ctr">
+            <a:normAutofit fontScale="100000"/>
+          </a:bodyPr>
+          <a:lstStyle xmlns:a="http://schemas.openxmlformats.org/drawingml/2006/main"/>
+          <a:p xmlns:a="http://schemas.openxmlformats.org/drawingml/2006/main">
+            <a:pPr algn="l">
+              <a:defRPr sz="1500" b="0">
+                <a:solidFill>
+                  <a:srgbClr val="34485D"/>
+                </a:solidFill>
+                <a:latin typeface="Aptos"/>
+                <a:ea typeface="Aptos"/>
+                <a:cs typeface="Aptos"/>
+              </a:defRPr>
+            </a:pPr>
+            <a:r>
+              <a:rPr sz="1500" b="0">
+                <a:solidFill>
+                  <a:srgbClr val="34485D"/>
+                </a:solidFill>
+                <a:latin typeface="Aptos"/>
+                <a:ea typeface="Aptos"/>
+                <a:cs typeface="Aptos"/>
+              </a:rPr>
+              <a:t>•  No mide el runtime directamente.</a:t>
+            </a:r>
+          </a:p>
+        </p:txBody>
+      </p:sp>
+      <p:sp>
+        <p:nvSpPr>
+          <p:cNvPr id="50" name="limit-4">
+            <a:extLst xmlns:a="http://schemas.openxmlformats.org/drawingml/2006/main">
+              <a:ext uri="{FF2B5EF4-FFF2-40B4-BE49-F238E27FC236}">
+                <a16:creationId xmlns:a16="http://schemas.microsoft.com/office/drawing/2014/main" id="{0D5E5418-5B69-4722-B14C-F5C97922A6C6}"/>
+              </a:ext>
+            </a:extLst>
+          </p:cNvPr>
+          <p:cNvSpPr>
+            <a:spLocks xmlns:a="http://schemas.openxmlformats.org/drawingml/2006/main" noGrp="1"/>
+          </p:cNvSpPr>
+          <p:nvPr/>
+        </p:nvSpPr>
+        <p:spPr>
+          <a:xfrm xmlns:a="http://schemas.openxmlformats.org/drawingml/2006/main">
+            <a:off x="6496050" y="3286125"/>
+            <a:ext cx="4762500" cy="409575"/>
+          </a:xfrm>
+          <a:prstGeom xmlns:a="http://schemas.openxmlformats.org/drawingml/2006/main" prst="rect">
+            <a:avLst/>
+          </a:prstGeom>
+          <a:noFill xmlns:a="http://schemas.openxmlformats.org/drawingml/2006/main"/>
+          <a:ln xmlns:a="http://schemas.openxmlformats.org/drawingml/2006/main" w="0">
+            <a:noFill/>
+            <a:prstDash val="solid"/>
+          </a:ln>
+        </p:spPr>
+        <p:txBody>
+          <a:bodyPr xmlns:a="http://schemas.openxmlformats.org/drawingml/2006/main" wrap="square" lIns="19050" tIns="19050" rIns="76200" bIns="19050" anchor="ctr">
+            <a:normAutofit fontScale="100000"/>
+          </a:bodyPr>
+          <a:lstStyle xmlns:a="http://schemas.openxmlformats.org/drawingml/2006/main"/>
+          <a:p xmlns:a="http://schemas.openxmlformats.org/drawingml/2006/main">
+            <a:pPr algn="l">
+              <a:defRPr sz="1500" b="0">
+                <a:solidFill>
+                  <a:srgbClr val="34485D"/>
+                </a:solidFill>
+                <a:latin typeface="Aptos"/>
+                <a:ea typeface="Aptos"/>
+                <a:cs typeface="Aptos"/>
+              </a:defRPr>
+            </a:pPr>
+            <a:r>
+              <a:rPr sz="1500" b="0">
+                <a:solidFill>
+                  <a:srgbClr val="34485D"/>
+                </a:solidFill>
+                <a:latin typeface="Aptos"/>
+                <a:ea typeface="Aptos"/>
+                <a:cs typeface="Aptos"/>
+              </a:rPr>
+              <a:t>•  No mide el ancho de banda.</a:t>
+            </a:r>
+          </a:p>
+        </p:txBody>
+      </p:sp>
+      <p:sp>
+        <p:nvSpPr>
+          <p:cNvPr id="51" name="limit-5">
+            <a:extLst xmlns:a="http://schemas.openxmlformats.org/drawingml/2006/main">
+              <a:ext uri="{FF2B5EF4-FFF2-40B4-BE49-F238E27FC236}">
+                <a16:creationId xmlns:a16="http://schemas.microsoft.com/office/drawing/2014/main" id="{40A1AB62-669B-4F13-A03E-AC2E50486C3F}"/>
+              </a:ext>
+            </a:extLst>
+          </p:cNvPr>
+          <p:cNvSpPr>
+            <a:spLocks xmlns:a="http://schemas.openxmlformats.org/drawingml/2006/main" noGrp="1"/>
+          </p:cNvSpPr>
+          <p:nvPr/>
+        </p:nvSpPr>
+        <p:spPr>
+          <a:xfrm xmlns:a="http://schemas.openxmlformats.org/drawingml/2006/main">
+            <a:off x="6496050" y="3752850"/>
+            <a:ext cx="4762500" cy="409575"/>
+          </a:xfrm>
+          <a:prstGeom xmlns:a="http://schemas.openxmlformats.org/drawingml/2006/main" prst="rect">
+            <a:avLst/>
+          </a:prstGeom>
+          <a:noFill xmlns:a="http://schemas.openxmlformats.org/drawingml/2006/main"/>
+          <a:ln xmlns:a="http://schemas.openxmlformats.org/drawingml/2006/main" w="0">
+            <a:noFill/>
+            <a:prstDash val="solid"/>
+          </a:ln>
+        </p:spPr>
+        <p:txBody>
+          <a:bodyPr xmlns:a="http://schemas.openxmlformats.org/drawingml/2006/main" wrap="square" lIns="19050" tIns="19050" rIns="76200" bIns="19050" anchor="ctr">
+            <a:normAutofit fontScale="100000"/>
+          </a:bodyPr>
+          <a:lstStyle xmlns:a="http://schemas.openxmlformats.org/drawingml/2006/main"/>
+          <a:p xmlns:a="http://schemas.openxmlformats.org/drawingml/2006/main">
+            <a:pPr algn="l">
+              <a:defRPr sz="1500" b="0">
+                <a:solidFill>
+                  <a:srgbClr val="34485D"/>
+                </a:solidFill>
+                <a:latin typeface="Aptos"/>
+                <a:ea typeface="Aptos"/>
+                <a:cs typeface="Aptos"/>
+              </a:defRPr>
+            </a:pPr>
+            <a:r>
+              <a:rPr sz="1500" b="0">
+                <a:solidFill>
+                  <a:srgbClr val="34485D"/>
+                </a:solidFill>
+                <a:latin typeface="Aptos"/>
+                <a:ea typeface="Aptos"/>
+                <a:cs typeface="Aptos"/>
+              </a:rPr>
+              <a:t>•  No mide el costo económico.</a:t>
+            </a:r>
+          </a:p>
+        </p:txBody>
+      </p:sp>
+      <p:sp>
+        <p:nvSpPr>
+          <p:cNvPr id="52" name="limit-6">
+            <a:extLst xmlns:a="http://schemas.openxmlformats.org/drawingml/2006/main">
+              <a:ext uri="{FF2B5EF4-FFF2-40B4-BE49-F238E27FC236}">
+                <a16:creationId xmlns:a16="http://schemas.microsoft.com/office/drawing/2014/main" id="{D2B59896-8ED1-4BA4-BA26-E9E1C8DA5F23}"/>
+              </a:ext>
+            </a:extLst>
+          </p:cNvPr>
+          <p:cNvSpPr>
+            <a:spLocks xmlns:a="http://schemas.openxmlformats.org/drawingml/2006/main" noGrp="1"/>
+          </p:cNvSpPr>
+          <p:nvPr/>
+        </p:nvSpPr>
+        <p:spPr>
+          <a:xfrm xmlns:a="http://schemas.openxmlformats.org/drawingml/2006/main">
+            <a:off x="6496050" y="4219575"/>
+            <a:ext cx="4762500" cy="409575"/>
+          </a:xfrm>
+          <a:prstGeom xmlns:a="http://schemas.openxmlformats.org/drawingml/2006/main" prst="rect">
+            <a:avLst/>
+          </a:prstGeom>
+          <a:noFill xmlns:a="http://schemas.openxmlformats.org/drawingml/2006/main"/>
+          <a:ln xmlns:a="http://schemas.openxmlformats.org/drawingml/2006/main" w="0">
+            <a:noFill/>
+            <a:prstDash val="solid"/>
+          </a:ln>
+        </p:spPr>
+        <p:txBody>
+          <a:bodyPr xmlns:a="http://schemas.openxmlformats.org/drawingml/2006/main" wrap="square" lIns="19050" tIns="19050" rIns="76200" bIns="19050" anchor="ctr">
+            <a:normAutofit fontScale="100000"/>
+          </a:bodyPr>
+          <a:lstStyle xmlns:a="http://schemas.openxmlformats.org/drawingml/2006/main"/>
+          <a:p xmlns:a="http://schemas.openxmlformats.org/drawingml/2006/main">
+            <a:pPr algn="l">
+              <a:defRPr sz="1500" b="0">
+                <a:solidFill>
+                  <a:srgbClr val="34485D"/>
+                </a:solidFill>
+                <a:latin typeface="Aptos"/>
+                <a:ea typeface="Aptos"/>
+                <a:cs typeface="Aptos"/>
+              </a:defRPr>
+            </a:pPr>
+            <a:r>
+              <a:rPr sz="1500" b="0">
+                <a:solidFill>
+                  <a:srgbClr val="34485D"/>
+                </a:solidFill>
+                <a:latin typeface="Aptos"/>
+                <a:ea typeface="Aptos"/>
+                <a:cs typeface="Aptos"/>
+              </a:rPr>
+              <a:t>•  No mide la optimalidad del scheduler.</a:t>
+            </a:r>
+          </a:p>
+        </p:txBody>
+      </p:sp>
+      <p:sp>
+        <p:nvSpPr>
+          <p:cNvPr id="53" name="limit-7">
+            <a:extLst xmlns:a="http://schemas.openxmlformats.org/drawingml/2006/main">
+              <a:ext uri="{FF2B5EF4-FFF2-40B4-BE49-F238E27FC236}">
+                <a16:creationId xmlns:a16="http://schemas.microsoft.com/office/drawing/2014/main" id="{0B426135-EE4F-492E-BFE8-C79777AB7194}"/>
+              </a:ext>
+            </a:extLst>
+          </p:cNvPr>
+          <p:cNvSpPr>
+            <a:spLocks xmlns:a="http://schemas.openxmlformats.org/drawingml/2006/main" noGrp="1"/>
+          </p:cNvSpPr>
+          <p:nvPr/>
+        </p:nvSpPr>
+        <p:spPr>
+          <a:xfrm xmlns:a="http://schemas.openxmlformats.org/drawingml/2006/main">
+            <a:off x="6496050" y="4686300"/>
+            <a:ext cx="4762500" cy="409575"/>
+          </a:xfrm>
+          <a:prstGeom xmlns:a="http://schemas.openxmlformats.org/drawingml/2006/main" prst="rect">
+            <a:avLst/>
+          </a:prstGeom>
+          <a:noFill xmlns:a="http://schemas.openxmlformats.org/drawingml/2006/main"/>
+          <a:ln xmlns:a="http://schemas.openxmlformats.org/drawingml/2006/main" w="0">
+            <a:noFill/>
+            <a:prstDash val="solid"/>
+          </a:ln>
+        </p:spPr>
+        <p:txBody>
+          <a:bodyPr xmlns:a="http://schemas.openxmlformats.org/drawingml/2006/main" wrap="square" lIns="19050" tIns="19050" rIns="76200" bIns="19050" anchor="ctr">
+            <a:normAutofit fontScale="100000"/>
+          </a:bodyPr>
+          <a:lstStyle xmlns:a="http://schemas.openxmlformats.org/drawingml/2006/main"/>
+          <a:p xmlns:a="http://schemas.openxmlformats.org/drawingml/2006/main">
+            <a:pPr algn="l">
+              <a:defRPr sz="1500" b="0">
+                <a:solidFill>
+                  <a:srgbClr val="34485D"/>
+                </a:solidFill>
+                <a:latin typeface="Aptos"/>
+                <a:ea typeface="Aptos"/>
+                <a:cs typeface="Aptos"/>
+              </a:defRPr>
+            </a:pPr>
+            <a:r>
+              <a:rPr sz="1500" b="0">
+                <a:solidFill>
+                  <a:srgbClr val="34485D"/>
+                </a:solidFill>
+                <a:latin typeface="Aptos"/>
+                <a:ea typeface="Aptos"/>
+                <a:cs typeface="Aptos"/>
+              </a:rPr>
+              <a:t>•  No optimiza el placement.</a:t>
+            </a:r>
+          </a:p>
+        </p:txBody>
+      </p:sp>
+      <p:sp>
+        <p:nvSpPr>
+          <p:cNvPr id="54" name="measurement-scope-summary">
+            <a:extLst xmlns:a="http://schemas.openxmlformats.org/drawingml/2006/main">
+              <a:ext uri="{FF2B5EF4-FFF2-40B4-BE49-F238E27FC236}">
+                <a16:creationId xmlns:a16="http://schemas.microsoft.com/office/drawing/2014/main" id="{762FF22E-F0E8-4703-86D1-7D222AB8AFC6}"/>
+              </a:ext>
+            </a:extLst>
+          </p:cNvPr>
+          <p:cNvSpPr>
+            <a:spLocks xmlns:a="http://schemas.openxmlformats.org/drawingml/2006/main" noGrp="1"/>
+          </p:cNvSpPr>
+          <p:nvPr/>
+        </p:nvSpPr>
+        <p:spPr>
+          <a:xfrm xmlns:a="http://schemas.openxmlformats.org/drawingml/2006/main">
+            <a:off x="990600" y="5324475"/>
+            <a:ext cx="10210800" cy="533400"/>
+          </a:xfrm>
+          <a:prstGeom xmlns:a="http://schemas.openxmlformats.org/drawingml/2006/main" prst="roundRect">
+            <a:avLst>
+              <a:gd name="adj" fmla="val 12500"/>
+            </a:avLst>
+          </a:prstGeom>
+          <a:solidFill xmlns:a="http://schemas.openxmlformats.org/drawingml/2006/main">
+            <a:srgbClr val="EAF2FF"/>
+          </a:solidFill>
+          <a:ln xmlns:a="http://schemas.openxmlformats.org/drawingml/2006/main" w="9525">
+            <a:solidFill>
+              <a:srgbClr val="A8C4EA"/>
+            </a:solidFill>
+            <a:prstDash val="solid"/>
+          </a:ln>
+        </p:spPr>
+        <p:txBody>
+          <a:bodyPr xmlns:a="http://schemas.openxmlformats.org/drawingml/2006/main" lIns="114300" tIns="57150" rIns="114300" bIns="57150" anchor="ctr">
+            <a:normAutofit fontScale="100000"/>
+          </a:bodyPr>
+          <a:lstStyle xmlns:a="http://schemas.openxmlformats.org/drawingml/2006/main"/>
+          <a:p xmlns:a="http://schemas.openxmlformats.org/drawingml/2006/main">
+            <a:pPr algn="ctr">
+              <a:defRPr sz="1425" b="1">
+                <a:solidFill>
+                  <a:srgbClr val="142D45"/>
+                </a:solidFill>
+                <a:latin typeface="Aptos"/>
+                <a:ea typeface="Aptos"/>
+                <a:cs typeface="Aptos"/>
+              </a:defRPr>
+            </a:pPr>
+            <a:r>
+              <a:rPr sz="1425" b="1">
+                <a:solidFill>
+                  <a:srgbClr val="142D45"/>
+                </a:solidFill>
+                <a:latin typeface="Aptos"/>
+                <a:ea typeface="Aptos"/>
+                <a:cs typeface="Aptos"/>
+              </a:rPr>
+              <a:t>DME compara movimiento científico confirmado con el mínimo lógico para el placement que ocurrió.</a:t>
+            </a:r>
           </a:p>
         </p:txBody>
       </p:sp>
